--- a/презентация_по_курсовому_проекту.pptx
+++ b/презентация_по_курсовому_проекту.pptx
@@ -2,21 +2,21 @@
 <file path=ppt/presentation.xml><?xml version="1.0" encoding="utf-8"?>
 <p:presentation xmlns:a="http://schemas.openxmlformats.org/drawingml/2006/main" xmlns:r="http://schemas.openxmlformats.org/officeDocument/2006/relationships" xmlns:p="http://schemas.openxmlformats.org/presentationml/2006/main" saveSubsetFonts="1">
   <p:sldMasterIdLst>
-    <p:sldMasterId id="2147483660" r:id="rId1"/>
+    <p:sldMasterId id="2147483794" r:id="rId1"/>
   </p:sldMasterIdLst>
   <p:notesMasterIdLst>
     <p:notesMasterId r:id="rId11"/>
   </p:notesMasterIdLst>
   <p:sldIdLst>
     <p:sldId id="256" r:id="rId2"/>
-    <p:sldId id="257" r:id="rId3"/>
-    <p:sldId id="258" r:id="rId4"/>
-    <p:sldId id="259" r:id="rId5"/>
-    <p:sldId id="260" r:id="rId6"/>
-    <p:sldId id="261" r:id="rId7"/>
-    <p:sldId id="262" r:id="rId8"/>
-    <p:sldId id="263" r:id="rId9"/>
-    <p:sldId id="265" r:id="rId10"/>
+    <p:sldId id="258" r:id="rId3"/>
+    <p:sldId id="259" r:id="rId4"/>
+    <p:sldId id="260" r:id="rId5"/>
+    <p:sldId id="261" r:id="rId6"/>
+    <p:sldId id="262" r:id="rId7"/>
+    <p:sldId id="263" r:id="rId8"/>
+    <p:sldId id="265" r:id="rId9"/>
+    <p:sldId id="266" r:id="rId10"/>
   </p:sldIdLst>
   <p:sldSz cx="12192000" cy="6858000"/>
   <p:notesSz cx="6858000" cy="9144000"/>
@@ -205,7 +205,7 @@
           <a:p>
             <a:fld id="{55EDE6FC-CFBC-4812-8EF6-3DA101A146F3}" type="datetimeFigureOut">
               <a:rPr lang="ru-RU" smtClean="0"/>
-              <a:t>30.10.2025</a:t>
+              <a:t>05.11.2025</a:t>
             </a:fld>
             <a:endParaRPr lang="ru-RU"/>
           </a:p>
@@ -537,7 +537,7 @@
           <a:p>
             <a:fld id="{C9488380-DBA8-45F4-9AC6-1B530902590E}" type="slidenum">
               <a:rPr lang="ru-RU" smtClean="0"/>
-              <a:t>8</a:t>
+              <a:t>7</a:t>
             </a:fld>
             <a:endParaRPr lang="ru-RU"/>
           </a:p>
@@ -557,7 +557,7 @@
 </file>
 
 <file path=ppt/slideLayouts/slideLayout1.xml><?xml version="1.0" encoding="utf-8"?>
-<p:sldLayout xmlns:a="http://schemas.openxmlformats.org/drawingml/2006/main" xmlns:r="http://schemas.openxmlformats.org/officeDocument/2006/relationships" xmlns:p="http://schemas.openxmlformats.org/presentationml/2006/main" showMasterSp="0" type="title" preserve="1">
+<p:sldLayout xmlns:a="http://schemas.openxmlformats.org/drawingml/2006/main" xmlns:r="http://schemas.openxmlformats.org/officeDocument/2006/relationships" xmlns:p="http://schemas.openxmlformats.org/presentationml/2006/main" type="title" preserve="1">
   <p:cSld name="Титульный слайд">
     <p:spTree>
       <p:nvGrpSpPr>
@@ -575,7 +575,13 @@
       </p:grpSpPr>
       <p:sp>
         <p:nvSpPr>
-          <p:cNvPr id="2" name="Title 1"/>
+          <p:cNvPr id="2" name="Заголовок 1">
+            <a:extLst>
+              <a:ext uri="{FF2B5EF4-FFF2-40B4-BE49-F238E27FC236}">
+                <a16:creationId xmlns:a16="http://schemas.microsoft.com/office/drawing/2014/main" id="{3926FF0B-69D4-19D0-8DEA-54C1DBB36A70}"/>
+              </a:ext>
+            </a:extLst>
+          </p:cNvPr>
           <p:cNvSpPr>
             <a:spLocks noGrp="1"/>
           </p:cNvSpPr>
@@ -585,19 +591,15 @@
         </p:nvSpPr>
         <p:spPr>
           <a:xfrm>
-            <a:off x="684212" y="685799"/>
-            <a:ext cx="8001000" cy="2971801"/>
+            <a:off x="1524000" y="1122363"/>
+            <a:ext cx="9144000" cy="2387600"/>
           </a:xfrm>
         </p:spPr>
         <p:txBody>
-          <a:bodyPr anchor="b">
-            <a:normAutofit/>
-          </a:bodyPr>
+          <a:bodyPr anchor="b"/>
           <a:lstStyle>
-            <a:lvl1pPr algn="l">
-              <a:defRPr sz="4800">
-                <a:effectLst/>
-              </a:defRPr>
+            <a:lvl1pPr algn="ctr">
+              <a:defRPr sz="6000"/>
             </a:lvl1pPr>
           </a:lstStyle>
           <a:p>
@@ -605,13 +607,18 @@
               <a:rPr lang="ru-RU"/>
               <a:t>Образец заголовка</a:t>
             </a:r>
-            <a:endParaRPr lang="en-US" dirty="0"/>
-          </a:p>
-        </p:txBody>
-      </p:sp>
-      <p:sp>
-        <p:nvSpPr>
-          <p:cNvPr id="3" name="Subtitle 2"/>
+          </a:p>
+        </p:txBody>
+      </p:sp>
+      <p:sp>
+        <p:nvSpPr>
+          <p:cNvPr id="3" name="Подзаголовок 2">
+            <a:extLst>
+              <a:ext uri="{FF2B5EF4-FFF2-40B4-BE49-F238E27FC236}">
+                <a16:creationId xmlns:a16="http://schemas.microsoft.com/office/drawing/2014/main" id="{4A15B442-E2F5-E17E-80B8-E229868EE7FA}"/>
+              </a:ext>
+            </a:extLst>
+          </p:cNvPr>
           <p:cNvSpPr>
             <a:spLocks noGrp="1"/>
           </p:cNvSpPr>
@@ -621,104 +628,48 @@
         </p:nvSpPr>
         <p:spPr>
           <a:xfrm>
-            <a:off x="684212" y="3843867"/>
-            <a:ext cx="6400800" cy="1947333"/>
+            <a:off x="1524000" y="3602038"/>
+            <a:ext cx="9144000" cy="1655762"/>
           </a:xfrm>
         </p:spPr>
         <p:txBody>
-          <a:bodyPr anchor="t">
-            <a:normAutofit/>
-          </a:bodyPr>
+          <a:bodyPr/>
           <a:lstStyle>
-            <a:lvl1pPr marL="0" indent="0" algn="l">
+            <a:lvl1pPr marL="0" indent="0" algn="ctr">
               <a:buNone/>
-              <a:defRPr sz="2100">
-                <a:solidFill>
-                  <a:schemeClr val="bg2">
-                    <a:lumMod val="75000"/>
-                  </a:schemeClr>
-                </a:solidFill>
-              </a:defRPr>
+              <a:defRPr sz="2400"/>
             </a:lvl1pPr>
             <a:lvl2pPr marL="457200" indent="0" algn="ctr">
               <a:buNone/>
-              <a:defRPr>
-                <a:solidFill>
-                  <a:schemeClr val="tx1">
-                    <a:tint val="75000"/>
-                  </a:schemeClr>
-                </a:solidFill>
-              </a:defRPr>
+              <a:defRPr sz="2000"/>
             </a:lvl2pPr>
             <a:lvl3pPr marL="914400" indent="0" algn="ctr">
               <a:buNone/>
-              <a:defRPr>
-                <a:solidFill>
-                  <a:schemeClr val="tx1">
-                    <a:tint val="75000"/>
-                  </a:schemeClr>
-                </a:solidFill>
-              </a:defRPr>
+              <a:defRPr sz="1800"/>
             </a:lvl3pPr>
             <a:lvl4pPr marL="1371600" indent="0" algn="ctr">
               <a:buNone/>
-              <a:defRPr>
-                <a:solidFill>
-                  <a:schemeClr val="tx1">
-                    <a:tint val="75000"/>
-                  </a:schemeClr>
-                </a:solidFill>
-              </a:defRPr>
+              <a:defRPr sz="1600"/>
             </a:lvl4pPr>
             <a:lvl5pPr marL="1828800" indent="0" algn="ctr">
               <a:buNone/>
-              <a:defRPr>
-                <a:solidFill>
-                  <a:schemeClr val="tx1">
-                    <a:tint val="75000"/>
-                  </a:schemeClr>
-                </a:solidFill>
-              </a:defRPr>
+              <a:defRPr sz="1600"/>
             </a:lvl5pPr>
             <a:lvl6pPr marL="2286000" indent="0" algn="ctr">
               <a:buNone/>
-              <a:defRPr>
-                <a:solidFill>
-                  <a:schemeClr val="tx1">
-                    <a:tint val="75000"/>
-                  </a:schemeClr>
-                </a:solidFill>
-              </a:defRPr>
+              <a:defRPr sz="1600"/>
             </a:lvl6pPr>
             <a:lvl7pPr marL="2743200" indent="0" algn="ctr">
               <a:buNone/>
-              <a:defRPr>
-                <a:solidFill>
-                  <a:schemeClr val="tx1">
-                    <a:tint val="75000"/>
-                  </a:schemeClr>
-                </a:solidFill>
-              </a:defRPr>
+              <a:defRPr sz="1600"/>
             </a:lvl7pPr>
             <a:lvl8pPr marL="3200400" indent="0" algn="ctr">
               <a:buNone/>
-              <a:defRPr>
-                <a:solidFill>
-                  <a:schemeClr val="tx1">
-                    <a:tint val="75000"/>
-                  </a:schemeClr>
-                </a:solidFill>
-              </a:defRPr>
+              <a:defRPr sz="1600"/>
             </a:lvl8pPr>
             <a:lvl9pPr marL="3657600" indent="0" algn="ctr">
               <a:buNone/>
-              <a:defRPr>
-                <a:solidFill>
-                  <a:schemeClr val="tx1">
-                    <a:tint val="75000"/>
-                  </a:schemeClr>
-                </a:solidFill>
-              </a:defRPr>
+              <a:defRPr sz="1600"/>
             </a:lvl9pPr>
           </a:lstStyle>
           <a:p>
@@ -726,13 +677,18 @@
               <a:rPr lang="ru-RU"/>
               <a:t>Образец подзаголовка</a:t>
             </a:r>
-            <a:endParaRPr lang="en-US" dirty="0"/>
-          </a:p>
-        </p:txBody>
-      </p:sp>
-      <p:sp>
-        <p:nvSpPr>
-          <p:cNvPr id="4" name="Date Placeholder 3"/>
+          </a:p>
+        </p:txBody>
+      </p:sp>
+      <p:sp>
+        <p:nvSpPr>
+          <p:cNvPr id="4" name="Дата 3">
+            <a:extLst>
+              <a:ext uri="{FF2B5EF4-FFF2-40B4-BE49-F238E27FC236}">
+                <a16:creationId xmlns:a16="http://schemas.microsoft.com/office/drawing/2014/main" id="{DD107C93-89E9-BD09-4D21-78BE53A0A018}"/>
+              </a:ext>
+            </a:extLst>
+          </p:cNvPr>
           <p:cNvSpPr>
             <a:spLocks noGrp="1"/>
           </p:cNvSpPr>
@@ -747,7 +703,7 @@
           <a:p>
             <a:fld id="{5489760F-A808-480A-84F8-01DD6B446E6A}" type="datetimeFigureOut">
               <a:rPr lang="ru-RU" smtClean="0"/>
-              <a:t>30.10.2025</a:t>
+              <a:t>05.11.2025</a:t>
             </a:fld>
             <a:endParaRPr lang="ru-RU"/>
           </a:p>
@@ -755,7 +711,13 @@
       </p:sp>
       <p:sp>
         <p:nvSpPr>
-          <p:cNvPr id="5" name="Footer Placeholder 4"/>
+          <p:cNvPr id="5" name="Нижний колонтитул 4">
+            <a:extLst>
+              <a:ext uri="{FF2B5EF4-FFF2-40B4-BE49-F238E27FC236}">
+                <a16:creationId xmlns:a16="http://schemas.microsoft.com/office/drawing/2014/main" id="{AB261B3D-1825-FF8D-F10D-3639A0C11828}"/>
+              </a:ext>
+            </a:extLst>
+          </p:cNvPr>
           <p:cNvSpPr>
             <a:spLocks noGrp="1"/>
           </p:cNvSpPr>
@@ -774,7 +736,13 @@
       </p:sp>
       <p:sp>
         <p:nvSpPr>
-          <p:cNvPr id="6" name="Slide Number Placeholder 5"/>
+          <p:cNvPr id="6" name="Номер слайда 5">
+            <a:extLst>
+              <a:ext uri="{FF2B5EF4-FFF2-40B4-BE49-F238E27FC236}">
+                <a16:creationId xmlns:a16="http://schemas.microsoft.com/office/drawing/2014/main" id="{1D2032C4-5874-478D-F0BC-A2B5AE86C75D}"/>
+              </a:ext>
+            </a:extLst>
+          </p:cNvPr>
           <p:cNvSpPr>
             <a:spLocks noGrp="1"/>
           </p:cNvSpPr>
@@ -795,185 +763,10 @@
           </a:p>
         </p:txBody>
       </p:sp>
-      <p:cxnSp>
-        <p:nvCxnSpPr>
-          <p:cNvPr id="16" name="Straight Connector 15"/>
-          <p:cNvCxnSpPr/>
-          <p:nvPr/>
-        </p:nvCxnSpPr>
-        <p:spPr>
-          <a:xfrm flipH="1">
-            <a:off x="8228012" y="8467"/>
-            <a:ext cx="3810000" cy="3810000"/>
-          </a:xfrm>
-          <a:prstGeom prst="line">
-            <a:avLst/>
-          </a:prstGeom>
-          <a:ln w="12700">
-            <a:solidFill>
-              <a:schemeClr val="tx1"/>
-            </a:solidFill>
-          </a:ln>
-        </p:spPr>
-        <p:style>
-          <a:lnRef idx="2">
-            <a:schemeClr val="accent1"/>
-          </a:lnRef>
-          <a:fillRef idx="0">
-            <a:schemeClr val="accent1"/>
-          </a:fillRef>
-          <a:effectRef idx="1">
-            <a:schemeClr val="accent1"/>
-          </a:effectRef>
-          <a:fontRef idx="minor">
-            <a:schemeClr val="tx1"/>
-          </a:fontRef>
-        </p:style>
-      </p:cxnSp>
-      <p:cxnSp>
-        <p:nvCxnSpPr>
-          <p:cNvPr id="17" name="Straight Connector 16"/>
-          <p:cNvCxnSpPr/>
-          <p:nvPr/>
-        </p:nvCxnSpPr>
-        <p:spPr>
-          <a:xfrm flipH="1">
-            <a:off x="6108170" y="91545"/>
-            <a:ext cx="6080655" cy="6080655"/>
-          </a:xfrm>
-          <a:prstGeom prst="line">
-            <a:avLst/>
-          </a:prstGeom>
-          <a:ln w="12700">
-            <a:solidFill>
-              <a:schemeClr val="tx1"/>
-            </a:solidFill>
-          </a:ln>
-        </p:spPr>
-        <p:style>
-          <a:lnRef idx="2">
-            <a:schemeClr val="accent1"/>
-          </a:lnRef>
-          <a:fillRef idx="0">
-            <a:schemeClr val="accent1"/>
-          </a:fillRef>
-          <a:effectRef idx="1">
-            <a:schemeClr val="accent1"/>
-          </a:effectRef>
-          <a:fontRef idx="minor">
-            <a:schemeClr val="tx1"/>
-          </a:fontRef>
-        </p:style>
-      </p:cxnSp>
-      <p:cxnSp>
-        <p:nvCxnSpPr>
-          <p:cNvPr id="19" name="Straight Connector 18"/>
-          <p:cNvCxnSpPr/>
-          <p:nvPr/>
-        </p:nvCxnSpPr>
-        <p:spPr>
-          <a:xfrm flipH="1">
-            <a:off x="7235825" y="228600"/>
-            <a:ext cx="4953000" cy="4953000"/>
-          </a:xfrm>
-          <a:prstGeom prst="line">
-            <a:avLst/>
-          </a:prstGeom>
-          <a:ln w="12700">
-            <a:solidFill>
-              <a:schemeClr val="tx1"/>
-            </a:solidFill>
-          </a:ln>
-        </p:spPr>
-        <p:style>
-          <a:lnRef idx="2">
-            <a:schemeClr val="accent1"/>
-          </a:lnRef>
-          <a:fillRef idx="0">
-            <a:schemeClr val="accent1"/>
-          </a:fillRef>
-          <a:effectRef idx="1">
-            <a:schemeClr val="accent1"/>
-          </a:effectRef>
-          <a:fontRef idx="minor">
-            <a:schemeClr val="tx1"/>
-          </a:fontRef>
-        </p:style>
-      </p:cxnSp>
-      <p:cxnSp>
-        <p:nvCxnSpPr>
-          <p:cNvPr id="21" name="Straight Connector 20"/>
-          <p:cNvCxnSpPr/>
-          <p:nvPr/>
-        </p:nvCxnSpPr>
-        <p:spPr>
-          <a:xfrm flipH="1">
-            <a:off x="7335837" y="32278"/>
-            <a:ext cx="4852989" cy="4852989"/>
-          </a:xfrm>
-          <a:prstGeom prst="line">
-            <a:avLst/>
-          </a:prstGeom>
-          <a:ln w="31750">
-            <a:solidFill>
-              <a:schemeClr val="tx1"/>
-            </a:solidFill>
-          </a:ln>
-        </p:spPr>
-        <p:style>
-          <a:lnRef idx="2">
-            <a:schemeClr val="accent1"/>
-          </a:lnRef>
-          <a:fillRef idx="0">
-            <a:schemeClr val="accent1"/>
-          </a:fillRef>
-          <a:effectRef idx="1">
-            <a:schemeClr val="accent1"/>
-          </a:effectRef>
-          <a:fontRef idx="minor">
-            <a:schemeClr val="tx1"/>
-          </a:fontRef>
-        </p:style>
-      </p:cxnSp>
-      <p:cxnSp>
-        <p:nvCxnSpPr>
-          <p:cNvPr id="23" name="Straight Connector 22"/>
-          <p:cNvCxnSpPr/>
-          <p:nvPr/>
-        </p:nvCxnSpPr>
-        <p:spPr>
-          <a:xfrm flipH="1">
-            <a:off x="7845426" y="609601"/>
-            <a:ext cx="4343399" cy="4343399"/>
-          </a:xfrm>
-          <a:prstGeom prst="line">
-            <a:avLst/>
-          </a:prstGeom>
-          <a:ln w="31750">
-            <a:solidFill>
-              <a:schemeClr val="tx1"/>
-            </a:solidFill>
-          </a:ln>
-        </p:spPr>
-        <p:style>
-          <a:lnRef idx="2">
-            <a:schemeClr val="accent1"/>
-          </a:lnRef>
-          <a:fillRef idx="0">
-            <a:schemeClr val="accent1"/>
-          </a:fillRef>
-          <a:effectRef idx="1">
-            <a:schemeClr val="accent1"/>
-          </a:effectRef>
-          <a:fontRef idx="minor">
-            <a:schemeClr val="tx1"/>
-          </a:fontRef>
-        </p:style>
-      </p:cxnSp>
     </p:spTree>
     <p:extLst>
       <p:ext uri="{BB962C8B-B14F-4D97-AF65-F5344CB8AC3E}">
-        <p14:creationId xmlns:p14="http://schemas.microsoft.com/office/powerpoint/2010/main" val="1137032335"/>
+        <p14:creationId xmlns:p14="http://schemas.microsoft.com/office/powerpoint/2010/main" val="3730361283"/>
       </p:ext>
     </p:extLst>
   </p:cSld>
@@ -984,1812 +777,6 @@
 </file>
 
 <file path=ppt/slideLayouts/slideLayout10.xml><?xml version="1.0" encoding="utf-8"?>
-<p:sldLayout xmlns:a="http://schemas.openxmlformats.org/drawingml/2006/main" xmlns:r="http://schemas.openxmlformats.org/officeDocument/2006/relationships" xmlns:p="http://schemas.openxmlformats.org/presentationml/2006/main" preserve="1">
-  <p:cSld name="Панорамная фотография с подписью">
-    <p:spTree>
-      <p:nvGrpSpPr>
-        <p:cNvPr id="1" name=""/>
-        <p:cNvGrpSpPr/>
-        <p:nvPr/>
-      </p:nvGrpSpPr>
-      <p:grpSpPr>
-        <a:xfrm>
-          <a:off x="0" y="0"/>
-          <a:ext cx="0" cy="0"/>
-          <a:chOff x="0" y="0"/>
-          <a:chExt cx="0" cy="0"/>
-        </a:xfrm>
-      </p:grpSpPr>
-      <p:sp>
-        <p:nvSpPr>
-          <p:cNvPr id="2" name="Title 1"/>
-          <p:cNvSpPr>
-            <a:spLocks noGrp="1"/>
-          </p:cNvSpPr>
-          <p:nvPr>
-            <p:ph type="title"/>
-          </p:nvPr>
-        </p:nvSpPr>
-        <p:spPr/>
-        <p:txBody>
-          <a:bodyPr/>
-          <a:lstStyle/>
-          <a:p>
-            <a:r>
-              <a:rPr lang="ru-RU"/>
-              <a:t>Образец заголовка</a:t>
-            </a:r>
-            <a:endParaRPr lang="en-US" dirty="0"/>
-          </a:p>
-        </p:txBody>
-      </p:sp>
-      <p:sp>
-        <p:nvSpPr>
-          <p:cNvPr id="17" name="Picture Placeholder 2"/>
-          <p:cNvSpPr>
-            <a:spLocks noGrp="1" noChangeAspect="1"/>
-          </p:cNvSpPr>
-          <p:nvPr>
-            <p:ph type="pic" idx="13"/>
-          </p:nvPr>
-        </p:nvSpPr>
-        <p:spPr>
-          <a:xfrm>
-            <a:off x="685800" y="533400"/>
-            <a:ext cx="10818812" cy="3124200"/>
-          </a:xfrm>
-          <a:prstGeom prst="snip2DiagRect">
-            <a:avLst>
-              <a:gd name="adj1" fmla="val 10815"/>
-              <a:gd name="adj2" fmla="val 0"/>
-            </a:avLst>
-          </a:prstGeom>
-          <a:ln w="15875">
-            <a:solidFill>
-              <a:schemeClr val="tx1">
-                <a:alpha val="40000"/>
-              </a:schemeClr>
-            </a:solidFill>
-          </a:ln>
-          <a:effectLst>
-            <a:innerShdw blurRad="57150" dist="38100" dir="14460000">
-              <a:srgbClr val="000000">
-                <a:alpha val="70000"/>
-              </a:srgbClr>
-            </a:innerShdw>
-          </a:effectLst>
-        </p:spPr>
-        <p:txBody>
-          <a:bodyPr anchor="t">
-            <a:normAutofit/>
-          </a:bodyPr>
-          <a:lstStyle>
-            <a:lvl1pPr marL="0" indent="0" algn="ctr">
-              <a:buNone/>
-              <a:defRPr sz="1600"/>
-            </a:lvl1pPr>
-            <a:lvl2pPr marL="457200" indent="0">
-              <a:buNone/>
-              <a:defRPr sz="1600"/>
-            </a:lvl2pPr>
-            <a:lvl3pPr marL="914400" indent="0">
-              <a:buNone/>
-              <a:defRPr sz="1600"/>
-            </a:lvl3pPr>
-            <a:lvl4pPr marL="1371600" indent="0">
-              <a:buNone/>
-              <a:defRPr sz="1600"/>
-            </a:lvl4pPr>
-            <a:lvl5pPr marL="1828800" indent="0">
-              <a:buNone/>
-              <a:defRPr sz="1600"/>
-            </a:lvl5pPr>
-            <a:lvl6pPr marL="2286000" indent="0">
-              <a:buNone/>
-              <a:defRPr sz="1600"/>
-            </a:lvl6pPr>
-            <a:lvl7pPr marL="2743200" indent="0">
-              <a:buNone/>
-              <a:defRPr sz="1600"/>
-            </a:lvl7pPr>
-            <a:lvl8pPr marL="3200400" indent="0">
-              <a:buNone/>
-              <a:defRPr sz="1600"/>
-            </a:lvl8pPr>
-            <a:lvl9pPr marL="3657600" indent="0">
-              <a:buNone/>
-              <a:defRPr sz="1600"/>
-            </a:lvl9pPr>
-          </a:lstStyle>
-          <a:p>
-            <a:r>
-              <a:rPr lang="ru-RU"/>
-              <a:t>Вставка рисунка</a:t>
-            </a:r>
-            <a:endParaRPr lang="en-US" dirty="0"/>
-          </a:p>
-        </p:txBody>
-      </p:sp>
-      <p:sp>
-        <p:nvSpPr>
-          <p:cNvPr id="16" name="Text Placeholder 9"/>
-          <p:cNvSpPr>
-            <a:spLocks noGrp="1"/>
-          </p:cNvSpPr>
-          <p:nvPr>
-            <p:ph type="body" sz="quarter" idx="14"/>
-          </p:nvPr>
-        </p:nvSpPr>
-        <p:spPr>
-          <a:xfrm>
-            <a:off x="914402" y="3843867"/>
-            <a:ext cx="8304210" cy="457200"/>
-          </a:xfrm>
-        </p:spPr>
-        <p:txBody>
-          <a:bodyPr anchor="t">
-            <a:normAutofit/>
-          </a:bodyPr>
-          <a:lstStyle>
-            <a:lvl1pPr marL="0" indent="0">
-              <a:buFontTx/>
-              <a:buNone/>
-              <a:defRPr sz="1600"/>
-            </a:lvl1pPr>
-            <a:lvl2pPr marL="457200" indent="0">
-              <a:buFontTx/>
-              <a:buNone/>
-              <a:defRPr/>
-            </a:lvl2pPr>
-            <a:lvl3pPr marL="914400" indent="0">
-              <a:buFontTx/>
-              <a:buNone/>
-              <a:defRPr/>
-            </a:lvl3pPr>
-            <a:lvl4pPr marL="1371600" indent="0">
-              <a:buFontTx/>
-              <a:buNone/>
-              <a:defRPr/>
-            </a:lvl4pPr>
-            <a:lvl5pPr marL="1828800" indent="0">
-              <a:buFontTx/>
-              <a:buNone/>
-              <a:defRPr/>
-            </a:lvl5pPr>
-          </a:lstStyle>
-          <a:p>
-            <a:pPr lvl="0"/>
-            <a:r>
-              <a:rPr lang="ru-RU"/>
-              <a:t>Образец текста</a:t>
-            </a:r>
-          </a:p>
-        </p:txBody>
-      </p:sp>
-      <p:sp>
-        <p:nvSpPr>
-          <p:cNvPr id="3" name="Date Placeholder 2"/>
-          <p:cNvSpPr>
-            <a:spLocks noGrp="1"/>
-          </p:cNvSpPr>
-          <p:nvPr>
-            <p:ph type="dt" sz="half" idx="10"/>
-          </p:nvPr>
-        </p:nvSpPr>
-        <p:spPr/>
-        <p:txBody>
-          <a:bodyPr/>
-          <a:lstStyle/>
-          <a:p>
-            <a:fld id="{5489760F-A808-480A-84F8-01DD6B446E6A}" type="datetimeFigureOut">
-              <a:rPr lang="ru-RU" smtClean="0"/>
-              <a:t>30.10.2025</a:t>
-            </a:fld>
-            <a:endParaRPr lang="ru-RU"/>
-          </a:p>
-        </p:txBody>
-      </p:sp>
-      <p:sp>
-        <p:nvSpPr>
-          <p:cNvPr id="4" name="Footer Placeholder 3"/>
-          <p:cNvSpPr>
-            <a:spLocks noGrp="1"/>
-          </p:cNvSpPr>
-          <p:nvPr>
-            <p:ph type="ftr" sz="quarter" idx="11"/>
-          </p:nvPr>
-        </p:nvSpPr>
-        <p:spPr/>
-        <p:txBody>
-          <a:bodyPr/>
-          <a:lstStyle/>
-          <a:p>
-            <a:endParaRPr lang="ru-RU"/>
-          </a:p>
-        </p:txBody>
-      </p:sp>
-      <p:sp>
-        <p:nvSpPr>
-          <p:cNvPr id="5" name="Slide Number Placeholder 4"/>
-          <p:cNvSpPr>
-            <a:spLocks noGrp="1"/>
-          </p:cNvSpPr>
-          <p:nvPr>
-            <p:ph type="sldNum" sz="quarter" idx="12"/>
-          </p:nvPr>
-        </p:nvSpPr>
-        <p:spPr/>
-        <p:txBody>
-          <a:bodyPr/>
-          <a:lstStyle/>
-          <a:p>
-            <a:fld id="{A663664C-8A4F-46B7-9030-9CE25612A169}" type="slidenum">
-              <a:rPr lang="ru-RU" smtClean="0"/>
-              <a:t>‹#›</a:t>
-            </a:fld>
-            <a:endParaRPr lang="ru-RU"/>
-          </a:p>
-        </p:txBody>
-      </p:sp>
-    </p:spTree>
-    <p:extLst>
-      <p:ext uri="{BB962C8B-B14F-4D97-AF65-F5344CB8AC3E}">
-        <p14:creationId xmlns:p14="http://schemas.microsoft.com/office/powerpoint/2010/main" val="593894943"/>
-      </p:ext>
-    </p:extLst>
-  </p:cSld>
-  <p:clrMapOvr>
-    <a:masterClrMapping/>
-  </p:clrMapOvr>
-</p:sldLayout>
-</file>
-
-<file path=ppt/slideLayouts/slideLayout11.xml><?xml version="1.0" encoding="utf-8"?>
-<p:sldLayout xmlns:a="http://schemas.openxmlformats.org/drawingml/2006/main" xmlns:r="http://schemas.openxmlformats.org/officeDocument/2006/relationships" xmlns:p="http://schemas.openxmlformats.org/presentationml/2006/main" preserve="1">
-  <p:cSld name="Заголовок и подпись">
-    <p:spTree>
-      <p:nvGrpSpPr>
-        <p:cNvPr id="1" name=""/>
-        <p:cNvGrpSpPr/>
-        <p:nvPr/>
-      </p:nvGrpSpPr>
-      <p:grpSpPr>
-        <a:xfrm>
-          <a:off x="0" y="0"/>
-          <a:ext cx="0" cy="0"/>
-          <a:chOff x="0" y="0"/>
-          <a:chExt cx="0" cy="0"/>
-        </a:xfrm>
-      </p:grpSpPr>
-      <p:sp>
-        <p:nvSpPr>
-          <p:cNvPr id="2" name="Title 1"/>
-          <p:cNvSpPr>
-            <a:spLocks noGrp="1"/>
-          </p:cNvSpPr>
-          <p:nvPr>
-            <p:ph type="title"/>
-          </p:nvPr>
-        </p:nvSpPr>
-        <p:spPr>
-          <a:xfrm>
-            <a:off x="684213" y="685800"/>
-            <a:ext cx="10058400" cy="2743200"/>
-          </a:xfrm>
-        </p:spPr>
-        <p:txBody>
-          <a:bodyPr anchor="ctr">
-            <a:normAutofit/>
-          </a:bodyPr>
-          <a:lstStyle>
-            <a:lvl1pPr algn="l">
-              <a:defRPr sz="3200" b="0" cap="all"/>
-            </a:lvl1pPr>
-          </a:lstStyle>
-          <a:p>
-            <a:r>
-              <a:rPr lang="ru-RU"/>
-              <a:t>Образец заголовка</a:t>
-            </a:r>
-            <a:endParaRPr lang="en-US" dirty="0"/>
-          </a:p>
-        </p:txBody>
-      </p:sp>
-      <p:sp>
-        <p:nvSpPr>
-          <p:cNvPr id="3" name="Text Placeholder 2"/>
-          <p:cNvSpPr>
-            <a:spLocks noGrp="1"/>
-          </p:cNvSpPr>
-          <p:nvPr>
-            <p:ph type="body" idx="1"/>
-          </p:nvPr>
-        </p:nvSpPr>
-        <p:spPr>
-          <a:xfrm>
-            <a:off x="684212" y="4114800"/>
-            <a:ext cx="8535988" cy="1879600"/>
-          </a:xfrm>
-        </p:spPr>
-        <p:txBody>
-          <a:bodyPr anchor="ctr">
-            <a:normAutofit/>
-          </a:bodyPr>
-          <a:lstStyle>
-            <a:lvl1pPr marL="0" indent="0" algn="l">
-              <a:buNone/>
-              <a:defRPr sz="2000">
-                <a:solidFill>
-                  <a:schemeClr val="bg2">
-                    <a:lumMod val="75000"/>
-                  </a:schemeClr>
-                </a:solidFill>
-              </a:defRPr>
-            </a:lvl1pPr>
-            <a:lvl2pPr marL="457200" indent="0">
-              <a:buNone/>
-              <a:defRPr sz="1800">
-                <a:solidFill>
-                  <a:schemeClr val="tx1">
-                    <a:tint val="75000"/>
-                  </a:schemeClr>
-                </a:solidFill>
-              </a:defRPr>
-            </a:lvl2pPr>
-            <a:lvl3pPr marL="914400" indent="0">
-              <a:buNone/>
-              <a:defRPr sz="1600">
-                <a:solidFill>
-                  <a:schemeClr val="tx1">
-                    <a:tint val="75000"/>
-                  </a:schemeClr>
-                </a:solidFill>
-              </a:defRPr>
-            </a:lvl3pPr>
-            <a:lvl4pPr marL="1371600" indent="0">
-              <a:buNone/>
-              <a:defRPr sz="1400">
-                <a:solidFill>
-                  <a:schemeClr val="tx1">
-                    <a:tint val="75000"/>
-                  </a:schemeClr>
-                </a:solidFill>
-              </a:defRPr>
-            </a:lvl4pPr>
-            <a:lvl5pPr marL="1828800" indent="0">
-              <a:buNone/>
-              <a:defRPr sz="1400">
-                <a:solidFill>
-                  <a:schemeClr val="tx1">
-                    <a:tint val="75000"/>
-                  </a:schemeClr>
-                </a:solidFill>
-              </a:defRPr>
-            </a:lvl5pPr>
-            <a:lvl6pPr marL="2286000" indent="0">
-              <a:buNone/>
-              <a:defRPr sz="1400">
-                <a:solidFill>
-                  <a:schemeClr val="tx1">
-                    <a:tint val="75000"/>
-                  </a:schemeClr>
-                </a:solidFill>
-              </a:defRPr>
-            </a:lvl6pPr>
-            <a:lvl7pPr marL="2743200" indent="0">
-              <a:buNone/>
-              <a:defRPr sz="1400">
-                <a:solidFill>
-                  <a:schemeClr val="tx1">
-                    <a:tint val="75000"/>
-                  </a:schemeClr>
-                </a:solidFill>
-              </a:defRPr>
-            </a:lvl7pPr>
-            <a:lvl8pPr marL="3200400" indent="0">
-              <a:buNone/>
-              <a:defRPr sz="1400">
-                <a:solidFill>
-                  <a:schemeClr val="tx1">
-                    <a:tint val="75000"/>
-                  </a:schemeClr>
-                </a:solidFill>
-              </a:defRPr>
-            </a:lvl8pPr>
-            <a:lvl9pPr marL="3657600" indent="0">
-              <a:buNone/>
-              <a:defRPr sz="1400">
-                <a:solidFill>
-                  <a:schemeClr val="tx1">
-                    <a:tint val="75000"/>
-                  </a:schemeClr>
-                </a:solidFill>
-              </a:defRPr>
-            </a:lvl9pPr>
-          </a:lstStyle>
-          <a:p>
-            <a:pPr lvl="0"/>
-            <a:r>
-              <a:rPr lang="ru-RU"/>
-              <a:t>Образец текста</a:t>
-            </a:r>
-          </a:p>
-        </p:txBody>
-      </p:sp>
-      <p:sp>
-        <p:nvSpPr>
-          <p:cNvPr id="4" name="Date Placeholder 3"/>
-          <p:cNvSpPr>
-            <a:spLocks noGrp="1"/>
-          </p:cNvSpPr>
-          <p:nvPr>
-            <p:ph type="dt" sz="half" idx="10"/>
-          </p:nvPr>
-        </p:nvSpPr>
-        <p:spPr/>
-        <p:txBody>
-          <a:bodyPr/>
-          <a:lstStyle/>
-          <a:p>
-            <a:fld id="{5489760F-A808-480A-84F8-01DD6B446E6A}" type="datetimeFigureOut">
-              <a:rPr lang="ru-RU" smtClean="0"/>
-              <a:t>30.10.2025</a:t>
-            </a:fld>
-            <a:endParaRPr lang="ru-RU"/>
-          </a:p>
-        </p:txBody>
-      </p:sp>
-      <p:sp>
-        <p:nvSpPr>
-          <p:cNvPr id="5" name="Footer Placeholder 4"/>
-          <p:cNvSpPr>
-            <a:spLocks noGrp="1"/>
-          </p:cNvSpPr>
-          <p:nvPr>
-            <p:ph type="ftr" sz="quarter" idx="11"/>
-          </p:nvPr>
-        </p:nvSpPr>
-        <p:spPr/>
-        <p:txBody>
-          <a:bodyPr/>
-          <a:lstStyle/>
-          <a:p>
-            <a:endParaRPr lang="ru-RU"/>
-          </a:p>
-        </p:txBody>
-      </p:sp>
-      <p:sp>
-        <p:nvSpPr>
-          <p:cNvPr id="6" name="Slide Number Placeholder 5"/>
-          <p:cNvSpPr>
-            <a:spLocks noGrp="1"/>
-          </p:cNvSpPr>
-          <p:nvPr>
-            <p:ph type="sldNum" sz="quarter" idx="12"/>
-          </p:nvPr>
-        </p:nvSpPr>
-        <p:spPr/>
-        <p:txBody>
-          <a:bodyPr/>
-          <a:lstStyle/>
-          <a:p>
-            <a:fld id="{A663664C-8A4F-46B7-9030-9CE25612A169}" type="slidenum">
-              <a:rPr lang="ru-RU" smtClean="0"/>
-              <a:t>‹#›</a:t>
-            </a:fld>
-            <a:endParaRPr lang="ru-RU"/>
-          </a:p>
-        </p:txBody>
-      </p:sp>
-    </p:spTree>
-    <p:extLst>
-      <p:ext uri="{BB962C8B-B14F-4D97-AF65-F5344CB8AC3E}">
-        <p14:creationId xmlns:p14="http://schemas.microsoft.com/office/powerpoint/2010/main" val="1061808258"/>
-      </p:ext>
-    </p:extLst>
-  </p:cSld>
-  <p:clrMapOvr>
-    <a:masterClrMapping/>
-  </p:clrMapOvr>
-</p:sldLayout>
-</file>
-
-<file path=ppt/slideLayouts/slideLayout12.xml><?xml version="1.0" encoding="utf-8"?>
-<p:sldLayout xmlns:a="http://schemas.openxmlformats.org/drawingml/2006/main" xmlns:r="http://schemas.openxmlformats.org/officeDocument/2006/relationships" xmlns:p="http://schemas.openxmlformats.org/presentationml/2006/main" preserve="1">
-  <p:cSld name="Цитата с подписью">
-    <p:spTree>
-      <p:nvGrpSpPr>
-        <p:cNvPr id="1" name=""/>
-        <p:cNvGrpSpPr/>
-        <p:nvPr/>
-      </p:nvGrpSpPr>
-      <p:grpSpPr>
-        <a:xfrm>
-          <a:off x="0" y="0"/>
-          <a:ext cx="0" cy="0"/>
-          <a:chOff x="0" y="0"/>
-          <a:chExt cx="0" cy="0"/>
-        </a:xfrm>
-      </p:grpSpPr>
-      <p:sp>
-        <p:nvSpPr>
-          <p:cNvPr id="2" name="Title 1"/>
-          <p:cNvSpPr>
-            <a:spLocks noGrp="1"/>
-          </p:cNvSpPr>
-          <p:nvPr>
-            <p:ph type="title"/>
-          </p:nvPr>
-        </p:nvSpPr>
-        <p:spPr>
-          <a:xfrm>
-            <a:off x="1141411" y="685800"/>
-            <a:ext cx="9144001" cy="2743200"/>
-          </a:xfrm>
-        </p:spPr>
-        <p:txBody>
-          <a:bodyPr anchor="ctr">
-            <a:normAutofit/>
-          </a:bodyPr>
-          <a:lstStyle>
-            <a:lvl1pPr algn="l">
-              <a:defRPr sz="3200" b="0" cap="all">
-                <a:solidFill>
-                  <a:schemeClr val="tx1"/>
-                </a:solidFill>
-              </a:defRPr>
-            </a:lvl1pPr>
-          </a:lstStyle>
-          <a:p>
-            <a:r>
-              <a:rPr lang="ru-RU"/>
-              <a:t>Образец заголовка</a:t>
-            </a:r>
-            <a:endParaRPr lang="en-US" dirty="0"/>
-          </a:p>
-        </p:txBody>
-      </p:sp>
-      <p:sp>
-        <p:nvSpPr>
-          <p:cNvPr id="10" name="Text Placeholder 9"/>
-          <p:cNvSpPr>
-            <a:spLocks noGrp="1"/>
-          </p:cNvSpPr>
-          <p:nvPr>
-            <p:ph type="body" sz="quarter" idx="13"/>
-          </p:nvPr>
-        </p:nvSpPr>
-        <p:spPr>
-          <a:xfrm>
-            <a:off x="1446212" y="3429000"/>
-            <a:ext cx="8534400" cy="381000"/>
-          </a:xfrm>
-        </p:spPr>
-        <p:txBody>
-          <a:bodyPr anchor="ctr"/>
-          <a:lstStyle>
-            <a:lvl1pPr marL="0" indent="0">
-              <a:buFontTx/>
-              <a:buNone/>
-              <a:defRPr/>
-            </a:lvl1pPr>
-            <a:lvl2pPr marL="457200" indent="0">
-              <a:buFontTx/>
-              <a:buNone/>
-              <a:defRPr/>
-            </a:lvl2pPr>
-            <a:lvl3pPr marL="914400" indent="0">
-              <a:buFontTx/>
-              <a:buNone/>
-              <a:defRPr/>
-            </a:lvl3pPr>
-            <a:lvl4pPr marL="1371600" indent="0">
-              <a:buFontTx/>
-              <a:buNone/>
-              <a:defRPr/>
-            </a:lvl4pPr>
-            <a:lvl5pPr marL="1828800" indent="0">
-              <a:buFontTx/>
-              <a:buNone/>
-              <a:defRPr/>
-            </a:lvl5pPr>
-          </a:lstStyle>
-          <a:p>
-            <a:pPr lvl="0"/>
-            <a:r>
-              <a:rPr lang="ru-RU"/>
-              <a:t>Образец текста</a:t>
-            </a:r>
-          </a:p>
-        </p:txBody>
-      </p:sp>
-      <p:sp>
-        <p:nvSpPr>
-          <p:cNvPr id="3" name="Text Placeholder 2"/>
-          <p:cNvSpPr>
-            <a:spLocks noGrp="1"/>
-          </p:cNvSpPr>
-          <p:nvPr>
-            <p:ph type="body" idx="1"/>
-          </p:nvPr>
-        </p:nvSpPr>
-        <p:spPr>
-          <a:xfrm>
-            <a:off x="684213" y="4301067"/>
-            <a:ext cx="8534400" cy="1684865"/>
-          </a:xfrm>
-        </p:spPr>
-        <p:txBody>
-          <a:bodyPr anchor="ctr">
-            <a:normAutofit/>
-          </a:bodyPr>
-          <a:lstStyle>
-            <a:lvl1pPr marL="0" indent="0" algn="l">
-              <a:buNone/>
-              <a:defRPr sz="2000">
-                <a:solidFill>
-                  <a:schemeClr val="bg2">
-                    <a:lumMod val="75000"/>
-                  </a:schemeClr>
-                </a:solidFill>
-              </a:defRPr>
-            </a:lvl1pPr>
-            <a:lvl2pPr marL="457200" indent="0">
-              <a:buNone/>
-              <a:defRPr sz="1800">
-                <a:solidFill>
-                  <a:schemeClr val="tx1">
-                    <a:tint val="75000"/>
-                  </a:schemeClr>
-                </a:solidFill>
-              </a:defRPr>
-            </a:lvl2pPr>
-            <a:lvl3pPr marL="914400" indent="0">
-              <a:buNone/>
-              <a:defRPr sz="1600">
-                <a:solidFill>
-                  <a:schemeClr val="tx1">
-                    <a:tint val="75000"/>
-                  </a:schemeClr>
-                </a:solidFill>
-              </a:defRPr>
-            </a:lvl3pPr>
-            <a:lvl4pPr marL="1371600" indent="0">
-              <a:buNone/>
-              <a:defRPr sz="1400">
-                <a:solidFill>
-                  <a:schemeClr val="tx1">
-                    <a:tint val="75000"/>
-                  </a:schemeClr>
-                </a:solidFill>
-              </a:defRPr>
-            </a:lvl4pPr>
-            <a:lvl5pPr marL="1828800" indent="0">
-              <a:buNone/>
-              <a:defRPr sz="1400">
-                <a:solidFill>
-                  <a:schemeClr val="tx1">
-                    <a:tint val="75000"/>
-                  </a:schemeClr>
-                </a:solidFill>
-              </a:defRPr>
-            </a:lvl5pPr>
-            <a:lvl6pPr marL="2286000" indent="0">
-              <a:buNone/>
-              <a:defRPr sz="1400">
-                <a:solidFill>
-                  <a:schemeClr val="tx1">
-                    <a:tint val="75000"/>
-                  </a:schemeClr>
-                </a:solidFill>
-              </a:defRPr>
-            </a:lvl6pPr>
-            <a:lvl7pPr marL="2743200" indent="0">
-              <a:buNone/>
-              <a:defRPr sz="1400">
-                <a:solidFill>
-                  <a:schemeClr val="tx1">
-                    <a:tint val="75000"/>
-                  </a:schemeClr>
-                </a:solidFill>
-              </a:defRPr>
-            </a:lvl7pPr>
-            <a:lvl8pPr marL="3200400" indent="0">
-              <a:buNone/>
-              <a:defRPr sz="1400">
-                <a:solidFill>
-                  <a:schemeClr val="tx1">
-                    <a:tint val="75000"/>
-                  </a:schemeClr>
-                </a:solidFill>
-              </a:defRPr>
-            </a:lvl8pPr>
-            <a:lvl9pPr marL="3657600" indent="0">
-              <a:buNone/>
-              <a:defRPr sz="1400">
-                <a:solidFill>
-                  <a:schemeClr val="tx1">
-                    <a:tint val="75000"/>
-                  </a:schemeClr>
-                </a:solidFill>
-              </a:defRPr>
-            </a:lvl9pPr>
-          </a:lstStyle>
-          <a:p>
-            <a:pPr lvl="0"/>
-            <a:r>
-              <a:rPr lang="ru-RU"/>
-              <a:t>Образец текста</a:t>
-            </a:r>
-          </a:p>
-        </p:txBody>
-      </p:sp>
-      <p:sp>
-        <p:nvSpPr>
-          <p:cNvPr id="4" name="Date Placeholder 3"/>
-          <p:cNvSpPr>
-            <a:spLocks noGrp="1"/>
-          </p:cNvSpPr>
-          <p:nvPr>
-            <p:ph type="dt" sz="half" idx="10"/>
-          </p:nvPr>
-        </p:nvSpPr>
-        <p:spPr/>
-        <p:txBody>
-          <a:bodyPr/>
-          <a:lstStyle/>
-          <a:p>
-            <a:fld id="{5489760F-A808-480A-84F8-01DD6B446E6A}" type="datetimeFigureOut">
-              <a:rPr lang="ru-RU" smtClean="0"/>
-              <a:t>30.10.2025</a:t>
-            </a:fld>
-            <a:endParaRPr lang="ru-RU"/>
-          </a:p>
-        </p:txBody>
-      </p:sp>
-      <p:sp>
-        <p:nvSpPr>
-          <p:cNvPr id="5" name="Footer Placeholder 4"/>
-          <p:cNvSpPr>
-            <a:spLocks noGrp="1"/>
-          </p:cNvSpPr>
-          <p:nvPr>
-            <p:ph type="ftr" sz="quarter" idx="11"/>
-          </p:nvPr>
-        </p:nvSpPr>
-        <p:spPr/>
-        <p:txBody>
-          <a:bodyPr/>
-          <a:lstStyle/>
-          <a:p>
-            <a:endParaRPr lang="ru-RU"/>
-          </a:p>
-        </p:txBody>
-      </p:sp>
-      <p:sp>
-        <p:nvSpPr>
-          <p:cNvPr id="6" name="Slide Number Placeholder 5"/>
-          <p:cNvSpPr>
-            <a:spLocks noGrp="1"/>
-          </p:cNvSpPr>
-          <p:nvPr>
-            <p:ph type="sldNum" sz="quarter" idx="12"/>
-          </p:nvPr>
-        </p:nvSpPr>
-        <p:spPr/>
-        <p:txBody>
-          <a:bodyPr/>
-          <a:lstStyle/>
-          <a:p>
-            <a:fld id="{A663664C-8A4F-46B7-9030-9CE25612A169}" type="slidenum">
-              <a:rPr lang="ru-RU" smtClean="0"/>
-              <a:t>‹#›</a:t>
-            </a:fld>
-            <a:endParaRPr lang="ru-RU"/>
-          </a:p>
-        </p:txBody>
-      </p:sp>
-      <p:sp>
-        <p:nvSpPr>
-          <p:cNvPr id="14" name="TextBox 13"/>
-          <p:cNvSpPr txBox="1"/>
-          <p:nvPr/>
-        </p:nvSpPr>
-        <p:spPr>
-          <a:xfrm>
-            <a:off x="531812" y="812222"/>
-            <a:ext cx="609600" cy="584776"/>
-          </a:xfrm>
-          <a:prstGeom prst="rect">
-            <a:avLst/>
-          </a:prstGeom>
-        </p:spPr>
-        <p:txBody>
-          <a:bodyPr vert="horz" lIns="91440" tIns="45720" rIns="91440" bIns="45720" rtlCol="0" anchor="ctr">
-            <a:noAutofit/>
-          </a:bodyPr>
-          <a:lstStyle/>
-          <a:p>
-            <a:pPr lvl="0"/>
-            <a:r>
-              <a:rPr lang="en-US" sz="8000" dirty="0">
-                <a:solidFill>
-                  <a:schemeClr val="tx1"/>
-                </a:solidFill>
-                <a:effectLst/>
-              </a:rPr>
-              <a:t>“</a:t>
-            </a:r>
-          </a:p>
-        </p:txBody>
-      </p:sp>
-      <p:sp>
-        <p:nvSpPr>
-          <p:cNvPr id="15" name="TextBox 14"/>
-          <p:cNvSpPr txBox="1"/>
-          <p:nvPr/>
-        </p:nvSpPr>
-        <p:spPr>
-          <a:xfrm>
-            <a:off x="10285412" y="2768601"/>
-            <a:ext cx="609600" cy="584776"/>
-          </a:xfrm>
-          <a:prstGeom prst="rect">
-            <a:avLst/>
-          </a:prstGeom>
-        </p:spPr>
-        <p:txBody>
-          <a:bodyPr vert="horz" lIns="91440" tIns="45720" rIns="91440" bIns="45720" rtlCol="0" anchor="ctr">
-            <a:noAutofit/>
-          </a:bodyPr>
-          <a:lstStyle/>
-          <a:p>
-            <a:pPr lvl="0" algn="r"/>
-            <a:r>
-              <a:rPr lang="en-US" sz="8000" dirty="0">
-                <a:solidFill>
-                  <a:schemeClr val="tx1"/>
-                </a:solidFill>
-                <a:effectLst/>
-              </a:rPr>
-              <a:t>”</a:t>
-            </a:r>
-          </a:p>
-        </p:txBody>
-      </p:sp>
-    </p:spTree>
-    <p:extLst>
-      <p:ext uri="{BB962C8B-B14F-4D97-AF65-F5344CB8AC3E}">
-        <p14:creationId xmlns:p14="http://schemas.microsoft.com/office/powerpoint/2010/main" val="1096254589"/>
-      </p:ext>
-    </p:extLst>
-  </p:cSld>
-  <p:clrMapOvr>
-    <a:masterClrMapping/>
-  </p:clrMapOvr>
-</p:sldLayout>
-</file>
-
-<file path=ppt/slideLayouts/slideLayout13.xml><?xml version="1.0" encoding="utf-8"?>
-<p:sldLayout xmlns:a="http://schemas.openxmlformats.org/drawingml/2006/main" xmlns:r="http://schemas.openxmlformats.org/officeDocument/2006/relationships" xmlns:p="http://schemas.openxmlformats.org/presentationml/2006/main" preserve="1">
-  <p:cSld name="Карточка имени">
-    <p:spTree>
-      <p:nvGrpSpPr>
-        <p:cNvPr id="1" name=""/>
-        <p:cNvGrpSpPr/>
-        <p:nvPr/>
-      </p:nvGrpSpPr>
-      <p:grpSpPr>
-        <a:xfrm>
-          <a:off x="0" y="0"/>
-          <a:ext cx="0" cy="0"/>
-          <a:chOff x="0" y="0"/>
-          <a:chExt cx="0" cy="0"/>
-        </a:xfrm>
-      </p:grpSpPr>
-      <p:sp>
-        <p:nvSpPr>
-          <p:cNvPr id="2" name="Title 1"/>
-          <p:cNvSpPr>
-            <a:spLocks noGrp="1"/>
-          </p:cNvSpPr>
-          <p:nvPr>
-            <p:ph type="title"/>
-          </p:nvPr>
-        </p:nvSpPr>
-        <p:spPr>
-          <a:xfrm>
-            <a:off x="684212" y="3429000"/>
-            <a:ext cx="8534400" cy="1697400"/>
-          </a:xfrm>
-        </p:spPr>
-        <p:txBody>
-          <a:bodyPr anchor="b">
-            <a:normAutofit/>
-          </a:bodyPr>
-          <a:lstStyle>
-            <a:lvl1pPr algn="l">
-              <a:defRPr sz="3200" b="0" cap="all"/>
-            </a:lvl1pPr>
-          </a:lstStyle>
-          <a:p>
-            <a:r>
-              <a:rPr lang="ru-RU"/>
-              <a:t>Образец заголовка</a:t>
-            </a:r>
-            <a:endParaRPr lang="en-US" dirty="0"/>
-          </a:p>
-        </p:txBody>
-      </p:sp>
-      <p:sp>
-        <p:nvSpPr>
-          <p:cNvPr id="3" name="Text Placeholder 2"/>
-          <p:cNvSpPr>
-            <a:spLocks noGrp="1"/>
-          </p:cNvSpPr>
-          <p:nvPr>
-            <p:ph type="body" idx="1"/>
-          </p:nvPr>
-        </p:nvSpPr>
-        <p:spPr>
-          <a:xfrm>
-            <a:off x="684211" y="5132981"/>
-            <a:ext cx="8535990" cy="860400"/>
-          </a:xfrm>
-        </p:spPr>
-        <p:txBody>
-          <a:bodyPr anchor="t">
-            <a:normAutofit/>
-          </a:bodyPr>
-          <a:lstStyle>
-            <a:lvl1pPr marL="0" indent="0" algn="l">
-              <a:buNone/>
-              <a:defRPr sz="2000">
-                <a:solidFill>
-                  <a:schemeClr val="bg2">
-                    <a:lumMod val="75000"/>
-                  </a:schemeClr>
-                </a:solidFill>
-              </a:defRPr>
-            </a:lvl1pPr>
-            <a:lvl2pPr marL="457200" indent="0">
-              <a:buNone/>
-              <a:defRPr sz="1800">
-                <a:solidFill>
-                  <a:schemeClr val="tx1">
-                    <a:tint val="75000"/>
-                  </a:schemeClr>
-                </a:solidFill>
-              </a:defRPr>
-            </a:lvl2pPr>
-            <a:lvl3pPr marL="914400" indent="0">
-              <a:buNone/>
-              <a:defRPr sz="1600">
-                <a:solidFill>
-                  <a:schemeClr val="tx1">
-                    <a:tint val="75000"/>
-                  </a:schemeClr>
-                </a:solidFill>
-              </a:defRPr>
-            </a:lvl3pPr>
-            <a:lvl4pPr marL="1371600" indent="0">
-              <a:buNone/>
-              <a:defRPr sz="1400">
-                <a:solidFill>
-                  <a:schemeClr val="tx1">
-                    <a:tint val="75000"/>
-                  </a:schemeClr>
-                </a:solidFill>
-              </a:defRPr>
-            </a:lvl4pPr>
-            <a:lvl5pPr marL="1828800" indent="0">
-              <a:buNone/>
-              <a:defRPr sz="1400">
-                <a:solidFill>
-                  <a:schemeClr val="tx1">
-                    <a:tint val="75000"/>
-                  </a:schemeClr>
-                </a:solidFill>
-              </a:defRPr>
-            </a:lvl5pPr>
-            <a:lvl6pPr marL="2286000" indent="0">
-              <a:buNone/>
-              <a:defRPr sz="1400">
-                <a:solidFill>
-                  <a:schemeClr val="tx1">
-                    <a:tint val="75000"/>
-                  </a:schemeClr>
-                </a:solidFill>
-              </a:defRPr>
-            </a:lvl6pPr>
-            <a:lvl7pPr marL="2743200" indent="0">
-              <a:buNone/>
-              <a:defRPr sz="1400">
-                <a:solidFill>
-                  <a:schemeClr val="tx1">
-                    <a:tint val="75000"/>
-                  </a:schemeClr>
-                </a:solidFill>
-              </a:defRPr>
-            </a:lvl7pPr>
-            <a:lvl8pPr marL="3200400" indent="0">
-              <a:buNone/>
-              <a:defRPr sz="1400">
-                <a:solidFill>
-                  <a:schemeClr val="tx1">
-                    <a:tint val="75000"/>
-                  </a:schemeClr>
-                </a:solidFill>
-              </a:defRPr>
-            </a:lvl8pPr>
-            <a:lvl9pPr marL="3657600" indent="0">
-              <a:buNone/>
-              <a:defRPr sz="1400">
-                <a:solidFill>
-                  <a:schemeClr val="tx1">
-                    <a:tint val="75000"/>
-                  </a:schemeClr>
-                </a:solidFill>
-              </a:defRPr>
-            </a:lvl9pPr>
-          </a:lstStyle>
-          <a:p>
-            <a:pPr lvl="0"/>
-            <a:r>
-              <a:rPr lang="ru-RU"/>
-              <a:t>Образец текста</a:t>
-            </a:r>
-          </a:p>
-        </p:txBody>
-      </p:sp>
-      <p:sp>
-        <p:nvSpPr>
-          <p:cNvPr id="4" name="Date Placeholder 3"/>
-          <p:cNvSpPr>
-            <a:spLocks noGrp="1"/>
-          </p:cNvSpPr>
-          <p:nvPr>
-            <p:ph type="dt" sz="half" idx="10"/>
-          </p:nvPr>
-        </p:nvSpPr>
-        <p:spPr/>
-        <p:txBody>
-          <a:bodyPr/>
-          <a:lstStyle/>
-          <a:p>
-            <a:fld id="{5489760F-A808-480A-84F8-01DD6B446E6A}" type="datetimeFigureOut">
-              <a:rPr lang="ru-RU" smtClean="0"/>
-              <a:t>30.10.2025</a:t>
-            </a:fld>
-            <a:endParaRPr lang="ru-RU"/>
-          </a:p>
-        </p:txBody>
-      </p:sp>
-      <p:sp>
-        <p:nvSpPr>
-          <p:cNvPr id="5" name="Footer Placeholder 4"/>
-          <p:cNvSpPr>
-            <a:spLocks noGrp="1"/>
-          </p:cNvSpPr>
-          <p:nvPr>
-            <p:ph type="ftr" sz="quarter" idx="11"/>
-          </p:nvPr>
-        </p:nvSpPr>
-        <p:spPr/>
-        <p:txBody>
-          <a:bodyPr/>
-          <a:lstStyle/>
-          <a:p>
-            <a:endParaRPr lang="ru-RU"/>
-          </a:p>
-        </p:txBody>
-      </p:sp>
-      <p:sp>
-        <p:nvSpPr>
-          <p:cNvPr id="6" name="Slide Number Placeholder 5"/>
-          <p:cNvSpPr>
-            <a:spLocks noGrp="1"/>
-          </p:cNvSpPr>
-          <p:nvPr>
-            <p:ph type="sldNum" sz="quarter" idx="12"/>
-          </p:nvPr>
-        </p:nvSpPr>
-        <p:spPr/>
-        <p:txBody>
-          <a:bodyPr/>
-          <a:lstStyle/>
-          <a:p>
-            <a:fld id="{A663664C-8A4F-46B7-9030-9CE25612A169}" type="slidenum">
-              <a:rPr lang="ru-RU" smtClean="0"/>
-              <a:t>‹#›</a:t>
-            </a:fld>
-            <a:endParaRPr lang="ru-RU"/>
-          </a:p>
-        </p:txBody>
-      </p:sp>
-    </p:spTree>
-    <p:extLst>
-      <p:ext uri="{BB962C8B-B14F-4D97-AF65-F5344CB8AC3E}">
-        <p14:creationId xmlns:p14="http://schemas.microsoft.com/office/powerpoint/2010/main" val="3620124870"/>
-      </p:ext>
-    </p:extLst>
-  </p:cSld>
-  <p:clrMapOvr>
-    <a:masterClrMapping/>
-  </p:clrMapOvr>
-</p:sldLayout>
-</file>
-
-<file path=ppt/slideLayouts/slideLayout14.xml><?xml version="1.0" encoding="utf-8"?>
-<p:sldLayout xmlns:a="http://schemas.openxmlformats.org/drawingml/2006/main" xmlns:r="http://schemas.openxmlformats.org/officeDocument/2006/relationships" xmlns:p="http://schemas.openxmlformats.org/presentationml/2006/main" preserve="1">
-  <p:cSld name="Цитата карточки имени">
-    <p:spTree>
-      <p:nvGrpSpPr>
-        <p:cNvPr id="1" name=""/>
-        <p:cNvGrpSpPr/>
-        <p:nvPr/>
-      </p:nvGrpSpPr>
-      <p:grpSpPr>
-        <a:xfrm>
-          <a:off x="0" y="0"/>
-          <a:ext cx="0" cy="0"/>
-          <a:chOff x="0" y="0"/>
-          <a:chExt cx="0" cy="0"/>
-        </a:xfrm>
-      </p:grpSpPr>
-      <p:sp>
-        <p:nvSpPr>
-          <p:cNvPr id="2" name="Title 1"/>
-          <p:cNvSpPr>
-            <a:spLocks noGrp="1"/>
-          </p:cNvSpPr>
-          <p:nvPr>
-            <p:ph type="title"/>
-          </p:nvPr>
-        </p:nvSpPr>
-        <p:spPr>
-          <a:xfrm>
-            <a:off x="1141413" y="685800"/>
-            <a:ext cx="9144000" cy="2743200"/>
-          </a:xfrm>
-        </p:spPr>
-        <p:txBody>
-          <a:bodyPr anchor="ctr">
-            <a:normAutofit/>
-          </a:bodyPr>
-          <a:lstStyle>
-            <a:lvl1pPr algn="l">
-              <a:defRPr sz="3200" b="0" cap="all">
-                <a:solidFill>
-                  <a:schemeClr val="tx1"/>
-                </a:solidFill>
-              </a:defRPr>
-            </a:lvl1pPr>
-          </a:lstStyle>
-          <a:p>
-            <a:r>
-              <a:rPr lang="ru-RU"/>
-              <a:t>Образец заголовка</a:t>
-            </a:r>
-            <a:endParaRPr lang="en-US" dirty="0"/>
-          </a:p>
-        </p:txBody>
-      </p:sp>
-      <p:sp>
-        <p:nvSpPr>
-          <p:cNvPr id="10" name="Text Placeholder 9"/>
-          <p:cNvSpPr>
-            <a:spLocks noGrp="1"/>
-          </p:cNvSpPr>
-          <p:nvPr>
-            <p:ph type="body" sz="quarter" idx="13"/>
-          </p:nvPr>
-        </p:nvSpPr>
-        <p:spPr>
-          <a:xfrm>
-            <a:off x="684212" y="3928534"/>
-            <a:ext cx="8534401" cy="1049866"/>
-          </a:xfrm>
-        </p:spPr>
-        <p:txBody>
-          <a:bodyPr vert="horz" lIns="91440" tIns="45720" rIns="91440" bIns="45720" rtlCol="0" anchor="b">
-            <a:normAutofit/>
-          </a:bodyPr>
-          <a:lstStyle>
-            <a:lvl1pPr>
-              <a:buNone/>
-              <a:defRPr lang="en-US" sz="2400" b="0" cap="all" dirty="0">
-                <a:ln w="3175" cmpd="sng">
-                  <a:noFill/>
-                </a:ln>
-                <a:solidFill>
-                  <a:schemeClr val="tx1"/>
-                </a:solidFill>
-                <a:effectLst/>
-              </a:defRPr>
-            </a:lvl1pPr>
-          </a:lstStyle>
-          <a:p>
-            <a:pPr marL="0" lvl="0">
-              <a:spcBef>
-                <a:spcPct val="0"/>
-              </a:spcBef>
-              <a:buNone/>
-            </a:pPr>
-            <a:r>
-              <a:rPr lang="ru-RU"/>
-              <a:t>Образец текста</a:t>
-            </a:r>
-          </a:p>
-        </p:txBody>
-      </p:sp>
-      <p:sp>
-        <p:nvSpPr>
-          <p:cNvPr id="3" name="Text Placeholder 2"/>
-          <p:cNvSpPr>
-            <a:spLocks noGrp="1"/>
-          </p:cNvSpPr>
-          <p:nvPr>
-            <p:ph type="body" idx="1"/>
-          </p:nvPr>
-        </p:nvSpPr>
-        <p:spPr>
-          <a:xfrm>
-            <a:off x="684211" y="4978400"/>
-            <a:ext cx="8534401" cy="1016000"/>
-          </a:xfrm>
-        </p:spPr>
-        <p:txBody>
-          <a:bodyPr anchor="t">
-            <a:normAutofit/>
-          </a:bodyPr>
-          <a:lstStyle>
-            <a:lvl1pPr marL="0" indent="0" algn="l">
-              <a:buNone/>
-              <a:defRPr sz="1800">
-                <a:solidFill>
-                  <a:schemeClr val="bg2">
-                    <a:lumMod val="75000"/>
-                  </a:schemeClr>
-                </a:solidFill>
-              </a:defRPr>
-            </a:lvl1pPr>
-            <a:lvl2pPr marL="457200" indent="0">
-              <a:buNone/>
-              <a:defRPr sz="1800">
-                <a:solidFill>
-                  <a:schemeClr val="tx1">
-                    <a:tint val="75000"/>
-                  </a:schemeClr>
-                </a:solidFill>
-              </a:defRPr>
-            </a:lvl2pPr>
-            <a:lvl3pPr marL="914400" indent="0">
-              <a:buNone/>
-              <a:defRPr sz="1600">
-                <a:solidFill>
-                  <a:schemeClr val="tx1">
-                    <a:tint val="75000"/>
-                  </a:schemeClr>
-                </a:solidFill>
-              </a:defRPr>
-            </a:lvl3pPr>
-            <a:lvl4pPr marL="1371600" indent="0">
-              <a:buNone/>
-              <a:defRPr sz="1400">
-                <a:solidFill>
-                  <a:schemeClr val="tx1">
-                    <a:tint val="75000"/>
-                  </a:schemeClr>
-                </a:solidFill>
-              </a:defRPr>
-            </a:lvl4pPr>
-            <a:lvl5pPr marL="1828800" indent="0">
-              <a:buNone/>
-              <a:defRPr sz="1400">
-                <a:solidFill>
-                  <a:schemeClr val="tx1">
-                    <a:tint val="75000"/>
-                  </a:schemeClr>
-                </a:solidFill>
-              </a:defRPr>
-            </a:lvl5pPr>
-            <a:lvl6pPr marL="2286000" indent="0">
-              <a:buNone/>
-              <a:defRPr sz="1400">
-                <a:solidFill>
-                  <a:schemeClr val="tx1">
-                    <a:tint val="75000"/>
-                  </a:schemeClr>
-                </a:solidFill>
-              </a:defRPr>
-            </a:lvl6pPr>
-            <a:lvl7pPr marL="2743200" indent="0">
-              <a:buNone/>
-              <a:defRPr sz="1400">
-                <a:solidFill>
-                  <a:schemeClr val="tx1">
-                    <a:tint val="75000"/>
-                  </a:schemeClr>
-                </a:solidFill>
-              </a:defRPr>
-            </a:lvl7pPr>
-            <a:lvl8pPr marL="3200400" indent="0">
-              <a:buNone/>
-              <a:defRPr sz="1400">
-                <a:solidFill>
-                  <a:schemeClr val="tx1">
-                    <a:tint val="75000"/>
-                  </a:schemeClr>
-                </a:solidFill>
-              </a:defRPr>
-            </a:lvl8pPr>
-            <a:lvl9pPr marL="3657600" indent="0">
-              <a:buNone/>
-              <a:defRPr sz="1400">
-                <a:solidFill>
-                  <a:schemeClr val="tx1">
-                    <a:tint val="75000"/>
-                  </a:schemeClr>
-                </a:solidFill>
-              </a:defRPr>
-            </a:lvl9pPr>
-          </a:lstStyle>
-          <a:p>
-            <a:pPr lvl="0"/>
-            <a:r>
-              <a:rPr lang="ru-RU"/>
-              <a:t>Образец текста</a:t>
-            </a:r>
-          </a:p>
-        </p:txBody>
-      </p:sp>
-      <p:sp>
-        <p:nvSpPr>
-          <p:cNvPr id="4" name="Date Placeholder 3"/>
-          <p:cNvSpPr>
-            <a:spLocks noGrp="1"/>
-          </p:cNvSpPr>
-          <p:nvPr>
-            <p:ph type="dt" sz="half" idx="10"/>
-          </p:nvPr>
-        </p:nvSpPr>
-        <p:spPr/>
-        <p:txBody>
-          <a:bodyPr/>
-          <a:lstStyle/>
-          <a:p>
-            <a:fld id="{5489760F-A808-480A-84F8-01DD6B446E6A}" type="datetimeFigureOut">
-              <a:rPr lang="ru-RU" smtClean="0"/>
-              <a:t>30.10.2025</a:t>
-            </a:fld>
-            <a:endParaRPr lang="ru-RU"/>
-          </a:p>
-        </p:txBody>
-      </p:sp>
-      <p:sp>
-        <p:nvSpPr>
-          <p:cNvPr id="5" name="Footer Placeholder 4"/>
-          <p:cNvSpPr>
-            <a:spLocks noGrp="1"/>
-          </p:cNvSpPr>
-          <p:nvPr>
-            <p:ph type="ftr" sz="quarter" idx="11"/>
-          </p:nvPr>
-        </p:nvSpPr>
-        <p:spPr/>
-        <p:txBody>
-          <a:bodyPr/>
-          <a:lstStyle/>
-          <a:p>
-            <a:endParaRPr lang="ru-RU"/>
-          </a:p>
-        </p:txBody>
-      </p:sp>
-      <p:sp>
-        <p:nvSpPr>
-          <p:cNvPr id="6" name="Slide Number Placeholder 5"/>
-          <p:cNvSpPr>
-            <a:spLocks noGrp="1"/>
-          </p:cNvSpPr>
-          <p:nvPr>
-            <p:ph type="sldNum" sz="quarter" idx="12"/>
-          </p:nvPr>
-        </p:nvSpPr>
-        <p:spPr/>
-        <p:txBody>
-          <a:bodyPr/>
-          <a:lstStyle/>
-          <a:p>
-            <a:fld id="{A663664C-8A4F-46B7-9030-9CE25612A169}" type="slidenum">
-              <a:rPr lang="ru-RU" smtClean="0"/>
-              <a:t>‹#›</a:t>
-            </a:fld>
-            <a:endParaRPr lang="ru-RU"/>
-          </a:p>
-        </p:txBody>
-      </p:sp>
-      <p:sp>
-        <p:nvSpPr>
-          <p:cNvPr id="11" name="TextBox 10"/>
-          <p:cNvSpPr txBox="1"/>
-          <p:nvPr/>
-        </p:nvSpPr>
-        <p:spPr>
-          <a:xfrm>
-            <a:off x="531812" y="812222"/>
-            <a:ext cx="609600" cy="584776"/>
-          </a:xfrm>
-          <a:prstGeom prst="rect">
-            <a:avLst/>
-          </a:prstGeom>
-        </p:spPr>
-        <p:txBody>
-          <a:bodyPr vert="horz" lIns="91440" tIns="45720" rIns="91440" bIns="45720" rtlCol="0" anchor="ctr">
-            <a:noAutofit/>
-          </a:bodyPr>
-          <a:lstStyle/>
-          <a:p>
-            <a:pPr lvl="0"/>
-            <a:r>
-              <a:rPr lang="en-US" sz="8000" dirty="0">
-                <a:solidFill>
-                  <a:schemeClr val="tx1"/>
-                </a:solidFill>
-                <a:effectLst/>
-              </a:rPr>
-              <a:t>“</a:t>
-            </a:r>
-          </a:p>
-        </p:txBody>
-      </p:sp>
-      <p:sp>
-        <p:nvSpPr>
-          <p:cNvPr id="12" name="TextBox 11"/>
-          <p:cNvSpPr txBox="1"/>
-          <p:nvPr/>
-        </p:nvSpPr>
-        <p:spPr>
-          <a:xfrm>
-            <a:off x="10285412" y="2768601"/>
-            <a:ext cx="609600" cy="584776"/>
-          </a:xfrm>
-          <a:prstGeom prst="rect">
-            <a:avLst/>
-          </a:prstGeom>
-        </p:spPr>
-        <p:txBody>
-          <a:bodyPr vert="horz" lIns="91440" tIns="45720" rIns="91440" bIns="45720" rtlCol="0" anchor="ctr">
-            <a:noAutofit/>
-          </a:bodyPr>
-          <a:lstStyle/>
-          <a:p>
-            <a:pPr lvl="0" algn="r"/>
-            <a:r>
-              <a:rPr lang="en-US" sz="8000" dirty="0">
-                <a:solidFill>
-                  <a:schemeClr val="tx1"/>
-                </a:solidFill>
-                <a:effectLst/>
-              </a:rPr>
-              <a:t>”</a:t>
-            </a:r>
-          </a:p>
-        </p:txBody>
-      </p:sp>
-    </p:spTree>
-    <p:extLst>
-      <p:ext uri="{BB962C8B-B14F-4D97-AF65-F5344CB8AC3E}">
-        <p14:creationId xmlns:p14="http://schemas.microsoft.com/office/powerpoint/2010/main" val="2499862992"/>
-      </p:ext>
-    </p:extLst>
-  </p:cSld>
-  <p:clrMapOvr>
-    <a:masterClrMapping/>
-  </p:clrMapOvr>
-</p:sldLayout>
-</file>
-
-<file path=ppt/slideLayouts/slideLayout15.xml><?xml version="1.0" encoding="utf-8"?>
-<p:sldLayout xmlns:a="http://schemas.openxmlformats.org/drawingml/2006/main" xmlns:r="http://schemas.openxmlformats.org/officeDocument/2006/relationships" xmlns:p="http://schemas.openxmlformats.org/presentationml/2006/main" preserve="1">
-  <p:cSld name="Истина или ложь">
-    <p:spTree>
-      <p:nvGrpSpPr>
-        <p:cNvPr id="1" name=""/>
-        <p:cNvGrpSpPr/>
-        <p:nvPr/>
-      </p:nvGrpSpPr>
-      <p:grpSpPr>
-        <a:xfrm>
-          <a:off x="0" y="0"/>
-          <a:ext cx="0" cy="0"/>
-          <a:chOff x="0" y="0"/>
-          <a:chExt cx="0" cy="0"/>
-        </a:xfrm>
-      </p:grpSpPr>
-      <p:sp>
-        <p:nvSpPr>
-          <p:cNvPr id="2" name="Title 1"/>
-          <p:cNvSpPr>
-            <a:spLocks noGrp="1"/>
-          </p:cNvSpPr>
-          <p:nvPr>
-            <p:ph type="title"/>
-          </p:nvPr>
-        </p:nvSpPr>
-        <p:spPr>
-          <a:xfrm>
-            <a:off x="684213" y="685800"/>
-            <a:ext cx="10058400" cy="2743200"/>
-          </a:xfrm>
-        </p:spPr>
-        <p:txBody>
-          <a:bodyPr vert="horz" lIns="91440" tIns="45720" rIns="91440" bIns="45720" rtlCol="0" anchor="ctr">
-            <a:normAutofit/>
-          </a:bodyPr>
-          <a:lstStyle>
-            <a:lvl1pPr>
-              <a:defRPr lang="en-US" b="0" dirty="0"/>
-            </a:lvl1pPr>
-          </a:lstStyle>
-          <a:p>
-            <a:pPr marL="0" lvl="0"/>
-            <a:r>
-              <a:rPr lang="ru-RU"/>
-              <a:t>Образец заголовка</a:t>
-            </a:r>
-            <a:endParaRPr lang="en-US" dirty="0"/>
-          </a:p>
-        </p:txBody>
-      </p:sp>
-      <p:sp>
-        <p:nvSpPr>
-          <p:cNvPr id="10" name="Text Placeholder 9"/>
-          <p:cNvSpPr>
-            <a:spLocks noGrp="1"/>
-          </p:cNvSpPr>
-          <p:nvPr>
-            <p:ph type="body" sz="quarter" idx="13"/>
-          </p:nvPr>
-        </p:nvSpPr>
-        <p:spPr>
-          <a:xfrm>
-            <a:off x="684212" y="3928534"/>
-            <a:ext cx="8534400" cy="838200"/>
-          </a:xfrm>
-        </p:spPr>
-        <p:txBody>
-          <a:bodyPr vert="horz" lIns="91440" tIns="45720" rIns="91440" bIns="45720" rtlCol="0" anchor="b">
-            <a:normAutofit/>
-          </a:bodyPr>
-          <a:lstStyle>
-            <a:lvl1pPr>
-              <a:buNone/>
-              <a:defRPr lang="en-US" sz="2400" b="0" cap="all" dirty="0">
-                <a:ln w="3175" cmpd="sng">
-                  <a:noFill/>
-                </a:ln>
-                <a:solidFill>
-                  <a:schemeClr val="tx1"/>
-                </a:solidFill>
-                <a:effectLst/>
-              </a:defRPr>
-            </a:lvl1pPr>
-          </a:lstStyle>
-          <a:p>
-            <a:pPr marL="0" lvl="0">
-              <a:spcBef>
-                <a:spcPct val="0"/>
-              </a:spcBef>
-              <a:buNone/>
-            </a:pPr>
-            <a:r>
-              <a:rPr lang="ru-RU"/>
-              <a:t>Образец текста</a:t>
-            </a:r>
-          </a:p>
-        </p:txBody>
-      </p:sp>
-      <p:sp>
-        <p:nvSpPr>
-          <p:cNvPr id="3" name="Text Placeholder 2"/>
-          <p:cNvSpPr>
-            <a:spLocks noGrp="1"/>
-          </p:cNvSpPr>
-          <p:nvPr>
-            <p:ph type="body" idx="1"/>
-          </p:nvPr>
-        </p:nvSpPr>
-        <p:spPr>
-          <a:xfrm>
-            <a:off x="684211" y="4766732"/>
-            <a:ext cx="8534401" cy="1227667"/>
-          </a:xfrm>
-        </p:spPr>
-        <p:txBody>
-          <a:bodyPr anchor="t">
-            <a:normAutofit/>
-          </a:bodyPr>
-          <a:lstStyle>
-            <a:lvl1pPr marL="0" indent="0" algn="l">
-              <a:buNone/>
-              <a:defRPr sz="1800">
-                <a:solidFill>
-                  <a:schemeClr val="bg2">
-                    <a:lumMod val="75000"/>
-                  </a:schemeClr>
-                </a:solidFill>
-              </a:defRPr>
-            </a:lvl1pPr>
-            <a:lvl2pPr marL="457200" indent="0">
-              <a:buNone/>
-              <a:defRPr sz="1800">
-                <a:solidFill>
-                  <a:schemeClr val="tx1">
-                    <a:tint val="75000"/>
-                  </a:schemeClr>
-                </a:solidFill>
-              </a:defRPr>
-            </a:lvl2pPr>
-            <a:lvl3pPr marL="914400" indent="0">
-              <a:buNone/>
-              <a:defRPr sz="1600">
-                <a:solidFill>
-                  <a:schemeClr val="tx1">
-                    <a:tint val="75000"/>
-                  </a:schemeClr>
-                </a:solidFill>
-              </a:defRPr>
-            </a:lvl3pPr>
-            <a:lvl4pPr marL="1371600" indent="0">
-              <a:buNone/>
-              <a:defRPr sz="1400">
-                <a:solidFill>
-                  <a:schemeClr val="tx1">
-                    <a:tint val="75000"/>
-                  </a:schemeClr>
-                </a:solidFill>
-              </a:defRPr>
-            </a:lvl4pPr>
-            <a:lvl5pPr marL="1828800" indent="0">
-              <a:buNone/>
-              <a:defRPr sz="1400">
-                <a:solidFill>
-                  <a:schemeClr val="tx1">
-                    <a:tint val="75000"/>
-                  </a:schemeClr>
-                </a:solidFill>
-              </a:defRPr>
-            </a:lvl5pPr>
-            <a:lvl6pPr marL="2286000" indent="0">
-              <a:buNone/>
-              <a:defRPr sz="1400">
-                <a:solidFill>
-                  <a:schemeClr val="tx1">
-                    <a:tint val="75000"/>
-                  </a:schemeClr>
-                </a:solidFill>
-              </a:defRPr>
-            </a:lvl6pPr>
-            <a:lvl7pPr marL="2743200" indent="0">
-              <a:buNone/>
-              <a:defRPr sz="1400">
-                <a:solidFill>
-                  <a:schemeClr val="tx1">
-                    <a:tint val="75000"/>
-                  </a:schemeClr>
-                </a:solidFill>
-              </a:defRPr>
-            </a:lvl7pPr>
-            <a:lvl8pPr marL="3200400" indent="0">
-              <a:buNone/>
-              <a:defRPr sz="1400">
-                <a:solidFill>
-                  <a:schemeClr val="tx1">
-                    <a:tint val="75000"/>
-                  </a:schemeClr>
-                </a:solidFill>
-              </a:defRPr>
-            </a:lvl8pPr>
-            <a:lvl9pPr marL="3657600" indent="0">
-              <a:buNone/>
-              <a:defRPr sz="1400">
-                <a:solidFill>
-                  <a:schemeClr val="tx1">
-                    <a:tint val="75000"/>
-                  </a:schemeClr>
-                </a:solidFill>
-              </a:defRPr>
-            </a:lvl9pPr>
-          </a:lstStyle>
-          <a:p>
-            <a:pPr lvl="0"/>
-            <a:r>
-              <a:rPr lang="ru-RU"/>
-              <a:t>Образец текста</a:t>
-            </a:r>
-          </a:p>
-        </p:txBody>
-      </p:sp>
-      <p:sp>
-        <p:nvSpPr>
-          <p:cNvPr id="4" name="Date Placeholder 3"/>
-          <p:cNvSpPr>
-            <a:spLocks noGrp="1"/>
-          </p:cNvSpPr>
-          <p:nvPr>
-            <p:ph type="dt" sz="half" idx="10"/>
-          </p:nvPr>
-        </p:nvSpPr>
-        <p:spPr/>
-        <p:txBody>
-          <a:bodyPr/>
-          <a:lstStyle/>
-          <a:p>
-            <a:fld id="{5489760F-A808-480A-84F8-01DD6B446E6A}" type="datetimeFigureOut">
-              <a:rPr lang="ru-RU" smtClean="0"/>
-              <a:t>30.10.2025</a:t>
-            </a:fld>
-            <a:endParaRPr lang="ru-RU"/>
-          </a:p>
-        </p:txBody>
-      </p:sp>
-      <p:sp>
-        <p:nvSpPr>
-          <p:cNvPr id="5" name="Footer Placeholder 4"/>
-          <p:cNvSpPr>
-            <a:spLocks noGrp="1"/>
-          </p:cNvSpPr>
-          <p:nvPr>
-            <p:ph type="ftr" sz="quarter" idx="11"/>
-          </p:nvPr>
-        </p:nvSpPr>
-        <p:spPr/>
-        <p:txBody>
-          <a:bodyPr/>
-          <a:lstStyle/>
-          <a:p>
-            <a:endParaRPr lang="ru-RU"/>
-          </a:p>
-        </p:txBody>
-      </p:sp>
-      <p:sp>
-        <p:nvSpPr>
-          <p:cNvPr id="6" name="Slide Number Placeholder 5"/>
-          <p:cNvSpPr>
-            <a:spLocks noGrp="1"/>
-          </p:cNvSpPr>
-          <p:nvPr>
-            <p:ph type="sldNum" sz="quarter" idx="12"/>
-          </p:nvPr>
-        </p:nvSpPr>
-        <p:spPr/>
-        <p:txBody>
-          <a:bodyPr/>
-          <a:lstStyle/>
-          <a:p>
-            <a:fld id="{A663664C-8A4F-46B7-9030-9CE25612A169}" type="slidenum">
-              <a:rPr lang="ru-RU" smtClean="0"/>
-              <a:t>‹#›</a:t>
-            </a:fld>
-            <a:endParaRPr lang="ru-RU"/>
-          </a:p>
-        </p:txBody>
-      </p:sp>
-    </p:spTree>
-    <p:extLst>
-      <p:ext uri="{BB962C8B-B14F-4D97-AF65-F5344CB8AC3E}">
-        <p14:creationId xmlns:p14="http://schemas.microsoft.com/office/powerpoint/2010/main" val="2128313421"/>
-      </p:ext>
-    </p:extLst>
-  </p:cSld>
-  <p:clrMapOvr>
-    <a:masterClrMapping/>
-  </p:clrMapOvr>
-</p:sldLayout>
-</file>
-
-<file path=ppt/slideLayouts/slideLayout16.xml><?xml version="1.0" encoding="utf-8"?>
 <p:sldLayout xmlns:a="http://schemas.openxmlformats.org/drawingml/2006/main" xmlns:r="http://schemas.openxmlformats.org/officeDocument/2006/relationships" xmlns:p="http://schemas.openxmlformats.org/presentationml/2006/main" type="vertTx" preserve="1">
   <p:cSld name="Заголовок и вертикальный текст">
     <p:spTree>
@@ -2808,7 +795,13 @@
       </p:grpSpPr>
       <p:sp>
         <p:nvSpPr>
-          <p:cNvPr id="2" name="Title 1"/>
+          <p:cNvPr id="2" name="Заголовок 1">
+            <a:extLst>
+              <a:ext uri="{FF2B5EF4-FFF2-40B4-BE49-F238E27FC236}">
+                <a16:creationId xmlns:a16="http://schemas.microsoft.com/office/drawing/2014/main" id="{882CF0F5-41D5-8650-E193-9797325AF80B}"/>
+              </a:ext>
+            </a:extLst>
+          </p:cNvPr>
           <p:cNvSpPr>
             <a:spLocks noGrp="1"/>
           </p:cNvSpPr>
@@ -2819,23 +812,24 @@
         <p:spPr/>
         <p:txBody>
           <a:bodyPr/>
-          <a:lstStyle>
-            <a:lvl1pPr algn="l">
-              <a:defRPr/>
-            </a:lvl1pPr>
-          </a:lstStyle>
+          <a:lstStyle/>
           <a:p>
             <a:r>
               <a:rPr lang="ru-RU"/>
               <a:t>Образец заголовка</a:t>
             </a:r>
-            <a:endParaRPr lang="en-US" dirty="0"/>
-          </a:p>
-        </p:txBody>
-      </p:sp>
-      <p:sp>
-        <p:nvSpPr>
-          <p:cNvPr id="3" name="Vertical Text Placeholder 2"/>
+          </a:p>
+        </p:txBody>
+      </p:sp>
+      <p:sp>
+        <p:nvSpPr>
+          <p:cNvPr id="3" name="Вертикальный текст 2">
+            <a:extLst>
+              <a:ext uri="{FF2B5EF4-FFF2-40B4-BE49-F238E27FC236}">
+                <a16:creationId xmlns:a16="http://schemas.microsoft.com/office/drawing/2014/main" id="{28028BF2-7DB4-EA6C-789B-FFE1C8A340BA}"/>
+              </a:ext>
+            </a:extLst>
+          </p:cNvPr>
           <p:cNvSpPr>
             <a:spLocks noGrp="1"/>
           </p:cNvSpPr>
@@ -2845,7 +839,7 @@
         </p:nvSpPr>
         <p:spPr/>
         <p:txBody>
-          <a:bodyPr vert="eaVert" anchor="t"/>
+          <a:bodyPr vert="eaVert"/>
           <a:lstStyle/>
           <a:p>
             <a:pPr lvl="0"/>
@@ -2881,13 +875,18 @@
               <a:rPr lang="ru-RU"/>
               <a:t>Пятый уровень</a:t>
             </a:r>
-            <a:endParaRPr lang="en-US" dirty="0"/>
-          </a:p>
-        </p:txBody>
-      </p:sp>
-      <p:sp>
-        <p:nvSpPr>
-          <p:cNvPr id="4" name="Date Placeholder 3"/>
+          </a:p>
+        </p:txBody>
+      </p:sp>
+      <p:sp>
+        <p:nvSpPr>
+          <p:cNvPr id="4" name="Дата 3">
+            <a:extLst>
+              <a:ext uri="{FF2B5EF4-FFF2-40B4-BE49-F238E27FC236}">
+                <a16:creationId xmlns:a16="http://schemas.microsoft.com/office/drawing/2014/main" id="{F6AED587-A549-906C-0280-75BAD1C7AC4F}"/>
+              </a:ext>
+            </a:extLst>
+          </p:cNvPr>
           <p:cNvSpPr>
             <a:spLocks noGrp="1"/>
           </p:cNvSpPr>
@@ -2902,7 +901,7 @@
           <a:p>
             <a:fld id="{5489760F-A808-480A-84F8-01DD6B446E6A}" type="datetimeFigureOut">
               <a:rPr lang="ru-RU" smtClean="0"/>
-              <a:t>30.10.2025</a:t>
+              <a:t>05.11.2025</a:t>
             </a:fld>
             <a:endParaRPr lang="ru-RU"/>
           </a:p>
@@ -2910,7 +909,13 @@
       </p:sp>
       <p:sp>
         <p:nvSpPr>
-          <p:cNvPr id="5" name="Footer Placeholder 4"/>
+          <p:cNvPr id="5" name="Нижний колонтитул 4">
+            <a:extLst>
+              <a:ext uri="{FF2B5EF4-FFF2-40B4-BE49-F238E27FC236}">
+                <a16:creationId xmlns:a16="http://schemas.microsoft.com/office/drawing/2014/main" id="{6A9A64B3-087C-3BB3-71DE-779C982F4655}"/>
+              </a:ext>
+            </a:extLst>
+          </p:cNvPr>
           <p:cNvSpPr>
             <a:spLocks noGrp="1"/>
           </p:cNvSpPr>
@@ -2929,7 +934,13 @@
       </p:sp>
       <p:sp>
         <p:nvSpPr>
-          <p:cNvPr id="6" name="Slide Number Placeholder 5"/>
+          <p:cNvPr id="6" name="Номер слайда 5">
+            <a:extLst>
+              <a:ext uri="{FF2B5EF4-FFF2-40B4-BE49-F238E27FC236}">
+                <a16:creationId xmlns:a16="http://schemas.microsoft.com/office/drawing/2014/main" id="{508F47FF-68FF-D895-4423-6E260E865C97}"/>
+              </a:ext>
+            </a:extLst>
+          </p:cNvPr>
           <p:cNvSpPr>
             <a:spLocks noGrp="1"/>
           </p:cNvSpPr>
@@ -2953,7 +964,7 @@
     </p:spTree>
     <p:extLst>
       <p:ext uri="{BB962C8B-B14F-4D97-AF65-F5344CB8AC3E}">
-        <p14:creationId xmlns:p14="http://schemas.microsoft.com/office/powerpoint/2010/main" val="2705262116"/>
+        <p14:creationId xmlns:p14="http://schemas.microsoft.com/office/powerpoint/2010/main" val="603990885"/>
       </p:ext>
     </p:extLst>
   </p:cSld>
@@ -2963,7 +974,7 @@
 </p:sldLayout>
 </file>
 
-<file path=ppt/slideLayouts/slideLayout17.xml><?xml version="1.0" encoding="utf-8"?>
+<file path=ppt/slideLayouts/slideLayout11.xml><?xml version="1.0" encoding="utf-8"?>
 <p:sldLayout xmlns:a="http://schemas.openxmlformats.org/drawingml/2006/main" xmlns:r="http://schemas.openxmlformats.org/officeDocument/2006/relationships" xmlns:p="http://schemas.openxmlformats.org/presentationml/2006/main" type="vertTitleAndTx" preserve="1">
   <p:cSld name="Вертикальный заголовок и текст">
     <p:spTree>
@@ -2982,7 +993,13 @@
       </p:grpSpPr>
       <p:sp>
         <p:nvSpPr>
-          <p:cNvPr id="2" name="Vertical Title 1"/>
+          <p:cNvPr id="2" name="Вертикальный заголовок 1">
+            <a:extLst>
+              <a:ext uri="{FF2B5EF4-FFF2-40B4-BE49-F238E27FC236}">
+                <a16:creationId xmlns:a16="http://schemas.microsoft.com/office/drawing/2014/main" id="{1AC5F8C9-0CAC-E10E-08DC-D4365C8981CE}"/>
+              </a:ext>
+            </a:extLst>
+          </p:cNvPr>
           <p:cNvSpPr>
             <a:spLocks noGrp="1"/>
           </p:cNvSpPr>
@@ -2992,8 +1009,8 @@
         </p:nvSpPr>
         <p:spPr>
           <a:xfrm>
-            <a:off x="8685212" y="685800"/>
-            <a:ext cx="2057400" cy="4572000"/>
+            <a:off x="8724900" y="365125"/>
+            <a:ext cx="2628900" cy="5811838"/>
           </a:xfrm>
         </p:spPr>
         <p:txBody>
@@ -3004,13 +1021,18 @@
               <a:rPr lang="ru-RU"/>
               <a:t>Образец заголовка</a:t>
             </a:r>
-            <a:endParaRPr lang="en-US" dirty="0"/>
-          </a:p>
-        </p:txBody>
-      </p:sp>
-      <p:sp>
-        <p:nvSpPr>
-          <p:cNvPr id="3" name="Vertical Text Placeholder 2"/>
+          </a:p>
+        </p:txBody>
+      </p:sp>
+      <p:sp>
+        <p:nvSpPr>
+          <p:cNvPr id="3" name="Вертикальный текст 2">
+            <a:extLst>
+              <a:ext uri="{FF2B5EF4-FFF2-40B4-BE49-F238E27FC236}">
+                <a16:creationId xmlns:a16="http://schemas.microsoft.com/office/drawing/2014/main" id="{92EE96D8-01FA-CD89-CC8B-3B8F9C87259F}"/>
+              </a:ext>
+            </a:extLst>
+          </p:cNvPr>
           <p:cNvSpPr>
             <a:spLocks noGrp="1"/>
           </p:cNvSpPr>
@@ -3020,12 +1042,12 @@
         </p:nvSpPr>
         <p:spPr>
           <a:xfrm>
-            <a:off x="685800" y="685800"/>
-            <a:ext cx="7823200" cy="5308600"/>
+            <a:off x="838200" y="365125"/>
+            <a:ext cx="7734300" cy="5811838"/>
           </a:xfrm>
         </p:spPr>
         <p:txBody>
-          <a:bodyPr vert="eaVert" anchor="t"/>
+          <a:bodyPr vert="eaVert"/>
           <a:lstStyle/>
           <a:p>
             <a:pPr lvl="0"/>
@@ -3061,13 +1083,18 @@
               <a:rPr lang="ru-RU"/>
               <a:t>Пятый уровень</a:t>
             </a:r>
-            <a:endParaRPr lang="en-US" dirty="0"/>
-          </a:p>
-        </p:txBody>
-      </p:sp>
-      <p:sp>
-        <p:nvSpPr>
-          <p:cNvPr id="4" name="Date Placeholder 3"/>
+          </a:p>
+        </p:txBody>
+      </p:sp>
+      <p:sp>
+        <p:nvSpPr>
+          <p:cNvPr id="4" name="Дата 3">
+            <a:extLst>
+              <a:ext uri="{FF2B5EF4-FFF2-40B4-BE49-F238E27FC236}">
+                <a16:creationId xmlns:a16="http://schemas.microsoft.com/office/drawing/2014/main" id="{986F6EC6-C093-DBBD-7E75-5F862523F98B}"/>
+              </a:ext>
+            </a:extLst>
+          </p:cNvPr>
           <p:cNvSpPr>
             <a:spLocks noGrp="1"/>
           </p:cNvSpPr>
@@ -3082,7 +1109,7 @@
           <a:p>
             <a:fld id="{5489760F-A808-480A-84F8-01DD6B446E6A}" type="datetimeFigureOut">
               <a:rPr lang="ru-RU" smtClean="0"/>
-              <a:t>30.10.2025</a:t>
+              <a:t>05.11.2025</a:t>
             </a:fld>
             <a:endParaRPr lang="ru-RU"/>
           </a:p>
@@ -3090,7 +1117,13 @@
       </p:sp>
       <p:sp>
         <p:nvSpPr>
-          <p:cNvPr id="5" name="Footer Placeholder 4"/>
+          <p:cNvPr id="5" name="Нижний колонтитул 4">
+            <a:extLst>
+              <a:ext uri="{FF2B5EF4-FFF2-40B4-BE49-F238E27FC236}">
+                <a16:creationId xmlns:a16="http://schemas.microsoft.com/office/drawing/2014/main" id="{D7E5B342-7033-E5B0-14BC-1890E0FD1120}"/>
+              </a:ext>
+            </a:extLst>
+          </p:cNvPr>
           <p:cNvSpPr>
             <a:spLocks noGrp="1"/>
           </p:cNvSpPr>
@@ -3109,7 +1142,13 @@
       </p:sp>
       <p:sp>
         <p:nvSpPr>
-          <p:cNvPr id="6" name="Slide Number Placeholder 5"/>
+          <p:cNvPr id="6" name="Номер слайда 5">
+            <a:extLst>
+              <a:ext uri="{FF2B5EF4-FFF2-40B4-BE49-F238E27FC236}">
+                <a16:creationId xmlns:a16="http://schemas.microsoft.com/office/drawing/2014/main" id="{D34282A5-8964-9A75-4E67-61989A31959D}"/>
+              </a:ext>
+            </a:extLst>
+          </p:cNvPr>
           <p:cNvSpPr>
             <a:spLocks noGrp="1"/>
           </p:cNvSpPr>
@@ -3133,7 +1172,7 @@
     </p:spTree>
     <p:extLst>
       <p:ext uri="{BB962C8B-B14F-4D97-AF65-F5344CB8AC3E}">
-        <p14:creationId xmlns:p14="http://schemas.microsoft.com/office/powerpoint/2010/main" val="224156779"/>
+        <p14:creationId xmlns:p14="http://schemas.microsoft.com/office/powerpoint/2010/main" val="439456673"/>
       </p:ext>
     </p:extLst>
   </p:cSld>
@@ -3162,7 +1201,13 @@
       </p:grpSpPr>
       <p:sp>
         <p:nvSpPr>
-          <p:cNvPr id="2" name="Title 1"/>
+          <p:cNvPr id="2" name="Заголовок 1">
+            <a:extLst>
+              <a:ext uri="{FF2B5EF4-FFF2-40B4-BE49-F238E27FC236}">
+                <a16:creationId xmlns:a16="http://schemas.microsoft.com/office/drawing/2014/main" id="{DE722F3F-17CD-E93E-536C-A27079BCDDEE}"/>
+              </a:ext>
+            </a:extLst>
+          </p:cNvPr>
           <p:cNvSpPr>
             <a:spLocks noGrp="1"/>
           </p:cNvSpPr>
@@ -3179,13 +1224,18 @@
               <a:rPr lang="ru-RU"/>
               <a:t>Образец заголовка</a:t>
             </a:r>
-            <a:endParaRPr lang="en-US" dirty="0"/>
-          </a:p>
-        </p:txBody>
-      </p:sp>
-      <p:sp>
-        <p:nvSpPr>
-          <p:cNvPr id="3" name="Content Placeholder 2"/>
+          </a:p>
+        </p:txBody>
+      </p:sp>
+      <p:sp>
+        <p:nvSpPr>
+          <p:cNvPr id="3" name="Объект 2">
+            <a:extLst>
+              <a:ext uri="{FF2B5EF4-FFF2-40B4-BE49-F238E27FC236}">
+                <a16:creationId xmlns:a16="http://schemas.microsoft.com/office/drawing/2014/main" id="{17355A5A-0020-B341-7FBE-C1F5DDFEE550}"/>
+              </a:ext>
+            </a:extLst>
+          </p:cNvPr>
           <p:cNvSpPr>
             <a:spLocks noGrp="1"/>
           </p:cNvSpPr>
@@ -3195,7 +1245,7 @@
         </p:nvSpPr>
         <p:spPr/>
         <p:txBody>
-          <a:bodyPr anchor="ctr"/>
+          <a:bodyPr/>
           <a:lstStyle/>
           <a:p>
             <a:pPr lvl="0"/>
@@ -3231,13 +1281,18 @@
               <a:rPr lang="ru-RU"/>
               <a:t>Пятый уровень</a:t>
             </a:r>
-            <a:endParaRPr lang="en-US" dirty="0"/>
-          </a:p>
-        </p:txBody>
-      </p:sp>
-      <p:sp>
-        <p:nvSpPr>
-          <p:cNvPr id="4" name="Date Placeholder 3"/>
+          </a:p>
+        </p:txBody>
+      </p:sp>
+      <p:sp>
+        <p:nvSpPr>
+          <p:cNvPr id="4" name="Дата 3">
+            <a:extLst>
+              <a:ext uri="{FF2B5EF4-FFF2-40B4-BE49-F238E27FC236}">
+                <a16:creationId xmlns:a16="http://schemas.microsoft.com/office/drawing/2014/main" id="{310F8A37-ACD1-639F-0F59-22D87D48411E}"/>
+              </a:ext>
+            </a:extLst>
+          </p:cNvPr>
           <p:cNvSpPr>
             <a:spLocks noGrp="1"/>
           </p:cNvSpPr>
@@ -3252,7 +1307,7 @@
           <a:p>
             <a:fld id="{5489760F-A808-480A-84F8-01DD6B446E6A}" type="datetimeFigureOut">
               <a:rPr lang="ru-RU" smtClean="0"/>
-              <a:t>30.10.2025</a:t>
+              <a:t>05.11.2025</a:t>
             </a:fld>
             <a:endParaRPr lang="ru-RU"/>
           </a:p>
@@ -3260,7 +1315,13 @@
       </p:sp>
       <p:sp>
         <p:nvSpPr>
-          <p:cNvPr id="5" name="Footer Placeholder 4"/>
+          <p:cNvPr id="5" name="Нижний колонтитул 4">
+            <a:extLst>
+              <a:ext uri="{FF2B5EF4-FFF2-40B4-BE49-F238E27FC236}">
+                <a16:creationId xmlns:a16="http://schemas.microsoft.com/office/drawing/2014/main" id="{FEC40AEC-0642-A4A6-D46C-C339DA757E3C}"/>
+              </a:ext>
+            </a:extLst>
+          </p:cNvPr>
           <p:cNvSpPr>
             <a:spLocks noGrp="1"/>
           </p:cNvSpPr>
@@ -3279,7 +1340,13 @@
       </p:sp>
       <p:sp>
         <p:nvSpPr>
-          <p:cNvPr id="6" name="Slide Number Placeholder 5"/>
+          <p:cNvPr id="6" name="Номер слайда 5">
+            <a:extLst>
+              <a:ext uri="{FF2B5EF4-FFF2-40B4-BE49-F238E27FC236}">
+                <a16:creationId xmlns:a16="http://schemas.microsoft.com/office/drawing/2014/main" id="{5266024E-03BF-412D-84C8-3523C27A1D82}"/>
+              </a:ext>
+            </a:extLst>
+          </p:cNvPr>
           <p:cNvSpPr>
             <a:spLocks noGrp="1"/>
           </p:cNvSpPr>
@@ -3303,7 +1370,7 @@
     </p:spTree>
     <p:extLst>
       <p:ext uri="{BB962C8B-B14F-4D97-AF65-F5344CB8AC3E}">
-        <p14:creationId xmlns:p14="http://schemas.microsoft.com/office/powerpoint/2010/main" val="2376862272"/>
+        <p14:creationId xmlns:p14="http://schemas.microsoft.com/office/powerpoint/2010/main" val="1893151399"/>
       </p:ext>
     </p:extLst>
   </p:cSld>
@@ -3332,7 +1399,13 @@
       </p:grpSpPr>
       <p:sp>
         <p:nvSpPr>
-          <p:cNvPr id="2" name="Title 1"/>
+          <p:cNvPr id="2" name="Заголовок 1">
+            <a:extLst>
+              <a:ext uri="{FF2B5EF4-FFF2-40B4-BE49-F238E27FC236}">
+                <a16:creationId xmlns:a16="http://schemas.microsoft.com/office/drawing/2014/main" id="{8D4075FF-AAFD-CC67-87E2-7E8469A571D3}"/>
+              </a:ext>
+            </a:extLst>
+          </p:cNvPr>
           <p:cNvSpPr>
             <a:spLocks noGrp="1"/>
           </p:cNvSpPr>
@@ -3342,17 +1415,15 @@
         </p:nvSpPr>
         <p:spPr>
           <a:xfrm>
-            <a:off x="684211" y="2006600"/>
-            <a:ext cx="8534401" cy="2281600"/>
+            <a:off x="831850" y="1709738"/>
+            <a:ext cx="10515600" cy="2852737"/>
           </a:xfrm>
         </p:spPr>
         <p:txBody>
-          <a:bodyPr anchor="b">
-            <a:normAutofit/>
-          </a:bodyPr>
+          <a:bodyPr anchor="b"/>
           <a:lstStyle>
-            <a:lvl1pPr algn="l">
-              <a:defRPr sz="3600" b="0" cap="all"/>
+            <a:lvl1pPr>
+              <a:defRPr sz="6000"/>
             </a:lvl1pPr>
           </a:lstStyle>
           <a:p>
@@ -3360,13 +1431,18 @@
               <a:rPr lang="ru-RU"/>
               <a:t>Образец заголовка</a:t>
             </a:r>
-            <a:endParaRPr lang="en-US" dirty="0"/>
-          </a:p>
-        </p:txBody>
-      </p:sp>
-      <p:sp>
-        <p:nvSpPr>
-          <p:cNvPr id="3" name="Text Placeholder 2"/>
+          </a:p>
+        </p:txBody>
+      </p:sp>
+      <p:sp>
+        <p:nvSpPr>
+          <p:cNvPr id="3" name="Текст 2">
+            <a:extLst>
+              <a:ext uri="{FF2B5EF4-FFF2-40B4-BE49-F238E27FC236}">
+                <a16:creationId xmlns:a16="http://schemas.microsoft.com/office/drawing/2014/main" id="{0392673F-C07C-ED7D-7B0E-426E783AC4F3}"/>
+              </a:ext>
+            </a:extLst>
+          </p:cNvPr>
           <p:cNvSpPr>
             <a:spLocks noGrp="1"/>
           </p:cNvSpPr>
@@ -3376,28 +1452,26 @@
         </p:nvSpPr>
         <p:spPr>
           <a:xfrm>
-            <a:off x="684213" y="4495800"/>
-            <a:ext cx="8534400" cy="1498600"/>
+            <a:off x="831850" y="4589463"/>
+            <a:ext cx="10515600" cy="1500187"/>
           </a:xfrm>
         </p:spPr>
         <p:txBody>
-          <a:bodyPr anchor="t">
-            <a:normAutofit/>
-          </a:bodyPr>
+          <a:bodyPr/>
           <a:lstStyle>
-            <a:lvl1pPr marL="0" indent="0" algn="l">
+            <a:lvl1pPr marL="0" indent="0">
               <a:buNone/>
-              <a:defRPr sz="1800">
+              <a:defRPr sz="2400">
                 <a:solidFill>
-                  <a:schemeClr val="bg2">
-                    <a:lumMod val="75000"/>
+                  <a:schemeClr val="tx1">
+                    <a:tint val="75000"/>
                   </a:schemeClr>
                 </a:solidFill>
               </a:defRPr>
             </a:lvl1pPr>
             <a:lvl2pPr marL="457200" indent="0">
               <a:buNone/>
-              <a:defRPr sz="1800">
+              <a:defRPr sz="2000">
                 <a:solidFill>
                   <a:schemeClr val="tx1">
                     <a:tint val="75000"/>
@@ -3407,7 +1481,7 @@
             </a:lvl2pPr>
             <a:lvl3pPr marL="914400" indent="0">
               <a:buNone/>
-              <a:defRPr sz="1600">
+              <a:defRPr sz="1800">
                 <a:solidFill>
                   <a:schemeClr val="tx1">
                     <a:tint val="75000"/>
@@ -3417,7 +1491,7 @@
             </a:lvl3pPr>
             <a:lvl4pPr marL="1371600" indent="0">
               <a:buNone/>
-              <a:defRPr sz="1400">
+              <a:defRPr sz="1600">
                 <a:solidFill>
                   <a:schemeClr val="tx1">
                     <a:tint val="75000"/>
@@ -3427,7 +1501,7 @@
             </a:lvl4pPr>
             <a:lvl5pPr marL="1828800" indent="0">
               <a:buNone/>
-              <a:defRPr sz="1400">
+              <a:defRPr sz="1600">
                 <a:solidFill>
                   <a:schemeClr val="tx1">
                     <a:tint val="75000"/>
@@ -3437,7 +1511,7 @@
             </a:lvl5pPr>
             <a:lvl6pPr marL="2286000" indent="0">
               <a:buNone/>
-              <a:defRPr sz="1400">
+              <a:defRPr sz="1600">
                 <a:solidFill>
                   <a:schemeClr val="tx1">
                     <a:tint val="75000"/>
@@ -3447,7 +1521,7 @@
             </a:lvl6pPr>
             <a:lvl7pPr marL="2743200" indent="0">
               <a:buNone/>
-              <a:defRPr sz="1400">
+              <a:defRPr sz="1600">
                 <a:solidFill>
                   <a:schemeClr val="tx1">
                     <a:tint val="75000"/>
@@ -3457,7 +1531,7 @@
             </a:lvl7pPr>
             <a:lvl8pPr marL="3200400" indent="0">
               <a:buNone/>
-              <a:defRPr sz="1400">
+              <a:defRPr sz="1600">
                 <a:solidFill>
                   <a:schemeClr val="tx1">
                     <a:tint val="75000"/>
@@ -3467,7 +1541,7 @@
             </a:lvl8pPr>
             <a:lvl9pPr marL="3657600" indent="0">
               <a:buNone/>
-              <a:defRPr sz="1400">
+              <a:defRPr sz="1600">
                 <a:solidFill>
                   <a:schemeClr val="tx1">
                     <a:tint val="75000"/>
@@ -3487,7 +1561,13 @@
       </p:sp>
       <p:sp>
         <p:nvSpPr>
-          <p:cNvPr id="4" name="Date Placeholder 3"/>
+          <p:cNvPr id="4" name="Дата 3">
+            <a:extLst>
+              <a:ext uri="{FF2B5EF4-FFF2-40B4-BE49-F238E27FC236}">
+                <a16:creationId xmlns:a16="http://schemas.microsoft.com/office/drawing/2014/main" id="{F9FEFCAD-2115-E3F4-B9E4-5AC9955992B8}"/>
+              </a:ext>
+            </a:extLst>
+          </p:cNvPr>
           <p:cNvSpPr>
             <a:spLocks noGrp="1"/>
           </p:cNvSpPr>
@@ -3502,7 +1582,7 @@
           <a:p>
             <a:fld id="{5489760F-A808-480A-84F8-01DD6B446E6A}" type="datetimeFigureOut">
               <a:rPr lang="ru-RU" smtClean="0"/>
-              <a:t>30.10.2025</a:t>
+              <a:t>05.11.2025</a:t>
             </a:fld>
             <a:endParaRPr lang="ru-RU"/>
           </a:p>
@@ -3510,7 +1590,13 @@
       </p:sp>
       <p:sp>
         <p:nvSpPr>
-          <p:cNvPr id="5" name="Footer Placeholder 4"/>
+          <p:cNvPr id="5" name="Нижний колонтитул 4">
+            <a:extLst>
+              <a:ext uri="{FF2B5EF4-FFF2-40B4-BE49-F238E27FC236}">
+                <a16:creationId xmlns:a16="http://schemas.microsoft.com/office/drawing/2014/main" id="{21948F97-09A7-E4AB-17AF-536D1E5AF87B}"/>
+              </a:ext>
+            </a:extLst>
+          </p:cNvPr>
           <p:cNvSpPr>
             <a:spLocks noGrp="1"/>
           </p:cNvSpPr>
@@ -3529,7 +1615,13 @@
       </p:sp>
       <p:sp>
         <p:nvSpPr>
-          <p:cNvPr id="6" name="Slide Number Placeholder 5"/>
+          <p:cNvPr id="6" name="Номер слайда 5">
+            <a:extLst>
+              <a:ext uri="{FF2B5EF4-FFF2-40B4-BE49-F238E27FC236}">
+                <a16:creationId xmlns:a16="http://schemas.microsoft.com/office/drawing/2014/main" id="{3F9B091A-E51A-D478-4D4E-E38EF32CF2D7}"/>
+              </a:ext>
+            </a:extLst>
+          </p:cNvPr>
           <p:cNvSpPr>
             <a:spLocks noGrp="1"/>
           </p:cNvSpPr>
@@ -3553,7 +1645,7 @@
     </p:spTree>
     <p:extLst>
       <p:ext uri="{BB962C8B-B14F-4D97-AF65-F5344CB8AC3E}">
-        <p14:creationId xmlns:p14="http://schemas.microsoft.com/office/powerpoint/2010/main" val="3439966778"/>
+        <p14:creationId xmlns:p14="http://schemas.microsoft.com/office/powerpoint/2010/main" val="2883294294"/>
       </p:ext>
     </p:extLst>
   </p:cSld>
@@ -3582,7 +1674,13 @@
       </p:grpSpPr>
       <p:sp>
         <p:nvSpPr>
-          <p:cNvPr id="2" name="Title 1"/>
+          <p:cNvPr id="2" name="Заголовок 1">
+            <a:extLst>
+              <a:ext uri="{FF2B5EF4-FFF2-40B4-BE49-F238E27FC236}">
+                <a16:creationId xmlns:a16="http://schemas.microsoft.com/office/drawing/2014/main" id="{06278162-621F-C610-3C5F-6B7A5F25042F}"/>
+              </a:ext>
+            </a:extLst>
+          </p:cNvPr>
           <p:cNvSpPr>
             <a:spLocks noGrp="1"/>
           </p:cNvSpPr>
@@ -3599,13 +1697,18 @@
               <a:rPr lang="ru-RU"/>
               <a:t>Образец заголовка</a:t>
             </a:r>
-            <a:endParaRPr lang="en-US" dirty="0"/>
-          </a:p>
-        </p:txBody>
-      </p:sp>
-      <p:sp>
-        <p:nvSpPr>
-          <p:cNvPr id="3" name="Content Placeholder 2"/>
+          </a:p>
+        </p:txBody>
+      </p:sp>
+      <p:sp>
+        <p:nvSpPr>
+          <p:cNvPr id="3" name="Объект 2">
+            <a:extLst>
+              <a:ext uri="{FF2B5EF4-FFF2-40B4-BE49-F238E27FC236}">
+                <a16:creationId xmlns:a16="http://schemas.microsoft.com/office/drawing/2014/main" id="{5F8FF868-0034-1748-2DD7-3C31397D093C}"/>
+              </a:ext>
+            </a:extLst>
+          </p:cNvPr>
           <p:cNvSpPr>
             <a:spLocks noGrp="1"/>
           </p:cNvSpPr>
@@ -3615,14 +1718,12 @@
         </p:nvSpPr>
         <p:spPr>
           <a:xfrm>
-            <a:off x="684211" y="685800"/>
-            <a:ext cx="4937655" cy="3615267"/>
+            <a:off x="838200" y="1825625"/>
+            <a:ext cx="5181600" cy="4351338"/>
           </a:xfrm>
         </p:spPr>
         <p:txBody>
-          <a:bodyPr>
-            <a:normAutofit/>
-          </a:bodyPr>
+          <a:bodyPr/>
           <a:lstStyle/>
           <a:p>
             <a:pPr lvl="0"/>
@@ -3658,13 +1759,18 @@
               <a:rPr lang="ru-RU"/>
               <a:t>Пятый уровень</a:t>
             </a:r>
-            <a:endParaRPr lang="en-US" dirty="0"/>
-          </a:p>
-        </p:txBody>
-      </p:sp>
-      <p:sp>
-        <p:nvSpPr>
-          <p:cNvPr id="4" name="Content Placeholder 3"/>
+          </a:p>
+        </p:txBody>
+      </p:sp>
+      <p:sp>
+        <p:nvSpPr>
+          <p:cNvPr id="4" name="Объект 3">
+            <a:extLst>
+              <a:ext uri="{FF2B5EF4-FFF2-40B4-BE49-F238E27FC236}">
+                <a16:creationId xmlns:a16="http://schemas.microsoft.com/office/drawing/2014/main" id="{38286487-CEBA-6056-9738-301A298D96B3}"/>
+              </a:ext>
+            </a:extLst>
+          </p:cNvPr>
           <p:cNvSpPr>
             <a:spLocks noGrp="1"/>
           </p:cNvSpPr>
@@ -3674,14 +1780,12 @@
         </p:nvSpPr>
         <p:spPr>
           <a:xfrm>
-            <a:off x="5808133" y="685801"/>
-            <a:ext cx="4934479" cy="3615266"/>
+            <a:off x="6172200" y="1825625"/>
+            <a:ext cx="5181600" cy="4351338"/>
           </a:xfrm>
         </p:spPr>
         <p:txBody>
-          <a:bodyPr>
-            <a:normAutofit/>
-          </a:bodyPr>
+          <a:bodyPr/>
           <a:lstStyle/>
           <a:p>
             <a:pPr lvl="0"/>
@@ -3717,13 +1821,18 @@
               <a:rPr lang="ru-RU"/>
               <a:t>Пятый уровень</a:t>
             </a:r>
-            <a:endParaRPr lang="en-US" dirty="0"/>
-          </a:p>
-        </p:txBody>
-      </p:sp>
-      <p:sp>
-        <p:nvSpPr>
-          <p:cNvPr id="5" name="Date Placeholder 4"/>
+          </a:p>
+        </p:txBody>
+      </p:sp>
+      <p:sp>
+        <p:nvSpPr>
+          <p:cNvPr id="5" name="Дата 4">
+            <a:extLst>
+              <a:ext uri="{FF2B5EF4-FFF2-40B4-BE49-F238E27FC236}">
+                <a16:creationId xmlns:a16="http://schemas.microsoft.com/office/drawing/2014/main" id="{629AC39A-EBA1-2585-ED46-A6F57BB501EF}"/>
+              </a:ext>
+            </a:extLst>
+          </p:cNvPr>
           <p:cNvSpPr>
             <a:spLocks noGrp="1"/>
           </p:cNvSpPr>
@@ -3738,7 +1847,7 @@
           <a:p>
             <a:fld id="{5489760F-A808-480A-84F8-01DD6B446E6A}" type="datetimeFigureOut">
               <a:rPr lang="ru-RU" smtClean="0"/>
-              <a:t>30.10.2025</a:t>
+              <a:t>05.11.2025</a:t>
             </a:fld>
             <a:endParaRPr lang="ru-RU"/>
           </a:p>
@@ -3746,7 +1855,13 @@
       </p:sp>
       <p:sp>
         <p:nvSpPr>
-          <p:cNvPr id="6" name="Footer Placeholder 5"/>
+          <p:cNvPr id="6" name="Нижний колонтитул 5">
+            <a:extLst>
+              <a:ext uri="{FF2B5EF4-FFF2-40B4-BE49-F238E27FC236}">
+                <a16:creationId xmlns:a16="http://schemas.microsoft.com/office/drawing/2014/main" id="{3DB066B0-D12B-7F80-E5C4-B5C094255598}"/>
+              </a:ext>
+            </a:extLst>
+          </p:cNvPr>
           <p:cNvSpPr>
             <a:spLocks noGrp="1"/>
           </p:cNvSpPr>
@@ -3765,7 +1880,13 @@
       </p:sp>
       <p:sp>
         <p:nvSpPr>
-          <p:cNvPr id="7" name="Slide Number Placeholder 6"/>
+          <p:cNvPr id="7" name="Номер слайда 6">
+            <a:extLst>
+              <a:ext uri="{FF2B5EF4-FFF2-40B4-BE49-F238E27FC236}">
+                <a16:creationId xmlns:a16="http://schemas.microsoft.com/office/drawing/2014/main" id="{80FECF13-8ECE-AF5C-C159-87D8CDDB1959}"/>
+              </a:ext>
+            </a:extLst>
+          </p:cNvPr>
           <p:cNvSpPr>
             <a:spLocks noGrp="1"/>
           </p:cNvSpPr>
@@ -3789,7 +1910,7 @@
     </p:spTree>
     <p:extLst>
       <p:ext uri="{BB962C8B-B14F-4D97-AF65-F5344CB8AC3E}">
-        <p14:creationId xmlns:p14="http://schemas.microsoft.com/office/powerpoint/2010/main" val="1041366186"/>
+        <p14:creationId xmlns:p14="http://schemas.microsoft.com/office/powerpoint/2010/main" val="1204682182"/>
       </p:ext>
     </p:extLst>
   </p:cSld>
@@ -3818,7 +1939,13 @@
       </p:grpSpPr>
       <p:sp>
         <p:nvSpPr>
-          <p:cNvPr id="2" name="Title 1"/>
+          <p:cNvPr id="2" name="Заголовок 1">
+            <a:extLst>
+              <a:ext uri="{FF2B5EF4-FFF2-40B4-BE49-F238E27FC236}">
+                <a16:creationId xmlns:a16="http://schemas.microsoft.com/office/drawing/2014/main" id="{84B4CD93-0401-FB35-78EB-ACF6A3A0E64A}"/>
+              </a:ext>
+            </a:extLst>
+          </p:cNvPr>
           <p:cNvSpPr>
             <a:spLocks noGrp="1"/>
           </p:cNvSpPr>
@@ -3826,26 +1953,32 @@
             <p:ph type="title"/>
           </p:nvPr>
         </p:nvSpPr>
-        <p:spPr/>
+        <p:spPr>
+          <a:xfrm>
+            <a:off x="839788" y="365125"/>
+            <a:ext cx="10515600" cy="1325563"/>
+          </a:xfrm>
+        </p:spPr>
         <p:txBody>
           <a:bodyPr/>
-          <a:lstStyle>
-            <a:lvl1pPr>
-              <a:defRPr/>
-            </a:lvl1pPr>
-          </a:lstStyle>
+          <a:lstStyle/>
           <a:p>
             <a:r>
               <a:rPr lang="ru-RU"/>
               <a:t>Образец заголовка</a:t>
             </a:r>
-            <a:endParaRPr lang="en-US" dirty="0"/>
-          </a:p>
-        </p:txBody>
-      </p:sp>
-      <p:sp>
-        <p:nvSpPr>
-          <p:cNvPr id="3" name="Text Placeholder 2"/>
+          </a:p>
+        </p:txBody>
+      </p:sp>
+      <p:sp>
+        <p:nvSpPr>
+          <p:cNvPr id="3" name="Текст 2">
+            <a:extLst>
+              <a:ext uri="{FF2B5EF4-FFF2-40B4-BE49-F238E27FC236}">
+                <a16:creationId xmlns:a16="http://schemas.microsoft.com/office/drawing/2014/main" id="{5C11EFB1-F568-9B42-2424-2407813E7C8A}"/>
+              </a:ext>
+            </a:extLst>
+          </p:cNvPr>
           <p:cNvSpPr>
             <a:spLocks noGrp="1"/>
           </p:cNvSpPr>
@@ -3855,22 +1988,16 @@
         </p:nvSpPr>
         <p:spPr>
           <a:xfrm>
-            <a:off x="972080" y="685800"/>
-            <a:ext cx="4649787" cy="576262"/>
+            <a:off x="839788" y="1681163"/>
+            <a:ext cx="5157787" cy="823912"/>
           </a:xfrm>
         </p:spPr>
         <p:txBody>
-          <a:bodyPr anchor="b">
-            <a:noAutofit/>
-          </a:bodyPr>
+          <a:bodyPr anchor="b"/>
           <a:lstStyle>
             <a:lvl1pPr marL="0" indent="0">
               <a:buNone/>
-              <a:defRPr sz="2800" b="0">
-                <a:solidFill>
-                  <a:schemeClr val="tx1"/>
-                </a:solidFill>
-              </a:defRPr>
+              <a:defRPr sz="2400" b="1"/>
             </a:lvl1pPr>
             <a:lvl2pPr marL="457200" indent="0">
               <a:buNone/>
@@ -3916,7 +2043,13 @@
       </p:sp>
       <p:sp>
         <p:nvSpPr>
-          <p:cNvPr id="4" name="Content Placeholder 3"/>
+          <p:cNvPr id="4" name="Объект 3">
+            <a:extLst>
+              <a:ext uri="{FF2B5EF4-FFF2-40B4-BE49-F238E27FC236}">
+                <a16:creationId xmlns:a16="http://schemas.microsoft.com/office/drawing/2014/main" id="{21FEF163-B1D2-92B3-DF33-06FDEF046F07}"/>
+              </a:ext>
+            </a:extLst>
+          </p:cNvPr>
           <p:cNvSpPr>
             <a:spLocks noGrp="1"/>
           </p:cNvSpPr>
@@ -3926,14 +2059,12 @@
         </p:nvSpPr>
         <p:spPr>
           <a:xfrm>
-            <a:off x="684211" y="1270529"/>
-            <a:ext cx="4937655" cy="3030538"/>
+            <a:off x="839788" y="2505075"/>
+            <a:ext cx="5157787" cy="3684588"/>
           </a:xfrm>
         </p:spPr>
         <p:txBody>
-          <a:bodyPr anchor="t">
-            <a:normAutofit/>
-          </a:bodyPr>
+          <a:bodyPr/>
           <a:lstStyle/>
           <a:p>
             <a:pPr lvl="0"/>
@@ -3969,13 +2100,18 @@
               <a:rPr lang="ru-RU"/>
               <a:t>Пятый уровень</a:t>
             </a:r>
-            <a:endParaRPr lang="en-US" dirty="0"/>
-          </a:p>
-        </p:txBody>
-      </p:sp>
-      <p:sp>
-        <p:nvSpPr>
-          <p:cNvPr id="5" name="Text Placeholder 4"/>
+          </a:p>
+        </p:txBody>
+      </p:sp>
+      <p:sp>
+        <p:nvSpPr>
+          <p:cNvPr id="5" name="Текст 4">
+            <a:extLst>
+              <a:ext uri="{FF2B5EF4-FFF2-40B4-BE49-F238E27FC236}">
+                <a16:creationId xmlns:a16="http://schemas.microsoft.com/office/drawing/2014/main" id="{D58B6768-4DCD-1A7E-5CA1-E20FF723F275}"/>
+              </a:ext>
+            </a:extLst>
+          </p:cNvPr>
           <p:cNvSpPr>
             <a:spLocks noGrp="1"/>
           </p:cNvSpPr>
@@ -3985,22 +2121,16 @@
         </p:nvSpPr>
         <p:spPr>
           <a:xfrm>
-            <a:off x="6079066" y="685800"/>
-            <a:ext cx="4665134" cy="576262"/>
+            <a:off x="6172200" y="1681163"/>
+            <a:ext cx="5183188" cy="823912"/>
           </a:xfrm>
         </p:spPr>
         <p:txBody>
-          <a:bodyPr anchor="b">
-            <a:noAutofit/>
-          </a:bodyPr>
+          <a:bodyPr anchor="b"/>
           <a:lstStyle>
             <a:lvl1pPr marL="0" indent="0">
               <a:buNone/>
-              <a:defRPr sz="2800" b="0">
-                <a:solidFill>
-                  <a:schemeClr val="tx1"/>
-                </a:solidFill>
-              </a:defRPr>
+              <a:defRPr sz="2400" b="1"/>
             </a:lvl1pPr>
             <a:lvl2pPr marL="457200" indent="0">
               <a:buNone/>
@@ -4046,7 +2176,13 @@
       </p:sp>
       <p:sp>
         <p:nvSpPr>
-          <p:cNvPr id="6" name="Content Placeholder 5"/>
+          <p:cNvPr id="6" name="Объект 5">
+            <a:extLst>
+              <a:ext uri="{FF2B5EF4-FFF2-40B4-BE49-F238E27FC236}">
+                <a16:creationId xmlns:a16="http://schemas.microsoft.com/office/drawing/2014/main" id="{77F7BE7F-7670-CE31-07DB-AB7B471ED4F8}"/>
+              </a:ext>
+            </a:extLst>
+          </p:cNvPr>
           <p:cNvSpPr>
             <a:spLocks noGrp="1"/>
           </p:cNvSpPr>
@@ -4056,14 +2192,12 @@
         </p:nvSpPr>
         <p:spPr>
           <a:xfrm>
-            <a:off x="5806545" y="1262062"/>
-            <a:ext cx="4929188" cy="3030538"/>
+            <a:off x="6172200" y="2505075"/>
+            <a:ext cx="5183188" cy="3684588"/>
           </a:xfrm>
         </p:spPr>
         <p:txBody>
-          <a:bodyPr anchor="t">
-            <a:normAutofit/>
-          </a:bodyPr>
+          <a:bodyPr/>
           <a:lstStyle/>
           <a:p>
             <a:pPr lvl="0"/>
@@ -4099,13 +2233,18 @@
               <a:rPr lang="ru-RU"/>
               <a:t>Пятый уровень</a:t>
             </a:r>
-            <a:endParaRPr lang="en-US" dirty="0"/>
-          </a:p>
-        </p:txBody>
-      </p:sp>
-      <p:sp>
-        <p:nvSpPr>
-          <p:cNvPr id="7" name="Date Placeholder 6"/>
+          </a:p>
+        </p:txBody>
+      </p:sp>
+      <p:sp>
+        <p:nvSpPr>
+          <p:cNvPr id="7" name="Дата 6">
+            <a:extLst>
+              <a:ext uri="{FF2B5EF4-FFF2-40B4-BE49-F238E27FC236}">
+                <a16:creationId xmlns:a16="http://schemas.microsoft.com/office/drawing/2014/main" id="{11AE67D2-F8F4-34E5-4C33-35329F11738E}"/>
+              </a:ext>
+            </a:extLst>
+          </p:cNvPr>
           <p:cNvSpPr>
             <a:spLocks noGrp="1"/>
           </p:cNvSpPr>
@@ -4120,7 +2259,7 @@
           <a:p>
             <a:fld id="{5489760F-A808-480A-84F8-01DD6B446E6A}" type="datetimeFigureOut">
               <a:rPr lang="ru-RU" smtClean="0"/>
-              <a:t>30.10.2025</a:t>
+              <a:t>05.11.2025</a:t>
             </a:fld>
             <a:endParaRPr lang="ru-RU"/>
           </a:p>
@@ -4128,7 +2267,13 @@
       </p:sp>
       <p:sp>
         <p:nvSpPr>
-          <p:cNvPr id="8" name="Footer Placeholder 7"/>
+          <p:cNvPr id="8" name="Нижний колонтитул 7">
+            <a:extLst>
+              <a:ext uri="{FF2B5EF4-FFF2-40B4-BE49-F238E27FC236}">
+                <a16:creationId xmlns:a16="http://schemas.microsoft.com/office/drawing/2014/main" id="{D6FD322C-EF1F-F3D6-704C-2CECB0CAB711}"/>
+              </a:ext>
+            </a:extLst>
+          </p:cNvPr>
           <p:cNvSpPr>
             <a:spLocks noGrp="1"/>
           </p:cNvSpPr>
@@ -4147,7 +2292,13 @@
       </p:sp>
       <p:sp>
         <p:nvSpPr>
-          <p:cNvPr id="9" name="Slide Number Placeholder 8"/>
+          <p:cNvPr id="9" name="Номер слайда 8">
+            <a:extLst>
+              <a:ext uri="{FF2B5EF4-FFF2-40B4-BE49-F238E27FC236}">
+                <a16:creationId xmlns:a16="http://schemas.microsoft.com/office/drawing/2014/main" id="{6384FBA6-D56A-167F-B605-2A82D56ACB83}"/>
+              </a:ext>
+            </a:extLst>
+          </p:cNvPr>
           <p:cNvSpPr>
             <a:spLocks noGrp="1"/>
           </p:cNvSpPr>
@@ -4171,7 +2322,7 @@
     </p:spTree>
     <p:extLst>
       <p:ext uri="{BB962C8B-B14F-4D97-AF65-F5344CB8AC3E}">
-        <p14:creationId xmlns:p14="http://schemas.microsoft.com/office/powerpoint/2010/main" val="115699695"/>
+        <p14:creationId xmlns:p14="http://schemas.microsoft.com/office/powerpoint/2010/main" val="673537350"/>
       </p:ext>
     </p:extLst>
   </p:cSld>
@@ -4200,7 +2351,13 @@
       </p:grpSpPr>
       <p:sp>
         <p:nvSpPr>
-          <p:cNvPr id="2" name="Title 1"/>
+          <p:cNvPr id="2" name="Заголовок 1">
+            <a:extLst>
+              <a:ext uri="{FF2B5EF4-FFF2-40B4-BE49-F238E27FC236}">
+                <a16:creationId xmlns:a16="http://schemas.microsoft.com/office/drawing/2014/main" id="{D5F5DEF0-0C7B-12F4-17DF-372EB1981437}"/>
+              </a:ext>
+            </a:extLst>
+          </p:cNvPr>
           <p:cNvSpPr>
             <a:spLocks noGrp="1"/>
           </p:cNvSpPr>
@@ -4217,13 +2374,18 @@
               <a:rPr lang="ru-RU"/>
               <a:t>Образец заголовка</a:t>
             </a:r>
-            <a:endParaRPr lang="en-US" dirty="0"/>
-          </a:p>
-        </p:txBody>
-      </p:sp>
-      <p:sp>
-        <p:nvSpPr>
-          <p:cNvPr id="3" name="Date Placeholder 2"/>
+          </a:p>
+        </p:txBody>
+      </p:sp>
+      <p:sp>
+        <p:nvSpPr>
+          <p:cNvPr id="3" name="Дата 2">
+            <a:extLst>
+              <a:ext uri="{FF2B5EF4-FFF2-40B4-BE49-F238E27FC236}">
+                <a16:creationId xmlns:a16="http://schemas.microsoft.com/office/drawing/2014/main" id="{5574C765-6981-3279-88DE-44A771C76FF4}"/>
+              </a:ext>
+            </a:extLst>
+          </p:cNvPr>
           <p:cNvSpPr>
             <a:spLocks noGrp="1"/>
           </p:cNvSpPr>
@@ -4238,7 +2400,7 @@
           <a:p>
             <a:fld id="{5489760F-A808-480A-84F8-01DD6B446E6A}" type="datetimeFigureOut">
               <a:rPr lang="ru-RU" smtClean="0"/>
-              <a:t>30.10.2025</a:t>
+              <a:t>05.11.2025</a:t>
             </a:fld>
             <a:endParaRPr lang="ru-RU"/>
           </a:p>
@@ -4246,7 +2408,13 @@
       </p:sp>
       <p:sp>
         <p:nvSpPr>
-          <p:cNvPr id="4" name="Footer Placeholder 3"/>
+          <p:cNvPr id="4" name="Нижний колонтитул 3">
+            <a:extLst>
+              <a:ext uri="{FF2B5EF4-FFF2-40B4-BE49-F238E27FC236}">
+                <a16:creationId xmlns:a16="http://schemas.microsoft.com/office/drawing/2014/main" id="{9065188C-D66A-6857-7E43-84ADCB577598}"/>
+              </a:ext>
+            </a:extLst>
+          </p:cNvPr>
           <p:cNvSpPr>
             <a:spLocks noGrp="1"/>
           </p:cNvSpPr>
@@ -4265,7 +2433,13 @@
       </p:sp>
       <p:sp>
         <p:nvSpPr>
-          <p:cNvPr id="5" name="Slide Number Placeholder 4"/>
+          <p:cNvPr id="5" name="Номер слайда 4">
+            <a:extLst>
+              <a:ext uri="{FF2B5EF4-FFF2-40B4-BE49-F238E27FC236}">
+                <a16:creationId xmlns:a16="http://schemas.microsoft.com/office/drawing/2014/main" id="{93525607-2C8B-E24B-D2C0-58753DBC3008}"/>
+              </a:ext>
+            </a:extLst>
+          </p:cNvPr>
           <p:cNvSpPr>
             <a:spLocks noGrp="1"/>
           </p:cNvSpPr>
@@ -4289,7 +2463,7 @@
     </p:spTree>
     <p:extLst>
       <p:ext uri="{BB962C8B-B14F-4D97-AF65-F5344CB8AC3E}">
-        <p14:creationId xmlns:p14="http://schemas.microsoft.com/office/powerpoint/2010/main" val="2829780536"/>
+        <p14:creationId xmlns:p14="http://schemas.microsoft.com/office/powerpoint/2010/main" val="3187808867"/>
       </p:ext>
     </p:extLst>
   </p:cSld>
@@ -4318,7 +2492,13 @@
       </p:grpSpPr>
       <p:sp>
         <p:nvSpPr>
-          <p:cNvPr id="2" name="Date Placeholder 1"/>
+          <p:cNvPr id="2" name="Дата 1">
+            <a:extLst>
+              <a:ext uri="{FF2B5EF4-FFF2-40B4-BE49-F238E27FC236}">
+                <a16:creationId xmlns:a16="http://schemas.microsoft.com/office/drawing/2014/main" id="{75ED4032-0444-61A5-3917-75321CC7C615}"/>
+              </a:ext>
+            </a:extLst>
+          </p:cNvPr>
           <p:cNvSpPr>
             <a:spLocks noGrp="1"/>
           </p:cNvSpPr>
@@ -4333,7 +2513,7 @@
           <a:p>
             <a:fld id="{5489760F-A808-480A-84F8-01DD6B446E6A}" type="datetimeFigureOut">
               <a:rPr lang="ru-RU" smtClean="0"/>
-              <a:t>30.10.2025</a:t>
+              <a:t>05.11.2025</a:t>
             </a:fld>
             <a:endParaRPr lang="ru-RU"/>
           </a:p>
@@ -4341,7 +2521,13 @@
       </p:sp>
       <p:sp>
         <p:nvSpPr>
-          <p:cNvPr id="3" name="Footer Placeholder 2"/>
+          <p:cNvPr id="3" name="Нижний колонтитул 2">
+            <a:extLst>
+              <a:ext uri="{FF2B5EF4-FFF2-40B4-BE49-F238E27FC236}">
+                <a16:creationId xmlns:a16="http://schemas.microsoft.com/office/drawing/2014/main" id="{A0ECCC4C-DA36-5562-BADD-5A0EAE815DED}"/>
+              </a:ext>
+            </a:extLst>
+          </p:cNvPr>
           <p:cNvSpPr>
             <a:spLocks noGrp="1"/>
           </p:cNvSpPr>
@@ -4360,7 +2546,13 @@
       </p:sp>
       <p:sp>
         <p:nvSpPr>
-          <p:cNvPr id="4" name="Slide Number Placeholder 3"/>
+          <p:cNvPr id="4" name="Номер слайда 3">
+            <a:extLst>
+              <a:ext uri="{FF2B5EF4-FFF2-40B4-BE49-F238E27FC236}">
+                <a16:creationId xmlns:a16="http://schemas.microsoft.com/office/drawing/2014/main" id="{6A58488C-FC77-E540-0736-3B0C9B3BB635}"/>
+              </a:ext>
+            </a:extLst>
+          </p:cNvPr>
           <p:cNvSpPr>
             <a:spLocks noGrp="1"/>
           </p:cNvSpPr>
@@ -4384,7 +2576,7 @@
     </p:spTree>
     <p:extLst>
       <p:ext uri="{BB962C8B-B14F-4D97-AF65-F5344CB8AC3E}">
-        <p14:creationId xmlns:p14="http://schemas.microsoft.com/office/powerpoint/2010/main" val="4206577380"/>
+        <p14:creationId xmlns:p14="http://schemas.microsoft.com/office/powerpoint/2010/main" val="783005445"/>
       </p:ext>
     </p:extLst>
   </p:cSld>
@@ -4413,7 +2605,13 @@
       </p:grpSpPr>
       <p:sp>
         <p:nvSpPr>
-          <p:cNvPr id="2" name="Title 1"/>
+          <p:cNvPr id="2" name="Заголовок 1">
+            <a:extLst>
+              <a:ext uri="{FF2B5EF4-FFF2-40B4-BE49-F238E27FC236}">
+                <a16:creationId xmlns:a16="http://schemas.microsoft.com/office/drawing/2014/main" id="{AE7B983A-D955-AA55-EC40-E016EF09F44E}"/>
+              </a:ext>
+            </a:extLst>
+          </p:cNvPr>
           <p:cNvSpPr>
             <a:spLocks noGrp="1"/>
           </p:cNvSpPr>
@@ -4423,17 +2621,15 @@
         </p:nvSpPr>
         <p:spPr>
           <a:xfrm>
-            <a:off x="7085012" y="685800"/>
-            <a:ext cx="3657600" cy="1371600"/>
+            <a:off x="839788" y="457200"/>
+            <a:ext cx="3932237" cy="1600200"/>
           </a:xfrm>
         </p:spPr>
         <p:txBody>
-          <a:bodyPr anchor="b">
-            <a:normAutofit/>
-          </a:bodyPr>
+          <a:bodyPr anchor="b"/>
           <a:lstStyle>
-            <a:lvl1pPr algn="l">
-              <a:defRPr sz="2400" b="0"/>
+            <a:lvl1pPr>
+              <a:defRPr sz="3200"/>
             </a:lvl1pPr>
           </a:lstStyle>
           <a:p>
@@ -4441,13 +2637,18 @@
               <a:rPr lang="ru-RU"/>
               <a:t>Образец заголовка</a:t>
             </a:r>
-            <a:endParaRPr lang="en-US" dirty="0"/>
-          </a:p>
-        </p:txBody>
-      </p:sp>
-      <p:sp>
-        <p:nvSpPr>
-          <p:cNvPr id="3" name="Content Placeholder 2"/>
+          </a:p>
+        </p:txBody>
+      </p:sp>
+      <p:sp>
+        <p:nvSpPr>
+          <p:cNvPr id="3" name="Объект 2">
+            <a:extLst>
+              <a:ext uri="{FF2B5EF4-FFF2-40B4-BE49-F238E27FC236}">
+                <a16:creationId xmlns:a16="http://schemas.microsoft.com/office/drawing/2014/main" id="{2551CA0F-485A-3985-006A-685EFF479720}"/>
+              </a:ext>
+            </a:extLst>
+          </p:cNvPr>
           <p:cNvSpPr>
             <a:spLocks noGrp="1"/>
           </p:cNvSpPr>
@@ -4457,15 +2658,41 @@
         </p:nvSpPr>
         <p:spPr>
           <a:xfrm>
-            <a:off x="684212" y="685800"/>
-            <a:ext cx="5943601" cy="5308600"/>
+            <a:off x="5183188" y="987425"/>
+            <a:ext cx="6172200" cy="4873625"/>
           </a:xfrm>
         </p:spPr>
         <p:txBody>
-          <a:bodyPr anchor="ctr">
-            <a:normAutofit/>
-          </a:bodyPr>
-          <a:lstStyle/>
+          <a:bodyPr/>
+          <a:lstStyle>
+            <a:lvl1pPr>
+              <a:defRPr sz="3200"/>
+            </a:lvl1pPr>
+            <a:lvl2pPr>
+              <a:defRPr sz="2800"/>
+            </a:lvl2pPr>
+            <a:lvl3pPr>
+              <a:defRPr sz="2400"/>
+            </a:lvl3pPr>
+            <a:lvl4pPr>
+              <a:defRPr sz="2000"/>
+            </a:lvl4pPr>
+            <a:lvl5pPr>
+              <a:defRPr sz="2000"/>
+            </a:lvl5pPr>
+            <a:lvl6pPr>
+              <a:defRPr sz="2000"/>
+            </a:lvl6pPr>
+            <a:lvl7pPr>
+              <a:defRPr sz="2000"/>
+            </a:lvl7pPr>
+            <a:lvl8pPr>
+              <a:defRPr sz="2000"/>
+            </a:lvl8pPr>
+            <a:lvl9pPr>
+              <a:defRPr sz="2000"/>
+            </a:lvl9pPr>
+          </a:lstStyle>
           <a:p>
             <a:pPr lvl="0"/>
             <a:r>
@@ -4500,13 +2727,18 @@
               <a:rPr lang="ru-RU"/>
               <a:t>Пятый уровень</a:t>
             </a:r>
-            <a:endParaRPr lang="en-US" dirty="0"/>
-          </a:p>
-        </p:txBody>
-      </p:sp>
-      <p:sp>
-        <p:nvSpPr>
-          <p:cNvPr id="4" name="Text Placeholder 3"/>
+          </a:p>
+        </p:txBody>
+      </p:sp>
+      <p:sp>
+        <p:nvSpPr>
+          <p:cNvPr id="4" name="Текст 3">
+            <a:extLst>
+              <a:ext uri="{FF2B5EF4-FFF2-40B4-BE49-F238E27FC236}">
+                <a16:creationId xmlns:a16="http://schemas.microsoft.com/office/drawing/2014/main" id="{0394FB8C-D9F7-71F9-1FD9-4F2A7B9D7EEC}"/>
+              </a:ext>
+            </a:extLst>
+          </p:cNvPr>
           <p:cNvSpPr>
             <a:spLocks noGrp="1"/>
           </p:cNvSpPr>
@@ -4516,14 +2748,12 @@
         </p:nvSpPr>
         <p:spPr>
           <a:xfrm>
-            <a:off x="7085012" y="2209799"/>
-            <a:ext cx="3657600" cy="2091267"/>
+            <a:off x="839788" y="2057400"/>
+            <a:ext cx="3932237" cy="3811588"/>
           </a:xfrm>
         </p:spPr>
         <p:txBody>
-          <a:bodyPr anchor="t">
-            <a:normAutofit/>
-          </a:bodyPr>
+          <a:bodyPr/>
           <a:lstStyle>
             <a:lvl1pPr marL="0" indent="0">
               <a:buNone/>
@@ -4531,35 +2761,35 @@
             </a:lvl1pPr>
             <a:lvl2pPr marL="457200" indent="0">
               <a:buNone/>
-              <a:defRPr sz="1200"/>
+              <a:defRPr sz="1400"/>
             </a:lvl2pPr>
             <a:lvl3pPr marL="914400" indent="0">
               <a:buNone/>
-              <a:defRPr sz="1000"/>
+              <a:defRPr sz="1200"/>
             </a:lvl3pPr>
             <a:lvl4pPr marL="1371600" indent="0">
               <a:buNone/>
-              <a:defRPr sz="900"/>
+              <a:defRPr sz="1000"/>
             </a:lvl4pPr>
             <a:lvl5pPr marL="1828800" indent="0">
               <a:buNone/>
-              <a:defRPr sz="900"/>
+              <a:defRPr sz="1000"/>
             </a:lvl5pPr>
             <a:lvl6pPr marL="2286000" indent="0">
               <a:buNone/>
-              <a:defRPr sz="900"/>
+              <a:defRPr sz="1000"/>
             </a:lvl6pPr>
             <a:lvl7pPr marL="2743200" indent="0">
               <a:buNone/>
-              <a:defRPr sz="900"/>
+              <a:defRPr sz="1000"/>
             </a:lvl7pPr>
             <a:lvl8pPr marL="3200400" indent="0">
               <a:buNone/>
-              <a:defRPr sz="900"/>
+              <a:defRPr sz="1000"/>
             </a:lvl8pPr>
             <a:lvl9pPr marL="3657600" indent="0">
               <a:buNone/>
-              <a:defRPr sz="900"/>
+              <a:defRPr sz="1000"/>
             </a:lvl9pPr>
           </a:lstStyle>
           <a:p>
@@ -4573,7 +2803,13 @@
       </p:sp>
       <p:sp>
         <p:nvSpPr>
-          <p:cNvPr id="5" name="Date Placeholder 4"/>
+          <p:cNvPr id="5" name="Дата 4">
+            <a:extLst>
+              <a:ext uri="{FF2B5EF4-FFF2-40B4-BE49-F238E27FC236}">
+                <a16:creationId xmlns:a16="http://schemas.microsoft.com/office/drawing/2014/main" id="{FD612B0C-3676-DE91-7903-07C411528AC3}"/>
+              </a:ext>
+            </a:extLst>
+          </p:cNvPr>
           <p:cNvSpPr>
             <a:spLocks noGrp="1"/>
           </p:cNvSpPr>
@@ -4588,7 +2824,7 @@
           <a:p>
             <a:fld id="{5489760F-A808-480A-84F8-01DD6B446E6A}" type="datetimeFigureOut">
               <a:rPr lang="ru-RU" smtClean="0"/>
-              <a:t>30.10.2025</a:t>
+              <a:t>05.11.2025</a:t>
             </a:fld>
             <a:endParaRPr lang="ru-RU"/>
           </a:p>
@@ -4596,7 +2832,13 @@
       </p:sp>
       <p:sp>
         <p:nvSpPr>
-          <p:cNvPr id="6" name="Footer Placeholder 5"/>
+          <p:cNvPr id="6" name="Нижний колонтитул 5">
+            <a:extLst>
+              <a:ext uri="{FF2B5EF4-FFF2-40B4-BE49-F238E27FC236}">
+                <a16:creationId xmlns:a16="http://schemas.microsoft.com/office/drawing/2014/main" id="{F90C82EF-40B7-7B4C-FC4C-9A346BAC9F20}"/>
+              </a:ext>
+            </a:extLst>
+          </p:cNvPr>
           <p:cNvSpPr>
             <a:spLocks noGrp="1"/>
           </p:cNvSpPr>
@@ -4615,7 +2857,13 @@
       </p:sp>
       <p:sp>
         <p:nvSpPr>
-          <p:cNvPr id="7" name="Slide Number Placeholder 6"/>
+          <p:cNvPr id="7" name="Номер слайда 6">
+            <a:extLst>
+              <a:ext uri="{FF2B5EF4-FFF2-40B4-BE49-F238E27FC236}">
+                <a16:creationId xmlns:a16="http://schemas.microsoft.com/office/drawing/2014/main" id="{673DCBA4-6AF8-D431-5A0E-0413068623D1}"/>
+              </a:ext>
+            </a:extLst>
+          </p:cNvPr>
           <p:cNvSpPr>
             <a:spLocks noGrp="1"/>
           </p:cNvSpPr>
@@ -4639,7 +2887,7 @@
     </p:spTree>
     <p:extLst>
       <p:ext uri="{BB962C8B-B14F-4D97-AF65-F5344CB8AC3E}">
-        <p14:creationId xmlns:p14="http://schemas.microsoft.com/office/powerpoint/2010/main" val="3097648003"/>
+        <p14:creationId xmlns:p14="http://schemas.microsoft.com/office/powerpoint/2010/main" val="205683322"/>
       </p:ext>
     </p:extLst>
   </p:cSld>
@@ -4668,7 +2916,13 @@
       </p:grpSpPr>
       <p:sp>
         <p:nvSpPr>
-          <p:cNvPr id="2" name="Title 1"/>
+          <p:cNvPr id="2" name="Заголовок 1">
+            <a:extLst>
+              <a:ext uri="{FF2B5EF4-FFF2-40B4-BE49-F238E27FC236}">
+                <a16:creationId xmlns:a16="http://schemas.microsoft.com/office/drawing/2014/main" id="{808FE695-C3A7-5708-F1E9-8BD360C00FB8}"/>
+              </a:ext>
+            </a:extLst>
+          </p:cNvPr>
           <p:cNvSpPr>
             <a:spLocks noGrp="1"/>
           </p:cNvSpPr>
@@ -4678,17 +2932,15 @@
         </p:nvSpPr>
         <p:spPr>
           <a:xfrm>
-            <a:off x="4722812" y="1447800"/>
-            <a:ext cx="6019800" cy="1143000"/>
+            <a:off x="839788" y="457200"/>
+            <a:ext cx="3932237" cy="1600200"/>
           </a:xfrm>
         </p:spPr>
         <p:txBody>
-          <a:bodyPr anchor="b">
-            <a:normAutofit/>
-          </a:bodyPr>
+          <a:bodyPr anchor="b"/>
           <a:lstStyle>
-            <a:lvl1pPr algn="l">
-              <a:defRPr sz="2800" b="0"/>
+            <a:lvl1pPr>
+              <a:defRPr sz="3200"/>
             </a:lvl1pPr>
           </a:lstStyle>
           <a:p>
@@ -4696,15 +2948,20 @@
               <a:rPr lang="ru-RU"/>
               <a:t>Образец заголовка</a:t>
             </a:r>
-            <a:endParaRPr lang="en-US" dirty="0"/>
-          </a:p>
-        </p:txBody>
-      </p:sp>
-      <p:sp>
-        <p:nvSpPr>
-          <p:cNvPr id="14" name="Picture Placeholder 2"/>
+          </a:p>
+        </p:txBody>
+      </p:sp>
+      <p:sp>
+        <p:nvSpPr>
+          <p:cNvPr id="3" name="Рисунок 2">
+            <a:extLst>
+              <a:ext uri="{FF2B5EF4-FFF2-40B4-BE49-F238E27FC236}">
+                <a16:creationId xmlns:a16="http://schemas.microsoft.com/office/drawing/2014/main" id="{9FD628EE-A7E2-772D-F6B1-CDB7B53F6CF6}"/>
+              </a:ext>
+            </a:extLst>
+          </p:cNvPr>
           <p:cNvSpPr>
-            <a:spLocks noGrp="1" noChangeAspect="1"/>
+            <a:spLocks noGrp="1"/>
           </p:cNvSpPr>
           <p:nvPr>
             <p:ph type="pic" idx="1"/>
@@ -4712,84 +2969,64 @@
         </p:nvSpPr>
         <p:spPr>
           <a:xfrm>
-            <a:off x="989012" y="914400"/>
-            <a:ext cx="3280974" cy="4572000"/>
+            <a:off x="5183188" y="987425"/>
+            <a:ext cx="6172200" cy="4873625"/>
           </a:xfrm>
-          <a:prstGeom prst="snip2DiagRect">
-            <a:avLst>
-              <a:gd name="adj1" fmla="val 10815"/>
-              <a:gd name="adj2" fmla="val 0"/>
-            </a:avLst>
-          </a:prstGeom>
-          <a:ln w="15875">
-            <a:solidFill>
-              <a:schemeClr val="tx1">
-                <a:alpha val="40000"/>
-              </a:schemeClr>
-            </a:solidFill>
-          </a:ln>
-          <a:effectLst>
-            <a:innerShdw blurRad="57150" dist="38100" dir="14460000">
-              <a:srgbClr val="000000">
-                <a:alpha val="70000"/>
-              </a:srgbClr>
-            </a:innerShdw>
-          </a:effectLst>
         </p:spPr>
         <p:txBody>
-          <a:bodyPr anchor="t">
-            <a:normAutofit/>
-          </a:bodyPr>
+          <a:bodyPr/>
           <a:lstStyle>
-            <a:lvl1pPr marL="0" indent="0" algn="ctr">
+            <a:lvl1pPr marL="0" indent="0">
               <a:buNone/>
-              <a:defRPr sz="1600"/>
+              <a:defRPr sz="3200"/>
             </a:lvl1pPr>
             <a:lvl2pPr marL="457200" indent="0">
               <a:buNone/>
-              <a:defRPr sz="1600"/>
+              <a:defRPr sz="2800"/>
             </a:lvl2pPr>
             <a:lvl3pPr marL="914400" indent="0">
               <a:buNone/>
-              <a:defRPr sz="1600"/>
+              <a:defRPr sz="2400"/>
             </a:lvl3pPr>
             <a:lvl4pPr marL="1371600" indent="0">
               <a:buNone/>
-              <a:defRPr sz="1600"/>
+              <a:defRPr sz="2000"/>
             </a:lvl4pPr>
             <a:lvl5pPr marL="1828800" indent="0">
               <a:buNone/>
-              <a:defRPr sz="1600"/>
+              <a:defRPr sz="2000"/>
             </a:lvl5pPr>
             <a:lvl6pPr marL="2286000" indent="0">
               <a:buNone/>
-              <a:defRPr sz="1600"/>
+              <a:defRPr sz="2000"/>
             </a:lvl6pPr>
             <a:lvl7pPr marL="2743200" indent="0">
               <a:buNone/>
-              <a:defRPr sz="1600"/>
+              <a:defRPr sz="2000"/>
             </a:lvl7pPr>
             <a:lvl8pPr marL="3200400" indent="0">
               <a:buNone/>
-              <a:defRPr sz="1600"/>
+              <a:defRPr sz="2000"/>
             </a:lvl8pPr>
             <a:lvl9pPr marL="3657600" indent="0">
               <a:buNone/>
-              <a:defRPr sz="1600"/>
+              <a:defRPr sz="2000"/>
             </a:lvl9pPr>
           </a:lstStyle>
           <a:p>
-            <a:r>
-              <a:rPr lang="ru-RU"/>
-              <a:t>Вставка рисунка</a:t>
-            </a:r>
-            <a:endParaRPr lang="en-US" dirty="0"/>
-          </a:p>
-        </p:txBody>
-      </p:sp>
-      <p:sp>
-        <p:nvSpPr>
-          <p:cNvPr id="4" name="Text Placeholder 3"/>
+            <a:endParaRPr lang="ru-RU"/>
+          </a:p>
+        </p:txBody>
+      </p:sp>
+      <p:sp>
+        <p:nvSpPr>
+          <p:cNvPr id="4" name="Текст 3">
+            <a:extLst>
+              <a:ext uri="{FF2B5EF4-FFF2-40B4-BE49-F238E27FC236}">
+                <a16:creationId xmlns:a16="http://schemas.microsoft.com/office/drawing/2014/main" id="{A100B957-7405-6FFB-ECFF-A51DF2F29731}"/>
+              </a:ext>
+            </a:extLst>
+          </p:cNvPr>
           <p:cNvSpPr>
             <a:spLocks noGrp="1"/>
           </p:cNvSpPr>
@@ -4799,50 +3036,48 @@
         </p:nvSpPr>
         <p:spPr>
           <a:xfrm>
-            <a:off x="4722812" y="2777066"/>
-            <a:ext cx="6021388" cy="2048933"/>
+            <a:off x="839788" y="2057400"/>
+            <a:ext cx="3932237" cy="3811588"/>
           </a:xfrm>
         </p:spPr>
         <p:txBody>
-          <a:bodyPr anchor="t">
-            <a:normAutofit/>
-          </a:bodyPr>
+          <a:bodyPr/>
           <a:lstStyle>
             <a:lvl1pPr marL="0" indent="0">
               <a:buNone/>
-              <a:defRPr sz="1800"/>
+              <a:defRPr sz="1600"/>
             </a:lvl1pPr>
             <a:lvl2pPr marL="457200" indent="0">
               <a:buNone/>
-              <a:defRPr sz="1200"/>
+              <a:defRPr sz="1400"/>
             </a:lvl2pPr>
             <a:lvl3pPr marL="914400" indent="0">
               <a:buNone/>
-              <a:defRPr sz="1000"/>
+              <a:defRPr sz="1200"/>
             </a:lvl3pPr>
             <a:lvl4pPr marL="1371600" indent="0">
               <a:buNone/>
-              <a:defRPr sz="900"/>
+              <a:defRPr sz="1000"/>
             </a:lvl4pPr>
             <a:lvl5pPr marL="1828800" indent="0">
               <a:buNone/>
-              <a:defRPr sz="900"/>
+              <a:defRPr sz="1000"/>
             </a:lvl5pPr>
             <a:lvl6pPr marL="2286000" indent="0">
               <a:buNone/>
-              <a:defRPr sz="900"/>
+              <a:defRPr sz="1000"/>
             </a:lvl6pPr>
             <a:lvl7pPr marL="2743200" indent="0">
               <a:buNone/>
-              <a:defRPr sz="900"/>
+              <a:defRPr sz="1000"/>
             </a:lvl7pPr>
             <a:lvl8pPr marL="3200400" indent="0">
               <a:buNone/>
-              <a:defRPr sz="900"/>
+              <a:defRPr sz="1000"/>
             </a:lvl8pPr>
             <a:lvl9pPr marL="3657600" indent="0">
               <a:buNone/>
-              <a:defRPr sz="900"/>
+              <a:defRPr sz="1000"/>
             </a:lvl9pPr>
           </a:lstStyle>
           <a:p>
@@ -4856,7 +3091,13 @@
       </p:sp>
       <p:sp>
         <p:nvSpPr>
-          <p:cNvPr id="5" name="Date Placeholder 4"/>
+          <p:cNvPr id="5" name="Дата 4">
+            <a:extLst>
+              <a:ext uri="{FF2B5EF4-FFF2-40B4-BE49-F238E27FC236}">
+                <a16:creationId xmlns:a16="http://schemas.microsoft.com/office/drawing/2014/main" id="{A6699176-E71F-F74D-E632-0B9621693866}"/>
+              </a:ext>
+            </a:extLst>
+          </p:cNvPr>
           <p:cNvSpPr>
             <a:spLocks noGrp="1"/>
           </p:cNvSpPr>
@@ -4871,7 +3112,7 @@
           <a:p>
             <a:fld id="{5489760F-A808-480A-84F8-01DD6B446E6A}" type="datetimeFigureOut">
               <a:rPr lang="ru-RU" smtClean="0"/>
-              <a:t>30.10.2025</a:t>
+              <a:t>05.11.2025</a:t>
             </a:fld>
             <a:endParaRPr lang="ru-RU"/>
           </a:p>
@@ -4879,7 +3120,13 @@
       </p:sp>
       <p:sp>
         <p:nvSpPr>
-          <p:cNvPr id="6" name="Footer Placeholder 5"/>
+          <p:cNvPr id="6" name="Нижний колонтитул 5">
+            <a:extLst>
+              <a:ext uri="{FF2B5EF4-FFF2-40B4-BE49-F238E27FC236}">
+                <a16:creationId xmlns:a16="http://schemas.microsoft.com/office/drawing/2014/main" id="{54631F49-F0D8-0B75-4C99-52B97CBA851D}"/>
+              </a:ext>
+            </a:extLst>
+          </p:cNvPr>
           <p:cNvSpPr>
             <a:spLocks noGrp="1"/>
           </p:cNvSpPr>
@@ -4898,7 +3145,13 @@
       </p:sp>
       <p:sp>
         <p:nvSpPr>
-          <p:cNvPr id="7" name="Slide Number Placeholder 6"/>
+          <p:cNvPr id="7" name="Номер слайда 6">
+            <a:extLst>
+              <a:ext uri="{FF2B5EF4-FFF2-40B4-BE49-F238E27FC236}">
+                <a16:creationId xmlns:a16="http://schemas.microsoft.com/office/drawing/2014/main" id="{8653B5A4-06AF-F45E-4416-FC90F335D9A7}"/>
+              </a:ext>
+            </a:extLst>
+          </p:cNvPr>
           <p:cNvSpPr>
             <a:spLocks noGrp="1"/>
           </p:cNvSpPr>
@@ -4922,7 +3175,7 @@
     </p:spTree>
     <p:extLst>
       <p:ext uri="{BB962C8B-B14F-4D97-AF65-F5344CB8AC3E}">
-        <p14:creationId xmlns:p14="http://schemas.microsoft.com/office/powerpoint/2010/main" val="1129062389"/>
+        <p14:creationId xmlns:p14="http://schemas.microsoft.com/office/powerpoint/2010/main" val="3295130192"/>
       </p:ext>
     </p:extLst>
   </p:cSld>
@@ -4936,8 +3189,8 @@
 <p:sldMaster xmlns:a="http://schemas.openxmlformats.org/drawingml/2006/main" xmlns:r="http://schemas.openxmlformats.org/officeDocument/2006/relationships" xmlns:p="http://schemas.openxmlformats.org/presentationml/2006/main">
   <p:cSld>
     <p:bg>
-      <p:bgRef idx="1002">
-        <a:schemeClr val="bg2"/>
+      <p:bgRef idx="1001">
+        <a:schemeClr val="bg1"/>
       </p:bgRef>
     </p:bg>
     <p:spTree>
@@ -4954,199 +3207,15 @@
           <a:chExt cx="0" cy="0"/>
         </a:xfrm>
       </p:grpSpPr>
-      <p:grpSp>
-        <p:nvGrpSpPr>
-          <p:cNvPr id="7" name="Group 6"/>
-          <p:cNvGrpSpPr/>
-          <p:nvPr/>
-        </p:nvGrpSpPr>
-        <p:grpSpPr>
-          <a:xfrm>
-            <a:off x="9206969" y="2963333"/>
-            <a:ext cx="2981858" cy="3208867"/>
-            <a:chOff x="9206969" y="2963333"/>
-            <a:chExt cx="2981858" cy="3208867"/>
-          </a:xfrm>
-        </p:grpSpPr>
-        <p:cxnSp>
-          <p:nvCxnSpPr>
-            <p:cNvPr id="8" name="Straight Connector 7"/>
-            <p:cNvCxnSpPr/>
-            <p:nvPr/>
-          </p:nvCxnSpPr>
-          <p:spPr>
-            <a:xfrm flipH="1">
-              <a:off x="11276012" y="2963333"/>
-              <a:ext cx="912814" cy="912812"/>
-            </a:xfrm>
-            <a:prstGeom prst="line">
-              <a:avLst/>
-            </a:prstGeom>
-            <a:ln w="9525">
-              <a:solidFill>
-                <a:schemeClr val="tx1"/>
-              </a:solidFill>
-            </a:ln>
-          </p:spPr>
-          <p:style>
-            <a:lnRef idx="2">
-              <a:schemeClr val="accent1"/>
-            </a:lnRef>
-            <a:fillRef idx="0">
-              <a:schemeClr val="accent1"/>
-            </a:fillRef>
-            <a:effectRef idx="1">
-              <a:schemeClr val="accent1"/>
-            </a:effectRef>
-            <a:fontRef idx="minor">
-              <a:schemeClr val="tx1"/>
-            </a:fontRef>
-          </p:style>
-        </p:cxnSp>
-        <p:cxnSp>
-          <p:nvCxnSpPr>
-            <p:cNvPr id="9" name="Straight Connector 8"/>
-            <p:cNvCxnSpPr/>
-            <p:nvPr/>
-          </p:nvCxnSpPr>
-          <p:spPr>
-            <a:xfrm flipH="1">
-              <a:off x="9206969" y="3190344"/>
-              <a:ext cx="2981857" cy="2981856"/>
-            </a:xfrm>
-            <a:prstGeom prst="line">
-              <a:avLst/>
-            </a:prstGeom>
-            <a:ln w="9525">
-              <a:solidFill>
-                <a:schemeClr val="tx1"/>
-              </a:solidFill>
-            </a:ln>
-          </p:spPr>
-          <p:style>
-            <a:lnRef idx="2">
-              <a:schemeClr val="accent1"/>
-            </a:lnRef>
-            <a:fillRef idx="0">
-              <a:schemeClr val="accent1"/>
-            </a:fillRef>
-            <a:effectRef idx="1">
-              <a:schemeClr val="accent1"/>
-            </a:effectRef>
-            <a:fontRef idx="minor">
-              <a:schemeClr val="tx1"/>
-            </a:fontRef>
-          </p:style>
-        </p:cxnSp>
-        <p:cxnSp>
-          <p:nvCxnSpPr>
-            <p:cNvPr id="10" name="Straight Connector 9"/>
-            <p:cNvCxnSpPr/>
-            <p:nvPr/>
-          </p:nvCxnSpPr>
-          <p:spPr>
-            <a:xfrm flipH="1">
-              <a:off x="10292292" y="3285067"/>
-              <a:ext cx="1896534" cy="1896533"/>
-            </a:xfrm>
-            <a:prstGeom prst="line">
-              <a:avLst/>
-            </a:prstGeom>
-            <a:ln w="9525">
-              <a:solidFill>
-                <a:schemeClr val="tx1"/>
-              </a:solidFill>
-            </a:ln>
-          </p:spPr>
-          <p:style>
-            <a:lnRef idx="2">
-              <a:schemeClr val="accent1"/>
-            </a:lnRef>
-            <a:fillRef idx="0">
-              <a:schemeClr val="accent1"/>
-            </a:fillRef>
-            <a:effectRef idx="1">
-              <a:schemeClr val="accent1"/>
-            </a:effectRef>
-            <a:fontRef idx="minor">
-              <a:schemeClr val="tx1"/>
-            </a:fontRef>
-          </p:style>
-        </p:cxnSp>
-        <p:cxnSp>
-          <p:nvCxnSpPr>
-            <p:cNvPr id="11" name="Straight Connector 10"/>
-            <p:cNvCxnSpPr/>
-            <p:nvPr/>
-          </p:nvCxnSpPr>
-          <p:spPr>
-            <a:xfrm flipH="1">
-              <a:off x="10443103" y="3131080"/>
-              <a:ext cx="1745722" cy="1745720"/>
-            </a:xfrm>
-            <a:prstGeom prst="line">
-              <a:avLst/>
-            </a:prstGeom>
-            <a:ln w="28575">
-              <a:solidFill>
-                <a:schemeClr val="tx1"/>
-              </a:solidFill>
-            </a:ln>
-          </p:spPr>
-          <p:style>
-            <a:lnRef idx="2">
-              <a:schemeClr val="accent1"/>
-            </a:lnRef>
-            <a:fillRef idx="0">
-              <a:schemeClr val="accent1"/>
-            </a:fillRef>
-            <a:effectRef idx="1">
-              <a:schemeClr val="accent1"/>
-            </a:effectRef>
-            <a:fontRef idx="minor">
-              <a:schemeClr val="tx1"/>
-            </a:fontRef>
-          </p:style>
-        </p:cxnSp>
-        <p:cxnSp>
-          <p:nvCxnSpPr>
-            <p:cNvPr id="12" name="Straight Connector 11"/>
-            <p:cNvCxnSpPr/>
-            <p:nvPr/>
-          </p:nvCxnSpPr>
-          <p:spPr>
-            <a:xfrm flipH="1">
-              <a:off x="10918826" y="3683001"/>
-              <a:ext cx="1270001" cy="1269999"/>
-            </a:xfrm>
-            <a:prstGeom prst="line">
-              <a:avLst/>
-            </a:prstGeom>
-            <a:ln w="28575">
-              <a:solidFill>
-                <a:schemeClr val="tx1"/>
-              </a:solidFill>
-            </a:ln>
-          </p:spPr>
-          <p:style>
-            <a:lnRef idx="2">
-              <a:schemeClr val="accent1"/>
-            </a:lnRef>
-            <a:fillRef idx="0">
-              <a:schemeClr val="accent1"/>
-            </a:fillRef>
-            <a:effectRef idx="1">
-              <a:schemeClr val="accent1"/>
-            </a:effectRef>
-            <a:fontRef idx="minor">
-              <a:schemeClr val="tx1"/>
-            </a:fontRef>
-          </p:style>
-        </p:cxnSp>
-      </p:grpSp>
-      <p:sp>
-        <p:nvSpPr>
-          <p:cNvPr id="2" name="Title Placeholder 1"/>
+      <p:sp>
+        <p:nvSpPr>
+          <p:cNvPr id="2" name="Заголовок 1">
+            <a:extLst>
+              <a:ext uri="{FF2B5EF4-FFF2-40B4-BE49-F238E27FC236}">
+                <a16:creationId xmlns:a16="http://schemas.microsoft.com/office/drawing/2014/main" id="{013F29B3-AC03-651F-834B-D7E96FCD2E05}"/>
+              </a:ext>
+            </a:extLst>
+          </p:cNvPr>
           <p:cNvSpPr>
             <a:spLocks noGrp="1"/>
           </p:cNvSpPr>
@@ -5156,13 +3225,12 @@
         </p:nvSpPr>
         <p:spPr>
           <a:xfrm>
-            <a:off x="684212" y="4487332"/>
-            <a:ext cx="8534400" cy="1507067"/>
+            <a:off x="838200" y="365125"/>
+            <a:ext cx="10515600" cy="1325563"/>
           </a:xfrm>
           <a:prstGeom prst="rect">
             <a:avLst/>
           </a:prstGeom>
-          <a:effectLst/>
         </p:spPr>
         <p:txBody>
           <a:bodyPr vert="horz" lIns="91440" tIns="45720" rIns="91440" bIns="45720" rtlCol="0" anchor="ctr">
@@ -5174,13 +3242,18 @@
               <a:rPr lang="ru-RU"/>
               <a:t>Образец заголовка</a:t>
             </a:r>
-            <a:endParaRPr lang="en-US" dirty="0"/>
-          </a:p>
-        </p:txBody>
-      </p:sp>
-      <p:sp>
-        <p:nvSpPr>
-          <p:cNvPr id="3" name="Text Placeholder 2"/>
+          </a:p>
+        </p:txBody>
+      </p:sp>
+      <p:sp>
+        <p:nvSpPr>
+          <p:cNvPr id="3" name="Текст 2">
+            <a:extLst>
+              <a:ext uri="{FF2B5EF4-FFF2-40B4-BE49-F238E27FC236}">
+                <a16:creationId xmlns:a16="http://schemas.microsoft.com/office/drawing/2014/main" id="{F88877FC-9F02-BA33-8D22-D49C62B3D878}"/>
+              </a:ext>
+            </a:extLst>
+          </p:cNvPr>
           <p:cNvSpPr>
             <a:spLocks noGrp="1"/>
           </p:cNvSpPr>
@@ -5190,15 +3263,15 @@
         </p:nvSpPr>
         <p:spPr>
           <a:xfrm>
-            <a:off x="684212" y="685800"/>
-            <a:ext cx="8534400" cy="3615267"/>
+            <a:off x="838200" y="1825625"/>
+            <a:ext cx="10515600" cy="4351338"/>
           </a:xfrm>
           <a:prstGeom prst="rect">
             <a:avLst/>
           </a:prstGeom>
         </p:spPr>
         <p:txBody>
-          <a:bodyPr vert="horz" lIns="91440" tIns="45720" rIns="91440" bIns="45720" rtlCol="0" anchor="ctr">
+          <a:bodyPr vert="horz" lIns="91440" tIns="45720" rIns="91440" bIns="45720" rtlCol="0">
             <a:normAutofit/>
           </a:bodyPr>
           <a:lstStyle/>
@@ -5236,13 +3309,18 @@
               <a:rPr lang="ru-RU"/>
               <a:t>Пятый уровень</a:t>
             </a:r>
-            <a:endParaRPr lang="en-US" dirty="0"/>
-          </a:p>
-        </p:txBody>
-      </p:sp>
-      <p:sp>
-        <p:nvSpPr>
-          <p:cNvPr id="4" name="Date Placeholder 3"/>
+          </a:p>
+        </p:txBody>
+      </p:sp>
+      <p:sp>
+        <p:nvSpPr>
+          <p:cNvPr id="4" name="Дата 3">
+            <a:extLst>
+              <a:ext uri="{FF2B5EF4-FFF2-40B4-BE49-F238E27FC236}">
+                <a16:creationId xmlns:a16="http://schemas.microsoft.com/office/drawing/2014/main" id="{A3F7B07B-71CB-83C9-609D-EA20EE9E0E04}"/>
+              </a:ext>
+            </a:extLst>
+          </p:cNvPr>
           <p:cNvSpPr>
             <a:spLocks noGrp="1"/>
           </p:cNvSpPr>
@@ -5252,32 +3330,30 @@
         </p:nvSpPr>
         <p:spPr>
           <a:xfrm>
-            <a:off x="9904412" y="6172200"/>
-            <a:ext cx="1600200" cy="365125"/>
+            <a:off x="838200" y="6356350"/>
+            <a:ext cx="2743200" cy="365125"/>
           </a:xfrm>
           <a:prstGeom prst="rect">
             <a:avLst/>
           </a:prstGeom>
         </p:spPr>
         <p:txBody>
-          <a:bodyPr vert="horz" lIns="91440" tIns="45720" rIns="91440" bIns="45720" rtlCol="0" anchor="t"/>
+          <a:bodyPr vert="horz" lIns="91440" tIns="45720" rIns="91440" bIns="45720" rtlCol="0" anchor="ctr"/>
           <a:lstStyle>
-            <a:lvl1pPr algn="r">
-              <a:defRPr sz="1000" b="0" i="0">
+            <a:lvl1pPr algn="l">
+              <a:defRPr sz="1200">
                 <a:solidFill>
-                  <a:schemeClr val="bg2">
-                    <a:lumMod val="50000"/>
+                  <a:schemeClr val="tx1">
+                    <a:tint val="75000"/>
                   </a:schemeClr>
                 </a:solidFill>
-                <a:effectLst/>
-                <a:latin typeface="+mn-lt"/>
               </a:defRPr>
             </a:lvl1pPr>
           </a:lstStyle>
           <a:p>
             <a:fld id="{5489760F-A808-480A-84F8-01DD6B446E6A}" type="datetimeFigureOut">
               <a:rPr lang="ru-RU" smtClean="0"/>
-              <a:t>30.10.2025</a:t>
+              <a:t>05.11.2025</a:t>
             </a:fld>
             <a:endParaRPr lang="ru-RU"/>
           </a:p>
@@ -5285,7 +3361,13 @@
       </p:sp>
       <p:sp>
         <p:nvSpPr>
-          <p:cNvPr id="5" name="Footer Placeholder 4"/>
+          <p:cNvPr id="5" name="Нижний колонтитул 4">
+            <a:extLst>
+              <a:ext uri="{FF2B5EF4-FFF2-40B4-BE49-F238E27FC236}">
+                <a16:creationId xmlns:a16="http://schemas.microsoft.com/office/drawing/2014/main" id="{A094F7B8-B9AC-3952-3182-865B1F61F8EB}"/>
+              </a:ext>
+            </a:extLst>
+          </p:cNvPr>
           <p:cNvSpPr>
             <a:spLocks noGrp="1"/>
           </p:cNvSpPr>
@@ -5295,25 +3377,23 @@
         </p:nvSpPr>
         <p:spPr>
           <a:xfrm>
-            <a:off x="684212" y="6172200"/>
-            <a:ext cx="7543800" cy="365125"/>
+            <a:off x="4038600" y="6356350"/>
+            <a:ext cx="4114800" cy="365125"/>
           </a:xfrm>
           <a:prstGeom prst="rect">
             <a:avLst/>
           </a:prstGeom>
         </p:spPr>
         <p:txBody>
-          <a:bodyPr vert="horz" lIns="91440" tIns="45720" rIns="91440" bIns="45720" rtlCol="0" anchor="t"/>
+          <a:bodyPr vert="horz" lIns="91440" tIns="45720" rIns="91440" bIns="45720" rtlCol="0" anchor="ctr"/>
           <a:lstStyle>
-            <a:lvl1pPr algn="l">
-              <a:defRPr sz="1000" b="0" i="0">
+            <a:lvl1pPr algn="ctr">
+              <a:defRPr sz="1200">
                 <a:solidFill>
-                  <a:schemeClr val="bg2">
-                    <a:lumMod val="50000"/>
+                  <a:schemeClr val="tx1">
+                    <a:tint val="75000"/>
                   </a:schemeClr>
                 </a:solidFill>
-                <a:effectLst/>
-                <a:latin typeface="+mn-lt"/>
               </a:defRPr>
             </a:lvl1pPr>
           </a:lstStyle>
@@ -5324,7 +3404,13 @@
       </p:sp>
       <p:sp>
         <p:nvSpPr>
-          <p:cNvPr id="6" name="Slide Number Placeholder 5"/>
+          <p:cNvPr id="6" name="Номер слайда 5">
+            <a:extLst>
+              <a:ext uri="{FF2B5EF4-FFF2-40B4-BE49-F238E27FC236}">
+                <a16:creationId xmlns:a16="http://schemas.microsoft.com/office/drawing/2014/main" id="{5010B61D-F281-32FC-17BD-9E8C2D9F41A9}"/>
+              </a:ext>
+            </a:extLst>
+          </p:cNvPr>
           <p:cNvSpPr>
             <a:spLocks noGrp="1"/>
           </p:cNvSpPr>
@@ -5334,25 +3420,23 @@
         </p:nvSpPr>
         <p:spPr>
           <a:xfrm>
-            <a:off x="10363200" y="5578475"/>
-            <a:ext cx="1142245" cy="669925"/>
+            <a:off x="8610600" y="6356350"/>
+            <a:ext cx="2743200" cy="365125"/>
           </a:xfrm>
           <a:prstGeom prst="rect">
             <a:avLst/>
           </a:prstGeom>
         </p:spPr>
         <p:txBody>
-          <a:bodyPr vert="horz" lIns="91440" tIns="45720" rIns="91440" bIns="45720" rtlCol="0" anchor="b"/>
+          <a:bodyPr vert="horz" lIns="91440" tIns="45720" rIns="91440" bIns="45720" rtlCol="0" anchor="ctr"/>
           <a:lstStyle>
             <a:lvl1pPr algn="r">
-              <a:defRPr sz="3200" b="0" i="0">
+              <a:defRPr sz="1200">
                 <a:solidFill>
-                  <a:schemeClr val="bg2">
-                    <a:lumMod val="50000"/>
+                  <a:schemeClr val="tx1">
+                    <a:tint val="75000"/>
                   </a:schemeClr>
                 </a:solidFill>
-                <a:effectLst/>
-                <a:latin typeface="+mn-lt"/>
               </a:defRPr>
             </a:lvl1pPr>
           </a:lstStyle>
@@ -5368,328 +3452,202 @@
     </p:spTree>
     <p:extLst>
       <p:ext uri="{BB962C8B-B14F-4D97-AF65-F5344CB8AC3E}">
-        <p14:creationId xmlns:p14="http://schemas.microsoft.com/office/powerpoint/2010/main" val="3878663815"/>
+        <p14:creationId xmlns:p14="http://schemas.microsoft.com/office/powerpoint/2010/main" val="3606995607"/>
       </p:ext>
     </p:extLst>
   </p:cSld>
-  <p:clrMap bg1="dk1" tx1="lt1" bg2="dk2" tx2="lt2" accent1="accent1" accent2="accent2" accent3="accent3" accent4="accent4" accent5="accent5" accent6="accent6" hlink="hlink" folHlink="folHlink"/>
+  <p:clrMap bg1="lt1" tx1="dk1" bg2="lt2" tx2="dk2" accent1="accent1" accent2="accent2" accent3="accent3" accent4="accent4" accent5="accent5" accent6="accent6" hlink="hlink" folHlink="folHlink"/>
   <p:sldLayoutIdLst>
-    <p:sldLayoutId id="2147483661" r:id="rId1"/>
-    <p:sldLayoutId id="2147483662" r:id="rId2"/>
-    <p:sldLayoutId id="2147483663" r:id="rId3"/>
-    <p:sldLayoutId id="2147483664" r:id="rId4"/>
-    <p:sldLayoutId id="2147483665" r:id="rId5"/>
-    <p:sldLayoutId id="2147483666" r:id="rId6"/>
-    <p:sldLayoutId id="2147483667" r:id="rId7"/>
-    <p:sldLayoutId id="2147483668" r:id="rId8"/>
-    <p:sldLayoutId id="2147483669" r:id="rId9"/>
-    <p:sldLayoutId id="2147483670" r:id="rId10"/>
-    <p:sldLayoutId id="2147483671" r:id="rId11"/>
-    <p:sldLayoutId id="2147483672" r:id="rId12"/>
-    <p:sldLayoutId id="2147483673" r:id="rId13"/>
-    <p:sldLayoutId id="2147483674" r:id="rId14"/>
-    <p:sldLayoutId id="2147483675" r:id="rId15"/>
-    <p:sldLayoutId id="2147483676" r:id="rId16"/>
-    <p:sldLayoutId id="2147483677" r:id="rId17"/>
+    <p:sldLayoutId id="2147483795" r:id="rId1"/>
+    <p:sldLayoutId id="2147483796" r:id="rId2"/>
+    <p:sldLayoutId id="2147483797" r:id="rId3"/>
+    <p:sldLayoutId id="2147483798" r:id="rId4"/>
+    <p:sldLayoutId id="2147483799" r:id="rId5"/>
+    <p:sldLayoutId id="2147483800" r:id="rId6"/>
+    <p:sldLayoutId id="2147483801" r:id="rId7"/>
+    <p:sldLayoutId id="2147483802" r:id="rId8"/>
+    <p:sldLayoutId id="2147483803" r:id="rId9"/>
+    <p:sldLayoutId id="2147483804" r:id="rId10"/>
+    <p:sldLayoutId id="2147483805" r:id="rId11"/>
   </p:sldLayoutIdLst>
   <p:txStyles>
     <p:titleStyle>
-      <a:lvl1pPr algn="l" defTabSz="457200" rtl="0" eaLnBrk="1" latinLnBrk="0" hangingPunct="1">
+      <a:lvl1pPr algn="l" defTabSz="914400" rtl="0" eaLnBrk="1" latinLnBrk="0" hangingPunct="1">
+        <a:lnSpc>
+          <a:spcPct val="90000"/>
+        </a:lnSpc>
         <a:spcBef>
           <a:spcPct val="0"/>
         </a:spcBef>
         <a:buNone/>
-        <a:defRPr sz="3600" kern="1200" cap="all">
-          <a:ln w="3175" cmpd="sng">
-            <a:noFill/>
-          </a:ln>
+        <a:defRPr sz="4400" kern="1200">
           <a:solidFill>
             <a:schemeClr val="tx1"/>
           </a:solidFill>
-          <a:effectLst/>
           <a:latin typeface="+mj-lt"/>
           <a:ea typeface="+mj-ea"/>
           <a:cs typeface="+mj-cs"/>
         </a:defRPr>
       </a:lvl1pPr>
-      <a:lvl2pPr eaLnBrk="1" hangingPunct="1">
-        <a:defRPr>
-          <a:solidFill>
-            <a:schemeClr val="tx2"/>
-          </a:solidFill>
-        </a:defRPr>
-      </a:lvl2pPr>
-      <a:lvl3pPr eaLnBrk="1" hangingPunct="1">
-        <a:defRPr>
-          <a:solidFill>
-            <a:schemeClr val="tx2"/>
-          </a:solidFill>
-        </a:defRPr>
-      </a:lvl3pPr>
-      <a:lvl4pPr eaLnBrk="1" hangingPunct="1">
-        <a:defRPr>
-          <a:solidFill>
-            <a:schemeClr val="tx2"/>
-          </a:solidFill>
-        </a:defRPr>
-      </a:lvl4pPr>
-      <a:lvl5pPr eaLnBrk="1" hangingPunct="1">
-        <a:defRPr>
-          <a:solidFill>
-            <a:schemeClr val="tx2"/>
-          </a:solidFill>
-        </a:defRPr>
-      </a:lvl5pPr>
-      <a:lvl6pPr eaLnBrk="1" hangingPunct="1">
-        <a:defRPr>
-          <a:solidFill>
-            <a:schemeClr val="tx2"/>
-          </a:solidFill>
-        </a:defRPr>
-      </a:lvl6pPr>
-      <a:lvl7pPr eaLnBrk="1" hangingPunct="1">
-        <a:defRPr>
-          <a:solidFill>
-            <a:schemeClr val="tx2"/>
-          </a:solidFill>
-        </a:defRPr>
-      </a:lvl7pPr>
-      <a:lvl8pPr eaLnBrk="1" hangingPunct="1">
-        <a:defRPr>
-          <a:solidFill>
-            <a:schemeClr val="tx2"/>
-          </a:solidFill>
-        </a:defRPr>
-      </a:lvl8pPr>
-      <a:lvl9pPr eaLnBrk="1" hangingPunct="1">
-        <a:defRPr>
-          <a:solidFill>
-            <a:schemeClr val="tx2"/>
-          </a:solidFill>
-        </a:defRPr>
-      </a:lvl9pPr>
     </p:titleStyle>
     <p:bodyStyle>
-      <a:lvl1pPr marL="285750" indent="-285750" algn="l" defTabSz="457200" rtl="0" eaLnBrk="1" latinLnBrk="0" hangingPunct="1">
+      <a:lvl1pPr marL="228600" indent="-228600" algn="l" defTabSz="914400" rtl="0" eaLnBrk="1" latinLnBrk="0" hangingPunct="1">
+        <a:lnSpc>
+          <a:spcPct val="90000"/>
+        </a:lnSpc>
         <a:spcBef>
-          <a:spcPct val="20000"/>
+          <a:spcPts val="1000"/>
         </a:spcBef>
-        <a:spcAft>
-          <a:spcPts val="600"/>
-        </a:spcAft>
-        <a:buClr>
-          <a:schemeClr val="tx1"/>
-        </a:buClr>
-        <a:buSzPct val="80000"/>
-        <a:buFont typeface="Wingdings 3" panose="05040102010807070707" pitchFamily="18" charset="2"/>
-        <a:buChar char=""/>
-        <a:defRPr sz="2000" kern="1200" cap="none">
+        <a:buFont typeface="Arial" panose="020B0604020202020204" pitchFamily="34" charset="0"/>
+        <a:buChar char="•"/>
+        <a:defRPr sz="2800" kern="1200">
           <a:solidFill>
-            <a:schemeClr val="bg2">
-              <a:lumMod val="75000"/>
-            </a:schemeClr>
+            <a:schemeClr val="tx1"/>
           </a:solidFill>
-          <a:effectLst/>
           <a:latin typeface="+mn-lt"/>
           <a:ea typeface="+mn-ea"/>
           <a:cs typeface="+mn-cs"/>
         </a:defRPr>
       </a:lvl1pPr>
-      <a:lvl2pPr marL="742950" indent="-285750" algn="l" defTabSz="457200" rtl="0" eaLnBrk="1" latinLnBrk="0" hangingPunct="1">
+      <a:lvl2pPr marL="685800" indent="-228600" algn="l" defTabSz="914400" rtl="0" eaLnBrk="1" latinLnBrk="0" hangingPunct="1">
+        <a:lnSpc>
+          <a:spcPct val="90000"/>
+        </a:lnSpc>
         <a:spcBef>
-          <a:spcPct val="20000"/>
+          <a:spcPts val="500"/>
         </a:spcBef>
-        <a:spcAft>
-          <a:spcPts val="600"/>
-        </a:spcAft>
-        <a:buClr>
-          <a:schemeClr val="tx1"/>
-        </a:buClr>
-        <a:buSzPct val="80000"/>
-        <a:buFont typeface="Wingdings 3" panose="05040102010807070707" pitchFamily="18" charset="2"/>
-        <a:buChar char=""/>
-        <a:defRPr sz="1800" kern="1200" cap="none">
+        <a:buFont typeface="Arial" panose="020B0604020202020204" pitchFamily="34" charset="0"/>
+        <a:buChar char="•"/>
+        <a:defRPr sz="2400" kern="1200">
           <a:solidFill>
-            <a:schemeClr val="bg2">
-              <a:lumMod val="75000"/>
-            </a:schemeClr>
+            <a:schemeClr val="tx1"/>
           </a:solidFill>
-          <a:effectLst/>
           <a:latin typeface="+mn-lt"/>
           <a:ea typeface="+mn-ea"/>
           <a:cs typeface="+mn-cs"/>
         </a:defRPr>
       </a:lvl2pPr>
-      <a:lvl3pPr marL="1200150" indent="-285750" algn="l" defTabSz="457200" rtl="0" eaLnBrk="1" latinLnBrk="0" hangingPunct="1">
+      <a:lvl3pPr marL="1143000" indent="-228600" algn="l" defTabSz="914400" rtl="0" eaLnBrk="1" latinLnBrk="0" hangingPunct="1">
+        <a:lnSpc>
+          <a:spcPct val="90000"/>
+        </a:lnSpc>
         <a:spcBef>
-          <a:spcPct val="20000"/>
+          <a:spcPts val="500"/>
         </a:spcBef>
-        <a:spcAft>
-          <a:spcPts val="600"/>
-        </a:spcAft>
-        <a:buClr>
-          <a:schemeClr val="tx1"/>
-        </a:buClr>
-        <a:buSzPct val="80000"/>
-        <a:buFont typeface="Wingdings 3" panose="05040102010807070707" pitchFamily="18" charset="2"/>
-        <a:buChar char=""/>
-        <a:defRPr sz="1600" kern="1200" cap="none">
+        <a:buFont typeface="Arial" panose="020B0604020202020204" pitchFamily="34" charset="0"/>
+        <a:buChar char="•"/>
+        <a:defRPr sz="2000" kern="1200">
           <a:solidFill>
-            <a:schemeClr val="bg2">
-              <a:lumMod val="75000"/>
-            </a:schemeClr>
+            <a:schemeClr val="tx1"/>
           </a:solidFill>
-          <a:effectLst/>
           <a:latin typeface="+mn-lt"/>
           <a:ea typeface="+mn-ea"/>
           <a:cs typeface="+mn-cs"/>
         </a:defRPr>
       </a:lvl3pPr>
-      <a:lvl4pPr marL="1543050" indent="-171450" algn="l" defTabSz="457200" rtl="0" eaLnBrk="1" latinLnBrk="0" hangingPunct="1">
+      <a:lvl4pPr marL="1600200" indent="-228600" algn="l" defTabSz="914400" rtl="0" eaLnBrk="1" latinLnBrk="0" hangingPunct="1">
+        <a:lnSpc>
+          <a:spcPct val="90000"/>
+        </a:lnSpc>
         <a:spcBef>
-          <a:spcPct val="20000"/>
+          <a:spcPts val="500"/>
         </a:spcBef>
-        <a:spcAft>
-          <a:spcPts val="600"/>
-        </a:spcAft>
-        <a:buClr>
-          <a:schemeClr val="tx1"/>
-        </a:buClr>
-        <a:buSzPct val="80000"/>
-        <a:buFont typeface="Wingdings 3" panose="05040102010807070707" pitchFamily="18" charset="2"/>
-        <a:buChar char=""/>
-        <a:defRPr sz="1400" kern="1200" cap="none">
+        <a:buFont typeface="Arial" panose="020B0604020202020204" pitchFamily="34" charset="0"/>
+        <a:buChar char="•"/>
+        <a:defRPr sz="1800" kern="1200">
           <a:solidFill>
-            <a:schemeClr val="bg2">
-              <a:lumMod val="75000"/>
-            </a:schemeClr>
+            <a:schemeClr val="tx1"/>
           </a:solidFill>
-          <a:effectLst/>
           <a:latin typeface="+mn-lt"/>
           <a:ea typeface="+mn-ea"/>
           <a:cs typeface="+mn-cs"/>
         </a:defRPr>
       </a:lvl4pPr>
-      <a:lvl5pPr marL="2000250" indent="-171450" algn="l" defTabSz="457200" rtl="0" eaLnBrk="1" latinLnBrk="0" hangingPunct="1">
+      <a:lvl5pPr marL="2057400" indent="-228600" algn="l" defTabSz="914400" rtl="0" eaLnBrk="1" latinLnBrk="0" hangingPunct="1">
+        <a:lnSpc>
+          <a:spcPct val="90000"/>
+        </a:lnSpc>
         <a:spcBef>
-          <a:spcPct val="20000"/>
+          <a:spcPts val="500"/>
         </a:spcBef>
-        <a:spcAft>
-          <a:spcPts val="600"/>
-        </a:spcAft>
-        <a:buClr>
-          <a:schemeClr val="tx1"/>
-        </a:buClr>
-        <a:buSzPct val="80000"/>
-        <a:buFont typeface="Wingdings 3" panose="05040102010807070707" pitchFamily="18" charset="2"/>
-        <a:buChar char=""/>
-        <a:defRPr sz="1400" kern="1200" cap="none">
+        <a:buFont typeface="Arial" panose="020B0604020202020204" pitchFamily="34" charset="0"/>
+        <a:buChar char="•"/>
+        <a:defRPr sz="1800" kern="1200">
           <a:solidFill>
-            <a:schemeClr val="bg2">
-              <a:lumMod val="75000"/>
-            </a:schemeClr>
+            <a:schemeClr val="tx1"/>
           </a:solidFill>
-          <a:effectLst/>
           <a:latin typeface="+mn-lt"/>
           <a:ea typeface="+mn-ea"/>
           <a:cs typeface="+mn-cs"/>
         </a:defRPr>
       </a:lvl5pPr>
-      <a:lvl6pPr marL="2514600" indent="-228600" algn="l" defTabSz="457200" rtl="0" eaLnBrk="1" latinLnBrk="0" hangingPunct="1">
+      <a:lvl6pPr marL="2514600" indent="-228600" algn="l" defTabSz="914400" rtl="0" eaLnBrk="1" latinLnBrk="0" hangingPunct="1">
+        <a:lnSpc>
+          <a:spcPct val="90000"/>
+        </a:lnSpc>
         <a:spcBef>
-          <a:spcPct val="20000"/>
+          <a:spcPts val="500"/>
         </a:spcBef>
-        <a:spcAft>
-          <a:spcPts val="600"/>
-        </a:spcAft>
-        <a:buClr>
-          <a:schemeClr val="tx1"/>
-        </a:buClr>
-        <a:buSzPct val="80000"/>
-        <a:buFont typeface="Wingdings 3" panose="05040102010807070707" pitchFamily="18" charset="2"/>
-        <a:buChar char=""/>
-        <a:defRPr sz="1400" kern="1200" cap="none">
+        <a:buFont typeface="Arial" panose="020B0604020202020204" pitchFamily="34" charset="0"/>
+        <a:buChar char="•"/>
+        <a:defRPr sz="1800" kern="1200">
           <a:solidFill>
-            <a:schemeClr val="bg2">
-              <a:lumMod val="75000"/>
-            </a:schemeClr>
+            <a:schemeClr val="tx1"/>
           </a:solidFill>
-          <a:effectLst/>
           <a:latin typeface="+mn-lt"/>
           <a:ea typeface="+mn-ea"/>
           <a:cs typeface="+mn-cs"/>
         </a:defRPr>
       </a:lvl6pPr>
-      <a:lvl7pPr marL="2971800" indent="-228600" algn="l" defTabSz="457200" rtl="0" eaLnBrk="1" latinLnBrk="0" hangingPunct="1">
+      <a:lvl7pPr marL="2971800" indent="-228600" algn="l" defTabSz="914400" rtl="0" eaLnBrk="1" latinLnBrk="0" hangingPunct="1">
+        <a:lnSpc>
+          <a:spcPct val="90000"/>
+        </a:lnSpc>
         <a:spcBef>
-          <a:spcPct val="20000"/>
+          <a:spcPts val="500"/>
         </a:spcBef>
-        <a:spcAft>
-          <a:spcPts val="600"/>
-        </a:spcAft>
-        <a:buClr>
-          <a:schemeClr val="tx1"/>
-        </a:buClr>
-        <a:buSzPct val="80000"/>
-        <a:buFont typeface="Wingdings 3" panose="05040102010807070707" pitchFamily="18" charset="2"/>
-        <a:buChar char=""/>
-        <a:defRPr sz="1400" kern="1200" cap="none">
+        <a:buFont typeface="Arial" panose="020B0604020202020204" pitchFamily="34" charset="0"/>
+        <a:buChar char="•"/>
+        <a:defRPr sz="1800" kern="1200">
           <a:solidFill>
-            <a:schemeClr val="bg2">
-              <a:lumMod val="75000"/>
-            </a:schemeClr>
+            <a:schemeClr val="tx1"/>
           </a:solidFill>
-          <a:effectLst/>
           <a:latin typeface="+mn-lt"/>
           <a:ea typeface="+mn-ea"/>
           <a:cs typeface="+mn-cs"/>
         </a:defRPr>
       </a:lvl7pPr>
-      <a:lvl8pPr marL="3429000" indent="-228600" algn="l" defTabSz="457200" rtl="0" eaLnBrk="1" latinLnBrk="0" hangingPunct="1">
+      <a:lvl8pPr marL="3429000" indent="-228600" algn="l" defTabSz="914400" rtl="0" eaLnBrk="1" latinLnBrk="0" hangingPunct="1">
+        <a:lnSpc>
+          <a:spcPct val="90000"/>
+        </a:lnSpc>
         <a:spcBef>
-          <a:spcPct val="20000"/>
+          <a:spcPts val="500"/>
         </a:spcBef>
-        <a:spcAft>
-          <a:spcPts val="600"/>
-        </a:spcAft>
-        <a:buClr>
-          <a:schemeClr val="tx1"/>
-        </a:buClr>
-        <a:buSzPct val="80000"/>
-        <a:buFont typeface="Wingdings 3" panose="05040102010807070707" pitchFamily="18" charset="2"/>
-        <a:buChar char=""/>
-        <a:defRPr sz="1400" kern="1200" cap="none">
+        <a:buFont typeface="Arial" panose="020B0604020202020204" pitchFamily="34" charset="0"/>
+        <a:buChar char="•"/>
+        <a:defRPr sz="1800" kern="1200">
           <a:solidFill>
-            <a:schemeClr val="bg2">
-              <a:lumMod val="75000"/>
-            </a:schemeClr>
+            <a:schemeClr val="tx1"/>
           </a:solidFill>
-          <a:effectLst/>
           <a:latin typeface="+mn-lt"/>
           <a:ea typeface="+mn-ea"/>
           <a:cs typeface="+mn-cs"/>
         </a:defRPr>
       </a:lvl8pPr>
-      <a:lvl9pPr marL="3886200" indent="-228600" algn="l" defTabSz="457200" rtl="0" eaLnBrk="1" latinLnBrk="0" hangingPunct="1">
+      <a:lvl9pPr marL="3886200" indent="-228600" algn="l" defTabSz="914400" rtl="0" eaLnBrk="1" latinLnBrk="0" hangingPunct="1">
+        <a:lnSpc>
+          <a:spcPct val="90000"/>
+        </a:lnSpc>
         <a:spcBef>
-          <a:spcPct val="20000"/>
+          <a:spcPts val="500"/>
         </a:spcBef>
-        <a:spcAft>
-          <a:spcPts val="600"/>
-        </a:spcAft>
-        <a:buClr>
-          <a:schemeClr val="tx1"/>
-        </a:buClr>
-        <a:buSzPct val="80000"/>
-        <a:buFont typeface="Wingdings 3" panose="05040102010807070707" pitchFamily="18" charset="2"/>
-        <a:buChar char=""/>
-        <a:defRPr sz="1400" kern="1200" cap="none">
+        <a:buFont typeface="Arial" panose="020B0604020202020204" pitchFamily="34" charset="0"/>
+        <a:buChar char="•"/>
+        <a:defRPr sz="1800" kern="1200">
           <a:solidFill>
-            <a:schemeClr val="bg2">
-              <a:lumMod val="75000"/>
-            </a:schemeClr>
+            <a:schemeClr val="tx1"/>
           </a:solidFill>
-          <a:effectLst/>
           <a:latin typeface="+mn-lt"/>
           <a:ea typeface="+mn-ea"/>
           <a:cs typeface="+mn-cs"/>
@@ -5698,9 +3656,9 @@
     </p:bodyStyle>
     <p:otherStyle>
       <a:defPPr>
-        <a:defRPr lang="en-US"/>
+        <a:defRPr lang="ru-RU"/>
       </a:defPPr>
-      <a:lvl1pPr marL="0" algn="l" defTabSz="457200" rtl="0" eaLnBrk="1" latinLnBrk="0" hangingPunct="1">
+      <a:lvl1pPr marL="0" algn="l" defTabSz="914400" rtl="0" eaLnBrk="1" latinLnBrk="0" hangingPunct="1">
         <a:defRPr sz="1800" kern="1200">
           <a:solidFill>
             <a:schemeClr val="tx1"/>
@@ -5710,7 +3668,7 @@
           <a:cs typeface="+mn-cs"/>
         </a:defRPr>
       </a:lvl1pPr>
-      <a:lvl2pPr marL="457200" algn="l" defTabSz="457200" rtl="0" eaLnBrk="1" latinLnBrk="0" hangingPunct="1">
+      <a:lvl2pPr marL="457200" algn="l" defTabSz="914400" rtl="0" eaLnBrk="1" latinLnBrk="0" hangingPunct="1">
         <a:defRPr sz="1800" kern="1200">
           <a:solidFill>
             <a:schemeClr val="tx1"/>
@@ -5720,7 +3678,7 @@
           <a:cs typeface="+mn-cs"/>
         </a:defRPr>
       </a:lvl2pPr>
-      <a:lvl3pPr marL="914400" algn="l" defTabSz="457200" rtl="0" eaLnBrk="1" latinLnBrk="0" hangingPunct="1">
+      <a:lvl3pPr marL="914400" algn="l" defTabSz="914400" rtl="0" eaLnBrk="1" latinLnBrk="0" hangingPunct="1">
         <a:defRPr sz="1800" kern="1200">
           <a:solidFill>
             <a:schemeClr val="tx1"/>
@@ -5730,7 +3688,7 @@
           <a:cs typeface="+mn-cs"/>
         </a:defRPr>
       </a:lvl3pPr>
-      <a:lvl4pPr marL="1371600" algn="l" defTabSz="457200" rtl="0" eaLnBrk="1" latinLnBrk="0" hangingPunct="1">
+      <a:lvl4pPr marL="1371600" algn="l" defTabSz="914400" rtl="0" eaLnBrk="1" latinLnBrk="0" hangingPunct="1">
         <a:defRPr sz="1800" kern="1200">
           <a:solidFill>
             <a:schemeClr val="tx1"/>
@@ -5740,7 +3698,7 @@
           <a:cs typeface="+mn-cs"/>
         </a:defRPr>
       </a:lvl4pPr>
-      <a:lvl5pPr marL="1828800" algn="l" defTabSz="457200" rtl="0" eaLnBrk="1" latinLnBrk="0" hangingPunct="1">
+      <a:lvl5pPr marL="1828800" algn="l" defTabSz="914400" rtl="0" eaLnBrk="1" latinLnBrk="0" hangingPunct="1">
         <a:defRPr sz="1800" kern="1200">
           <a:solidFill>
             <a:schemeClr val="tx1"/>
@@ -5750,7 +3708,7 @@
           <a:cs typeface="+mn-cs"/>
         </a:defRPr>
       </a:lvl5pPr>
-      <a:lvl6pPr marL="2286000" algn="l" defTabSz="457200" rtl="0" eaLnBrk="1" latinLnBrk="0" hangingPunct="1">
+      <a:lvl6pPr marL="2286000" algn="l" defTabSz="914400" rtl="0" eaLnBrk="1" latinLnBrk="0" hangingPunct="1">
         <a:defRPr sz="1800" kern="1200">
           <a:solidFill>
             <a:schemeClr val="tx1"/>
@@ -5760,7 +3718,7 @@
           <a:cs typeface="+mn-cs"/>
         </a:defRPr>
       </a:lvl6pPr>
-      <a:lvl7pPr marL="2743200" algn="l" defTabSz="457200" rtl="0" eaLnBrk="1" latinLnBrk="0" hangingPunct="1">
+      <a:lvl7pPr marL="2743200" algn="l" defTabSz="914400" rtl="0" eaLnBrk="1" latinLnBrk="0" hangingPunct="1">
         <a:defRPr sz="1800" kern="1200">
           <a:solidFill>
             <a:schemeClr val="tx1"/>
@@ -5770,7 +3728,7 @@
           <a:cs typeface="+mn-cs"/>
         </a:defRPr>
       </a:lvl7pPr>
-      <a:lvl8pPr marL="3200400" algn="l" defTabSz="457200" rtl="0" eaLnBrk="1" latinLnBrk="0" hangingPunct="1">
+      <a:lvl8pPr marL="3200400" algn="l" defTabSz="914400" rtl="0" eaLnBrk="1" latinLnBrk="0" hangingPunct="1">
         <a:defRPr sz="1800" kern="1200">
           <a:solidFill>
             <a:schemeClr val="tx1"/>
@@ -5780,7 +3738,7 @@
           <a:cs typeface="+mn-cs"/>
         </a:defRPr>
       </a:lvl8pPr>
-      <a:lvl9pPr marL="3657600" algn="l" defTabSz="457200" rtl="0" eaLnBrk="1" latinLnBrk="0" hangingPunct="1">
+      <a:lvl9pPr marL="3657600" algn="l" defTabSz="914400" rtl="0" eaLnBrk="1" latinLnBrk="0" hangingPunct="1">
         <a:defRPr sz="1800" kern="1200">
           <a:solidFill>
             <a:schemeClr val="tx1"/>
@@ -5792,6 +3750,11 @@
       </a:lvl9pPr>
     </p:otherStyle>
   </p:txStyles>
+  <p:extLst>
+    <p:ext uri="{27BBF7A9-308A-43DC-89C8-2F10F3537804}">
+      <p15:sldGuideLst xmlns:p15="http://schemas.microsoft.com/office/powerpoint/2012/main"/>
+    </p:ext>
+  </p:extLst>
 </p:sldMaster>
 </file>
 
@@ -5955,7 +3918,7 @@
         <p:spPr>
           <a:xfrm>
             <a:off x="1218752" y="2493416"/>
-            <a:ext cx="9532008" cy="1077218"/>
+            <a:ext cx="9532008" cy="584775"/>
           </a:xfrm>
           <a:prstGeom prst="rect">
             <a:avLst/>
@@ -5974,7 +3937,7 @@
                 <a:latin typeface="Times New Roman" panose="02020603050405020304" pitchFamily="18" charset="0"/>
                 <a:cs typeface="Times New Roman" panose="02020603050405020304" pitchFamily="18" charset="0"/>
               </a:rPr>
-              <a:t>Разработка мобильного приложения «Дневник настроения»</a:t>
+              <a:t>Разработка мобильного приложения «Шашки»</a:t>
             </a:r>
           </a:p>
         </p:txBody>
@@ -6039,19 +4002,37 @@
           <a:p>
             <a:pPr algn="r"/>
             <a:r>
-              <a:rPr lang="ru-RU" sz="2000" dirty="0" err="1">
-                <a:latin typeface="Times New Roman" panose="02020603050405020304" pitchFamily="18" charset="0"/>
-                <a:cs typeface="Times New Roman" panose="02020603050405020304" pitchFamily="18" charset="0"/>
-              </a:rPr>
-              <a:t>Кошкарев</a:t>
-            </a:r>
-            <a:r>
               <a:rPr lang="ru-RU" sz="2000" dirty="0">
                 <a:latin typeface="Times New Roman" panose="02020603050405020304" pitchFamily="18" charset="0"/>
                 <a:cs typeface="Times New Roman" panose="02020603050405020304" pitchFamily="18" charset="0"/>
               </a:rPr>
-              <a:t> Д.Н</a:t>
-            </a:r>
+              <a:t>Михайлов Д</a:t>
+            </a:r>
+            <a:r>
+              <a:rPr lang="en-US" sz="2000" dirty="0">
+                <a:latin typeface="Times New Roman" panose="02020603050405020304" pitchFamily="18" charset="0"/>
+                <a:cs typeface="Times New Roman" panose="02020603050405020304" pitchFamily="18" charset="0"/>
+              </a:rPr>
+              <a:t>.</a:t>
+            </a:r>
+            <a:r>
+              <a:rPr lang="ru-RU" sz="2000" dirty="0">
+                <a:latin typeface="Times New Roman" panose="02020603050405020304" pitchFamily="18" charset="0"/>
+                <a:cs typeface="Times New Roman" panose="02020603050405020304" pitchFamily="18" charset="0"/>
+              </a:rPr>
+              <a:t>Д</a:t>
+            </a:r>
+            <a:r>
+              <a:rPr lang="en-US" sz="2000" dirty="0">
+                <a:latin typeface="Times New Roman" panose="02020603050405020304" pitchFamily="18" charset="0"/>
+                <a:cs typeface="Times New Roman" panose="02020603050405020304" pitchFamily="18" charset="0"/>
+              </a:rPr>
+              <a:t>.</a:t>
+            </a:r>
+            <a:endParaRPr lang="ru-RU" sz="2000" dirty="0">
+              <a:latin typeface="Times New Roman" panose="02020603050405020304" pitchFamily="18" charset="0"/>
+              <a:cs typeface="Times New Roman" panose="02020603050405020304" pitchFamily="18" charset="0"/>
+            </a:endParaRPr>
           </a:p>
         </p:txBody>
       </p:sp>
@@ -6130,12 +4111,50 @@
           <a:chExt cx="0" cy="0"/>
         </a:xfrm>
       </p:grpSpPr>
+      <p:sp>
+        <p:nvSpPr>
+          <p:cNvPr id="2" name="TextBox 1">
+            <a:extLst>
+              <a:ext uri="{FF2B5EF4-FFF2-40B4-BE49-F238E27FC236}">
+                <a16:creationId xmlns:a16="http://schemas.microsoft.com/office/drawing/2014/main" id="{8A3F94BA-766A-AEF0-1E64-E25D9D0E8AA1}"/>
+              </a:ext>
+            </a:extLst>
+          </p:cNvPr>
+          <p:cNvSpPr txBox="1"/>
+          <p:nvPr/>
+        </p:nvSpPr>
+        <p:spPr>
+          <a:xfrm>
+            <a:off x="1171517" y="2722581"/>
+            <a:ext cx="3925018" cy="954107"/>
+          </a:xfrm>
+          <a:prstGeom prst="rect">
+            <a:avLst/>
+          </a:prstGeom>
+          <a:noFill/>
+        </p:spPr>
+        <p:txBody>
+          <a:bodyPr wrap="square" rtlCol="0">
+            <a:spAutoFit/>
+          </a:bodyPr>
+          <a:lstStyle/>
+          <a:p>
+            <a:r>
+              <a:rPr lang="ru-RU" sz="2800" dirty="0">
+                <a:latin typeface="Times New Roman" panose="02020603050405020304" pitchFamily="18" charset="0"/>
+                <a:cs typeface="Times New Roman" panose="02020603050405020304" pitchFamily="18" charset="0"/>
+              </a:rPr>
+              <a:t>Разработать мобильное приложение «Шашки»</a:t>
+            </a:r>
+          </a:p>
+        </p:txBody>
+      </p:sp>
       <p:pic>
         <p:nvPicPr>
-          <p:cNvPr id="2" name="Picture 2" descr="Android Studio — Википедия">
-            <a:extLst>
-              <a:ext uri="{FF2B5EF4-FFF2-40B4-BE49-F238E27FC236}">
-                <a16:creationId xmlns:a16="http://schemas.microsoft.com/office/drawing/2014/main" id="{9DB6065A-92D0-4257-B6E6-8C76DA4D0672}"/>
+          <p:cNvPr id="3" name="Picture 4">
+            <a:extLst>
+              <a:ext uri="{FF2B5EF4-FFF2-40B4-BE49-F238E27FC236}">
+                <a16:creationId xmlns:a16="http://schemas.microsoft.com/office/drawing/2014/main" id="{8500247B-70FC-632E-93A8-FC468AC50693}"/>
               </a:ext>
             </a:extLst>
           </p:cNvPr>
@@ -6146,349 +4165,6 @@
         </p:nvPicPr>
         <p:blipFill>
           <a:blip r:embed="rId2" cstate="print">
-            <a:extLst>
-              <a:ext uri="{28A0092B-C50C-407E-A947-70E740481C1C}">
-                <a14:useLocalDpi xmlns:a14="http://schemas.microsoft.com/office/drawing/2010/main" val="0"/>
-              </a:ext>
-            </a:extLst>
-          </a:blip>
-          <a:srcRect/>
-          <a:stretch>
-            <a:fillRect/>
-          </a:stretch>
-        </p:blipFill>
-        <p:spPr bwMode="auto">
-          <a:xfrm>
-            <a:off x="-96748" y="116288"/>
-            <a:ext cx="3083788" cy="3083788"/>
-          </a:xfrm>
-          <a:prstGeom prst="rect">
-            <a:avLst/>
-          </a:prstGeom>
-          <a:noFill/>
-          <a:scene3d>
-            <a:camera prst="orthographicFront"/>
-            <a:lightRig rig="sunrise" dir="t"/>
-          </a:scene3d>
-          <a:sp3d prstMaterial="dkEdge"/>
-          <a:extLst>
-            <a:ext uri="{909E8E84-426E-40DD-AFC4-6F175D3DCCD1}">
-              <a14:hiddenFill xmlns:a14="http://schemas.microsoft.com/office/drawing/2010/main">
-                <a:solidFill>
-                  <a:srgbClr val="FFFFFF"/>
-                </a:solidFill>
-              </a14:hiddenFill>
-            </a:ext>
-          </a:extLst>
-        </p:spPr>
-      </p:pic>
-      <p:sp>
-        <p:nvSpPr>
-          <p:cNvPr id="6" name="TextBox 5">
-            <a:extLst>
-              <a:ext uri="{FF2B5EF4-FFF2-40B4-BE49-F238E27FC236}">
-                <a16:creationId xmlns:a16="http://schemas.microsoft.com/office/drawing/2014/main" id="{EDE51977-99C7-435B-BB4D-A75650FE0676}"/>
-              </a:ext>
-            </a:extLst>
-          </p:cNvPr>
-          <p:cNvSpPr txBox="1"/>
-          <p:nvPr/>
-        </p:nvSpPr>
-        <p:spPr>
-          <a:xfrm>
-            <a:off x="2315536" y="542612"/>
-            <a:ext cx="7829550" cy="769441"/>
-          </a:xfrm>
-          <a:prstGeom prst="rect">
-            <a:avLst/>
-          </a:prstGeom>
-          <a:noFill/>
-        </p:spPr>
-        <p:txBody>
-          <a:bodyPr wrap="square">
-            <a:spAutoFit/>
-          </a:bodyPr>
-          <a:lstStyle/>
-          <a:p>
-            <a:r>
-              <a:rPr lang="ru-RU" sz="4400" dirty="0">
-                <a:latin typeface="Times New Roman" panose="02020603050405020304" pitchFamily="18" charset="0"/>
-                <a:cs typeface="Times New Roman" panose="02020603050405020304" pitchFamily="18" charset="0"/>
-              </a:rPr>
-              <a:t>Актуальность выбранной темы</a:t>
-            </a:r>
-            <a:endParaRPr lang="ru-RU" sz="1100" dirty="0">
-              <a:latin typeface="Times New Roman" panose="02020603050405020304" pitchFamily="18" charset="0"/>
-              <a:cs typeface="Times New Roman" panose="02020603050405020304" pitchFamily="18" charset="0"/>
-            </a:endParaRPr>
-          </a:p>
-        </p:txBody>
-      </p:sp>
-      <p:sp>
-        <p:nvSpPr>
-          <p:cNvPr id="7" name="TextBox 6">
-            <a:extLst>
-              <a:ext uri="{FF2B5EF4-FFF2-40B4-BE49-F238E27FC236}">
-                <a16:creationId xmlns:a16="http://schemas.microsoft.com/office/drawing/2014/main" id="{59339B4C-490B-4A4C-9456-89F8E8C44949}"/>
-              </a:ext>
-            </a:extLst>
-          </p:cNvPr>
-          <p:cNvSpPr txBox="1"/>
-          <p:nvPr/>
-        </p:nvSpPr>
-        <p:spPr>
-          <a:xfrm>
-            <a:off x="2430360" y="1826510"/>
-            <a:ext cx="7314774" cy="3108543"/>
-          </a:xfrm>
-          <a:prstGeom prst="rect">
-            <a:avLst/>
-          </a:prstGeom>
-          <a:noFill/>
-        </p:spPr>
-        <p:txBody>
-          <a:bodyPr wrap="square">
-            <a:spAutoFit/>
-          </a:bodyPr>
-          <a:lstStyle/>
-          <a:p>
-            <a:r>
-              <a:rPr lang="ru-RU" sz="2800" dirty="0">
-                <a:latin typeface="Times New Roman" panose="02020603050405020304" pitchFamily="18" charset="0"/>
-                <a:cs typeface="Times New Roman" panose="02020603050405020304" pitchFamily="18" charset="0"/>
-              </a:rPr>
-              <a:t>Актуальность разработки мобильного приложения "Дневник настроения" обусловлена растущим вниманием общества к вопросам ментального здоровья и необходимостью в доступных инструментах для ежедневной психологической саморефлексии.</a:t>
-            </a:r>
-          </a:p>
-        </p:txBody>
-      </p:sp>
-    </p:spTree>
-    <p:extLst>
-      <p:ext uri="{BB962C8B-B14F-4D97-AF65-F5344CB8AC3E}">
-        <p14:creationId xmlns:p14="http://schemas.microsoft.com/office/powerpoint/2010/main" val="2411080"/>
-      </p:ext>
-    </p:extLst>
-  </p:cSld>
-  <p:clrMapOvr>
-    <a:masterClrMapping/>
-  </p:clrMapOvr>
-  <p:timing>
-    <p:tnLst>
-      <p:par>
-        <p:cTn id="1" dur="indefinite" restart="never" nodeType="tmRoot">
-          <p:childTnLst>
-            <p:seq concurrent="1" nextAc="seek">
-              <p:cTn id="2" dur="indefinite" nodeType="mainSeq">
-                <p:childTnLst>
-                  <p:par>
-                    <p:cTn id="3" fill="hold">
-                      <p:stCondLst>
-                        <p:cond delay="indefinite"/>
-                      </p:stCondLst>
-                      <p:childTnLst>
-                        <p:par>
-                          <p:cTn id="4" fill="hold">
-                            <p:stCondLst>
-                              <p:cond delay="0"/>
-                            </p:stCondLst>
-                            <p:childTnLst>
-                              <p:par>
-                                <p:cTn id="5" presetID="22" presetClass="entr" presetSubtype="4" fill="hold" nodeType="clickEffect">
-                                  <p:stCondLst>
-                                    <p:cond delay="0"/>
-                                  </p:stCondLst>
-                                  <p:childTnLst>
-                                    <p:set>
-                                      <p:cBhvr>
-                                        <p:cTn id="6" dur="1" fill="hold">
-                                          <p:stCondLst>
-                                            <p:cond delay="0"/>
-                                          </p:stCondLst>
-                                        </p:cTn>
-                                        <p:tgtEl>
-                                          <p:spTgt spid="2"/>
-                                        </p:tgtEl>
-                                        <p:attrNameLst>
-                                          <p:attrName>style.visibility</p:attrName>
-                                        </p:attrNameLst>
-                                      </p:cBhvr>
-                                      <p:to>
-                                        <p:strVal val="visible"/>
-                                      </p:to>
-                                    </p:set>
-                                    <p:animEffect transition="in" filter="wipe(down)">
-                                      <p:cBhvr>
-                                        <p:cTn id="7" dur="500"/>
-                                        <p:tgtEl>
-                                          <p:spTgt spid="2"/>
-                                        </p:tgtEl>
-                                      </p:cBhvr>
-                                    </p:animEffect>
-                                  </p:childTnLst>
-                                </p:cTn>
-                              </p:par>
-                            </p:childTnLst>
-                          </p:cTn>
-                        </p:par>
-                      </p:childTnLst>
-                    </p:cTn>
-                  </p:par>
-                </p:childTnLst>
-              </p:cTn>
-              <p:prevCondLst>
-                <p:cond evt="onPrev" delay="0">
-                  <p:tgtEl>
-                    <p:sldTgt/>
-                  </p:tgtEl>
-                </p:cond>
-              </p:prevCondLst>
-              <p:nextCondLst>
-                <p:cond evt="onNext" delay="0">
-                  <p:tgtEl>
-                    <p:sldTgt/>
-                  </p:tgtEl>
-                </p:cond>
-              </p:nextCondLst>
-            </p:seq>
-          </p:childTnLst>
-        </p:cTn>
-      </p:par>
-    </p:tnLst>
-  </p:timing>
-</p:sld>
-</file>
-
-<file path=ppt/slides/slide3.xml><?xml version="1.0" encoding="utf-8"?>
-<p:sld xmlns:a="http://schemas.openxmlformats.org/drawingml/2006/main" xmlns:r="http://schemas.openxmlformats.org/officeDocument/2006/relationships" xmlns:p="http://schemas.openxmlformats.org/presentationml/2006/main">
-  <p:cSld>
-    <p:spTree>
-      <p:nvGrpSpPr>
-        <p:cNvPr id="1" name=""/>
-        <p:cNvGrpSpPr/>
-        <p:nvPr/>
-      </p:nvGrpSpPr>
-      <p:grpSpPr>
-        <a:xfrm>
-          <a:off x="0" y="0"/>
-          <a:ext cx="0" cy="0"/>
-          <a:chOff x="0" y="0"/>
-          <a:chExt cx="0" cy="0"/>
-        </a:xfrm>
-      </p:grpSpPr>
-      <p:pic>
-        <p:nvPicPr>
-          <p:cNvPr id="7" name="Рисунок 6"/>
-          <p:cNvPicPr>
-            <a:picLocks noChangeAspect="1"/>
-          </p:cNvPicPr>
-          <p:nvPr/>
-        </p:nvPicPr>
-        <p:blipFill>
-          <a:blip r:embed="rId2">
-            <a:extLst>
-              <a:ext uri="{28A0092B-C50C-407E-A947-70E740481C1C}">
-                <a14:useLocalDpi xmlns:a14="http://schemas.microsoft.com/office/drawing/2010/main" val="0"/>
-              </a:ext>
-            </a:extLst>
-          </a:blip>
-          <a:stretch>
-            <a:fillRect/>
-          </a:stretch>
-        </p:blipFill>
-        <p:spPr>
-          <a:xfrm>
-            <a:off x="-1407246" y="-1736521"/>
-            <a:ext cx="6804506" cy="6858000"/>
-          </a:xfrm>
-          <a:prstGeom prst="rect">
-            <a:avLst/>
-          </a:prstGeom>
-        </p:spPr>
-      </p:pic>
-      <p:pic>
-        <p:nvPicPr>
-          <p:cNvPr id="9" name="Рисунок 8"/>
-          <p:cNvPicPr>
-            <a:picLocks noChangeAspect="1"/>
-          </p:cNvPicPr>
-          <p:nvPr/>
-        </p:nvPicPr>
-        <p:blipFill>
-          <a:blip r:embed="rId3">
-            <a:extLst>
-              <a:ext uri="{28A0092B-C50C-407E-A947-70E740481C1C}">
-                <a14:useLocalDpi xmlns:a14="http://schemas.microsoft.com/office/drawing/2010/main" val="0"/>
-              </a:ext>
-            </a:extLst>
-          </a:blip>
-          <a:stretch>
-            <a:fillRect/>
-          </a:stretch>
-        </p:blipFill>
-        <p:spPr>
-          <a:xfrm>
-            <a:off x="4261449" y="1692479"/>
-            <a:ext cx="6804506" cy="6858000"/>
-          </a:xfrm>
-          <a:prstGeom prst="rect">
-            <a:avLst/>
-          </a:prstGeom>
-        </p:spPr>
-      </p:pic>
-      <p:sp>
-        <p:nvSpPr>
-          <p:cNvPr id="2" name="TextBox 1">
-            <a:extLst>
-              <a:ext uri="{FF2B5EF4-FFF2-40B4-BE49-F238E27FC236}">
-                <a16:creationId xmlns:a16="http://schemas.microsoft.com/office/drawing/2014/main" id="{8A3F94BA-766A-AEF0-1E64-E25D9D0E8AA1}"/>
-              </a:ext>
-            </a:extLst>
-          </p:cNvPr>
-          <p:cNvSpPr txBox="1"/>
-          <p:nvPr/>
-        </p:nvSpPr>
-        <p:spPr>
-          <a:xfrm>
-            <a:off x="1009531" y="2507137"/>
-            <a:ext cx="3925018" cy="1384995"/>
-          </a:xfrm>
-          <a:prstGeom prst="rect">
-            <a:avLst/>
-          </a:prstGeom>
-          <a:noFill/>
-        </p:spPr>
-        <p:txBody>
-          <a:bodyPr wrap="square" rtlCol="0">
-            <a:spAutoFit/>
-          </a:bodyPr>
-          <a:lstStyle/>
-          <a:p>
-            <a:r>
-              <a:rPr lang="ru-RU" sz="2800" dirty="0">
-                <a:latin typeface="Times New Roman" panose="02020603050405020304" pitchFamily="18" charset="0"/>
-                <a:cs typeface="Times New Roman" panose="02020603050405020304" pitchFamily="18" charset="0"/>
-              </a:rPr>
-              <a:t>Разработать мобильное приложение «Дневник настроения»</a:t>
-            </a:r>
-          </a:p>
-        </p:txBody>
-      </p:sp>
-      <p:pic>
-        <p:nvPicPr>
-          <p:cNvPr id="3" name="Picture 4">
-            <a:extLst>
-              <a:ext uri="{FF2B5EF4-FFF2-40B4-BE49-F238E27FC236}">
-                <a16:creationId xmlns:a16="http://schemas.microsoft.com/office/drawing/2014/main" id="{8500247B-70FC-632E-93A8-FC468AC50693}"/>
-              </a:ext>
-            </a:extLst>
-          </p:cNvPr>
-          <p:cNvPicPr>
-            <a:picLocks noChangeAspect="1" noChangeArrowheads="1"/>
-          </p:cNvPicPr>
-          <p:nvPr/>
-        </p:nvPicPr>
-        <p:blipFill>
-          <a:blip r:embed="rId4" cstate="print">
             <a:extLst>
               <a:ext uri="{28A0092B-C50C-407E-A947-70E740481C1C}">
                 <a14:useLocalDpi xmlns:a14="http://schemas.microsoft.com/office/drawing/2010/main" val="0"/>
@@ -6526,6 +4202,53 @@
           </a:extLst>
         </p:spPr>
       </p:pic>
+      <p:pic>
+        <p:nvPicPr>
+          <p:cNvPr id="1026" name="Picture 2">
+            <a:extLst>
+              <a:ext uri="{FF2B5EF4-FFF2-40B4-BE49-F238E27FC236}">
+                <a16:creationId xmlns:a16="http://schemas.microsoft.com/office/drawing/2014/main" id="{594A28F9-BEBF-15D3-ACA5-BEEFF0AC7C15}"/>
+              </a:ext>
+            </a:extLst>
+          </p:cNvPr>
+          <p:cNvPicPr>
+            <a:picLocks noChangeAspect="1" noChangeArrowheads="1"/>
+          </p:cNvPicPr>
+          <p:nvPr/>
+        </p:nvPicPr>
+        <p:blipFill>
+          <a:blip r:embed="rId3">
+            <a:extLst>
+              <a:ext uri="{28A0092B-C50C-407E-A947-70E740481C1C}">
+                <a14:useLocalDpi xmlns:a14="http://schemas.microsoft.com/office/drawing/2010/main" val="0"/>
+              </a:ext>
+            </a:extLst>
+          </a:blip>
+          <a:srcRect/>
+          <a:stretch>
+            <a:fillRect/>
+          </a:stretch>
+        </p:blipFill>
+        <p:spPr bwMode="auto">
+          <a:xfrm>
+            <a:off x="498758" y="247232"/>
+            <a:ext cx="2840277" cy="2130208"/>
+          </a:xfrm>
+          <a:prstGeom prst="rect">
+            <a:avLst/>
+          </a:prstGeom>
+          <a:noFill/>
+          <a:extLst>
+            <a:ext uri="{909E8E84-426E-40DD-AFC4-6F175D3DCCD1}">
+              <a14:hiddenFill xmlns:a14="http://schemas.microsoft.com/office/drawing/2010/main">
+                <a:solidFill>
+                  <a:srgbClr val="FFFFFF"/>
+                </a:solidFill>
+              </a14:hiddenFill>
+            </a:ext>
+          </a:extLst>
+        </p:spPr>
+      </p:pic>
     </p:spTree>
     <p:extLst>
       <p:ext uri="{BB962C8B-B14F-4D97-AF65-F5344CB8AC3E}">
@@ -6536,6 +4259,18 @@
   <p:clrMapOvr>
     <a:masterClrMapping/>
   </p:clrMapOvr>
+  <mc:AlternateContent xmlns:mc="http://schemas.openxmlformats.org/markup-compatibility/2006">
+    <mc:Choice xmlns:p14="http://schemas.microsoft.com/office/powerpoint/2010/main" Requires="p14">
+      <p:transition spd="slow" p14:dur="3400">
+        <p14:reveal/>
+      </p:transition>
+    </mc:Choice>
+    <mc:Fallback>
+      <p:transition spd="slow">
+        <p:fade/>
+      </p:transition>
+    </mc:Fallback>
+  </mc:AlternateContent>
   <p:timing>
     <p:tnLst>
       <p:par>
@@ -6656,7 +4391,7 @@
                             </p:stCondLst>
                             <p:childTnLst>
                               <p:par>
-                                <p:cTn id="12" presetID="42" presetClass="entr" presetSubtype="0" fill="hold" nodeType="clickEffect">
+                                <p:cTn id="12" presetID="42" presetClass="entr" presetSubtype="0" fill="hold" grpId="0" nodeType="clickEffect">
                                   <p:stCondLst>
                                     <p:cond delay="0"/>
                                   </p:stCondLst>
@@ -6669,7 +4404,7 @@
                                           </p:stCondLst>
                                         </p:cTn>
                                         <p:tgtEl>
-                                          <p:spTgt spid="7"/>
+                                          <p:spTgt spid="2"/>
                                         </p:tgtEl>
                                         <p:attrNameLst>
                                           <p:attrName>style.visibility</p:attrName>
@@ -6683,7 +4418,7 @@
                                       <p:cBhvr>
                                         <p:cTn id="14" dur="1000"/>
                                         <p:tgtEl>
-                                          <p:spTgt spid="7"/>
+                                          <p:spTgt spid="2"/>
                                         </p:tgtEl>
                                       </p:cBhvr>
                                     </p:animEffect>
@@ -6691,7 +4426,7 @@
                                       <p:cBhvr>
                                         <p:cTn id="15" dur="1000" fill="hold"/>
                                         <p:tgtEl>
-                                          <p:spTgt spid="7"/>
+                                          <p:spTgt spid="2"/>
                                         </p:tgtEl>
                                         <p:attrNameLst>
                                           <p:attrName>ppt_x</p:attrName>
@@ -6714,205 +4449,7 @@
                                       <p:cBhvr>
                                         <p:cTn id="16" dur="1000" fill="hold"/>
                                         <p:tgtEl>
-                                          <p:spTgt spid="7"/>
-                                        </p:tgtEl>
-                                        <p:attrNameLst>
-                                          <p:attrName>ppt_y</p:attrName>
-                                        </p:attrNameLst>
-                                      </p:cBhvr>
-                                      <p:tavLst>
-                                        <p:tav tm="0">
-                                          <p:val>
-                                            <p:strVal val="#ppt_y+.1"/>
-                                          </p:val>
-                                        </p:tav>
-                                        <p:tav tm="100000">
-                                          <p:val>
-                                            <p:strVal val="#ppt_y"/>
-                                          </p:val>
-                                        </p:tav>
-                                      </p:tavLst>
-                                    </p:anim>
-                                  </p:childTnLst>
-                                </p:cTn>
-                              </p:par>
-                            </p:childTnLst>
-                          </p:cTn>
-                        </p:par>
-                      </p:childTnLst>
-                    </p:cTn>
-                  </p:par>
-                  <p:par>
-                    <p:cTn id="17" fill="hold">
-                      <p:stCondLst>
-                        <p:cond delay="indefinite"/>
-                      </p:stCondLst>
-                      <p:childTnLst>
-                        <p:par>
-                          <p:cTn id="18" fill="hold">
-                            <p:stCondLst>
-                              <p:cond delay="0"/>
-                            </p:stCondLst>
-                            <p:childTnLst>
-                              <p:par>
-                                <p:cTn id="19" presetID="42" presetClass="entr" presetSubtype="0" fill="hold" grpId="0" nodeType="clickEffect">
-                                  <p:stCondLst>
-                                    <p:cond delay="0"/>
-                                  </p:stCondLst>
-                                  <p:childTnLst>
-                                    <p:set>
-                                      <p:cBhvr>
-                                        <p:cTn id="20" dur="1" fill="hold">
-                                          <p:stCondLst>
-                                            <p:cond delay="0"/>
-                                          </p:stCondLst>
-                                        </p:cTn>
-                                        <p:tgtEl>
                                           <p:spTgt spid="2"/>
-                                        </p:tgtEl>
-                                        <p:attrNameLst>
-                                          <p:attrName>style.visibility</p:attrName>
-                                        </p:attrNameLst>
-                                      </p:cBhvr>
-                                      <p:to>
-                                        <p:strVal val="visible"/>
-                                      </p:to>
-                                    </p:set>
-                                    <p:animEffect transition="in" filter="fade">
-                                      <p:cBhvr>
-                                        <p:cTn id="21" dur="1000"/>
-                                        <p:tgtEl>
-                                          <p:spTgt spid="2"/>
-                                        </p:tgtEl>
-                                      </p:cBhvr>
-                                    </p:animEffect>
-                                    <p:anim calcmode="lin" valueType="num">
-                                      <p:cBhvr>
-                                        <p:cTn id="22" dur="1000" fill="hold"/>
-                                        <p:tgtEl>
-                                          <p:spTgt spid="2"/>
-                                        </p:tgtEl>
-                                        <p:attrNameLst>
-                                          <p:attrName>ppt_x</p:attrName>
-                                        </p:attrNameLst>
-                                      </p:cBhvr>
-                                      <p:tavLst>
-                                        <p:tav tm="0">
-                                          <p:val>
-                                            <p:strVal val="#ppt_x"/>
-                                          </p:val>
-                                        </p:tav>
-                                        <p:tav tm="100000">
-                                          <p:val>
-                                            <p:strVal val="#ppt_x"/>
-                                          </p:val>
-                                        </p:tav>
-                                      </p:tavLst>
-                                    </p:anim>
-                                    <p:anim calcmode="lin" valueType="num">
-                                      <p:cBhvr>
-                                        <p:cTn id="23" dur="1000" fill="hold"/>
-                                        <p:tgtEl>
-                                          <p:spTgt spid="2"/>
-                                        </p:tgtEl>
-                                        <p:attrNameLst>
-                                          <p:attrName>ppt_y</p:attrName>
-                                        </p:attrNameLst>
-                                      </p:cBhvr>
-                                      <p:tavLst>
-                                        <p:tav tm="0">
-                                          <p:val>
-                                            <p:strVal val="#ppt_y+.1"/>
-                                          </p:val>
-                                        </p:tav>
-                                        <p:tav tm="100000">
-                                          <p:val>
-                                            <p:strVal val="#ppt_y"/>
-                                          </p:val>
-                                        </p:tav>
-                                      </p:tavLst>
-                                    </p:anim>
-                                  </p:childTnLst>
-                                </p:cTn>
-                              </p:par>
-                            </p:childTnLst>
-                          </p:cTn>
-                        </p:par>
-                      </p:childTnLst>
-                    </p:cTn>
-                  </p:par>
-                  <p:par>
-                    <p:cTn id="24" fill="hold">
-                      <p:stCondLst>
-                        <p:cond delay="indefinite"/>
-                      </p:stCondLst>
-                      <p:childTnLst>
-                        <p:par>
-                          <p:cTn id="25" fill="hold">
-                            <p:stCondLst>
-                              <p:cond delay="0"/>
-                            </p:stCondLst>
-                            <p:childTnLst>
-                              <p:par>
-                                <p:cTn id="26" presetID="42" presetClass="entr" presetSubtype="0" fill="hold" nodeType="clickEffect">
-                                  <p:stCondLst>
-                                    <p:cond delay="0"/>
-                                  </p:stCondLst>
-                                  <p:childTnLst>
-                                    <p:set>
-                                      <p:cBhvr>
-                                        <p:cTn id="27" dur="1" fill="hold">
-                                          <p:stCondLst>
-                                            <p:cond delay="0"/>
-                                          </p:stCondLst>
-                                        </p:cTn>
-                                        <p:tgtEl>
-                                          <p:spTgt spid="9"/>
-                                        </p:tgtEl>
-                                        <p:attrNameLst>
-                                          <p:attrName>style.visibility</p:attrName>
-                                        </p:attrNameLst>
-                                      </p:cBhvr>
-                                      <p:to>
-                                        <p:strVal val="visible"/>
-                                      </p:to>
-                                    </p:set>
-                                    <p:animEffect transition="in" filter="fade">
-                                      <p:cBhvr>
-                                        <p:cTn id="28" dur="1000"/>
-                                        <p:tgtEl>
-                                          <p:spTgt spid="9"/>
-                                        </p:tgtEl>
-                                      </p:cBhvr>
-                                    </p:animEffect>
-                                    <p:anim calcmode="lin" valueType="num">
-                                      <p:cBhvr>
-                                        <p:cTn id="29" dur="1000" fill="hold"/>
-                                        <p:tgtEl>
-                                          <p:spTgt spid="9"/>
-                                        </p:tgtEl>
-                                        <p:attrNameLst>
-                                          <p:attrName>ppt_x</p:attrName>
-                                        </p:attrNameLst>
-                                      </p:cBhvr>
-                                      <p:tavLst>
-                                        <p:tav tm="0">
-                                          <p:val>
-                                            <p:strVal val="#ppt_x"/>
-                                          </p:val>
-                                        </p:tav>
-                                        <p:tav tm="100000">
-                                          <p:val>
-                                            <p:strVal val="#ppt_x"/>
-                                          </p:val>
-                                        </p:tav>
-                                      </p:tavLst>
-                                    </p:anim>
-                                    <p:anim calcmode="lin" valueType="num">
-                                      <p:cBhvr>
-                                        <p:cTn id="30" dur="1000" fill="hold"/>
-                                        <p:tgtEl>
-                                          <p:spTgt spid="9"/>
                                         </p:tgtEl>
                                         <p:attrNameLst>
                                           <p:attrName>ppt_y</p:attrName>
@@ -6968,7 +4505,7 @@
 </p:sld>
 </file>
 
-<file path=ppt/slides/slide4.xml><?xml version="1.0" encoding="utf-8"?>
+<file path=ppt/slides/slide3.xml><?xml version="1.0" encoding="utf-8"?>
 <p:sld xmlns:a="http://schemas.openxmlformats.org/drawingml/2006/main" xmlns:r="http://schemas.openxmlformats.org/officeDocument/2006/relationships" xmlns:p="http://schemas.openxmlformats.org/presentationml/2006/main">
   <p:cSld>
     <p:spTree>
@@ -7153,36 +4690,6 @@
       </p:sp>
       <p:pic>
         <p:nvPicPr>
-          <p:cNvPr id="2" name="Рисунок 1"/>
-          <p:cNvPicPr>
-            <a:picLocks noChangeAspect="1"/>
-          </p:cNvPicPr>
-          <p:nvPr/>
-        </p:nvPicPr>
-        <p:blipFill>
-          <a:blip r:embed="rId2">
-            <a:extLst>
-              <a:ext uri="{28A0092B-C50C-407E-A947-70E740481C1C}">
-                <a14:useLocalDpi xmlns:a14="http://schemas.microsoft.com/office/drawing/2010/main" val="0"/>
-              </a:ext>
-            </a:extLst>
-          </a:blip>
-          <a:stretch>
-            <a:fillRect/>
-          </a:stretch>
-        </p:blipFill>
-        <p:spPr>
-          <a:xfrm>
-            <a:off x="-827423" y="-1656600"/>
-            <a:ext cx="6804506" cy="6858000"/>
-          </a:xfrm>
-          <a:prstGeom prst="rect">
-            <a:avLst/>
-          </a:prstGeom>
-        </p:spPr>
-      </p:pic>
-      <p:pic>
-        <p:nvPicPr>
           <p:cNvPr id="1026" name="Picture 2" descr="Android Studio — Википедия">
             <a:extLst>
               <a:ext uri="{FF2B5EF4-FFF2-40B4-BE49-F238E27FC236}">
@@ -7196,7 +4703,7 @@
           <p:nvPr/>
         </p:nvPicPr>
         <p:blipFill>
-          <a:blip r:embed="rId3" cstate="print">
+          <a:blip r:embed="rId2" cstate="print">
             <a:extLst>
               <a:ext uri="{28A0092B-C50C-407E-A947-70E740481C1C}">
                 <a14:useLocalDpi xmlns:a14="http://schemas.microsoft.com/office/drawing/2010/main" val="0"/>
@@ -7243,7 +4750,7 @@
           <p:nvPr/>
         </p:nvPicPr>
         <p:blipFill>
-          <a:blip r:embed="rId4" cstate="print">
+          <a:blip r:embed="rId3" cstate="print">
             <a:extLst>
               <a:ext uri="{28A0092B-C50C-407E-A947-70E740481C1C}">
                 <a14:useLocalDpi xmlns:a14="http://schemas.microsoft.com/office/drawing/2010/main" val="0"/>
@@ -7275,6 +4782,44 @@
           </a:extLst>
         </p:spPr>
       </p:pic>
+      <p:sp>
+        <p:nvSpPr>
+          <p:cNvPr id="3" name="TextBox 2">
+            <a:extLst>
+              <a:ext uri="{FF2B5EF4-FFF2-40B4-BE49-F238E27FC236}">
+                <a16:creationId xmlns:a16="http://schemas.microsoft.com/office/drawing/2014/main" id="{4A3ECD54-4EAC-512F-BF13-BAA9099A9A61}"/>
+              </a:ext>
+            </a:extLst>
+          </p:cNvPr>
+          <p:cNvSpPr txBox="1"/>
+          <p:nvPr/>
+        </p:nvSpPr>
+        <p:spPr>
+          <a:xfrm>
+            <a:off x="87682" y="50468"/>
+            <a:ext cx="3520194" cy="461665"/>
+          </a:xfrm>
+          <a:prstGeom prst="rect">
+            <a:avLst/>
+          </a:prstGeom>
+          <a:noFill/>
+        </p:spPr>
+        <p:txBody>
+          <a:bodyPr wrap="none" rtlCol="0">
+            <a:spAutoFit/>
+          </a:bodyPr>
+          <a:lstStyle/>
+          <a:p>
+            <a:r>
+              <a:rPr lang="ru-RU" sz="2400" dirty="0">
+                <a:latin typeface="Times New Roman" panose="02020603050405020304" pitchFamily="18" charset="0"/>
+                <a:cs typeface="Times New Roman" panose="02020603050405020304" pitchFamily="18" charset="0"/>
+              </a:rPr>
+              <a:t>Инструменты разработки</a:t>
+            </a:r>
+          </a:p>
+        </p:txBody>
+      </p:sp>
     </p:spTree>
     <p:extLst>
       <p:ext uri="{BB962C8B-B14F-4D97-AF65-F5344CB8AC3E}">
@@ -7285,6 +4830,9 @@
   <p:clrMapOvr>
     <a:masterClrMapping/>
   </p:clrMapOvr>
+  <p:transition spd="slow">
+    <p:cover/>
+  </p:transition>
   <p:timing>
     <p:tnLst>
       <p:par>
@@ -7780,6 +5328,205 @@
 </p:sld>
 </file>
 
+<file path=ppt/slides/slide4.xml><?xml version="1.0" encoding="utf-8"?>
+<p:sld xmlns:a="http://schemas.openxmlformats.org/drawingml/2006/main" xmlns:r="http://schemas.openxmlformats.org/officeDocument/2006/relationships" xmlns:p="http://schemas.openxmlformats.org/presentationml/2006/main">
+  <p:cSld>
+    <p:spTree>
+      <p:nvGrpSpPr>
+        <p:cNvPr id="1" name=""/>
+        <p:cNvGrpSpPr/>
+        <p:nvPr/>
+      </p:nvGrpSpPr>
+      <p:grpSpPr>
+        <a:xfrm>
+          <a:off x="0" y="0"/>
+          <a:ext cx="0" cy="0"/>
+          <a:chOff x="0" y="0"/>
+          <a:chExt cx="0" cy="0"/>
+        </a:xfrm>
+      </p:grpSpPr>
+      <p:sp>
+        <p:nvSpPr>
+          <p:cNvPr id="4" name="TextBox 3">
+            <a:extLst>
+              <a:ext uri="{FF2B5EF4-FFF2-40B4-BE49-F238E27FC236}">
+                <a16:creationId xmlns:a16="http://schemas.microsoft.com/office/drawing/2014/main" id="{9900FB4F-B2F7-CDCA-4F64-D858CF0BA805}"/>
+              </a:ext>
+            </a:extLst>
+          </p:cNvPr>
+          <p:cNvSpPr txBox="1"/>
+          <p:nvPr/>
+        </p:nvSpPr>
+        <p:spPr>
+          <a:xfrm>
+            <a:off x="187890" y="75156"/>
+            <a:ext cx="1143968" cy="523220"/>
+          </a:xfrm>
+          <a:prstGeom prst="rect">
+            <a:avLst/>
+          </a:prstGeom>
+          <a:noFill/>
+        </p:spPr>
+        <p:txBody>
+          <a:bodyPr wrap="none" rtlCol="0">
+            <a:spAutoFit/>
+          </a:bodyPr>
+          <a:lstStyle/>
+          <a:p>
+            <a:r>
+              <a:rPr lang="ru-RU" sz="2800" dirty="0">
+                <a:latin typeface="Times New Roman" panose="02020603050405020304" pitchFamily="18" charset="0"/>
+                <a:cs typeface="Times New Roman" panose="02020603050405020304" pitchFamily="18" charset="0"/>
+              </a:rPr>
+              <a:t>Макет</a:t>
+            </a:r>
+          </a:p>
+        </p:txBody>
+      </p:sp>
+      <p:pic>
+        <p:nvPicPr>
+          <p:cNvPr id="6" name="Рисунок 5">
+            <a:extLst>
+              <a:ext uri="{FF2B5EF4-FFF2-40B4-BE49-F238E27FC236}">
+                <a16:creationId xmlns:a16="http://schemas.microsoft.com/office/drawing/2014/main" id="{36DF634C-0375-7A96-F13D-A694C548F8EC}"/>
+              </a:ext>
+            </a:extLst>
+          </p:cNvPr>
+          <p:cNvPicPr>
+            <a:picLocks noChangeAspect="1"/>
+          </p:cNvPicPr>
+          <p:nvPr/>
+        </p:nvPicPr>
+        <p:blipFill>
+          <a:blip r:embed="rId2">
+            <a:extLst>
+              <a:ext uri="{28A0092B-C50C-407E-A947-70E740481C1C}">
+                <a14:useLocalDpi xmlns:a14="http://schemas.microsoft.com/office/drawing/2010/main" val="0"/>
+              </a:ext>
+            </a:extLst>
+          </a:blip>
+          <a:stretch>
+            <a:fillRect/>
+          </a:stretch>
+        </p:blipFill>
+        <p:spPr>
+          <a:xfrm>
+            <a:off x="4425125" y="354343"/>
+            <a:ext cx="3341749" cy="6149314"/>
+          </a:xfrm>
+          <a:prstGeom prst="rect">
+            <a:avLst/>
+          </a:prstGeom>
+        </p:spPr>
+      </p:pic>
+    </p:spTree>
+    <p:extLst>
+      <p:ext uri="{BB962C8B-B14F-4D97-AF65-F5344CB8AC3E}">
+        <p14:creationId xmlns:p14="http://schemas.microsoft.com/office/powerpoint/2010/main" val="3231275356"/>
+      </p:ext>
+    </p:extLst>
+  </p:cSld>
+  <p:clrMapOvr>
+    <a:masterClrMapping/>
+  </p:clrMapOvr>
+  <mc:AlternateContent xmlns:mc="http://schemas.openxmlformats.org/markup-compatibility/2006">
+    <mc:Choice xmlns:p15="http://schemas.microsoft.com/office/powerpoint/2012/main" Requires="p15">
+      <p:transition xmlns:p14="http://schemas.microsoft.com/office/powerpoint/2010/main" spd="slow" p14:dur="2000">
+        <p15:prstTrans prst="prestige"/>
+      </p:transition>
+    </mc:Choice>
+    <mc:Fallback>
+      <p:transition spd="slow">
+        <p:fade/>
+      </p:transition>
+    </mc:Fallback>
+  </mc:AlternateContent>
+  <p:timing>
+    <p:tnLst>
+      <p:par>
+        <p:cTn id="1" dur="indefinite" restart="never" nodeType="tmRoot">
+          <p:childTnLst>
+            <p:seq concurrent="1" nextAc="seek">
+              <p:cTn id="2" dur="indefinite" nodeType="mainSeq">
+                <p:childTnLst>
+                  <p:par>
+                    <p:cTn id="3" fill="hold">
+                      <p:stCondLst>
+                        <p:cond delay="indefinite"/>
+                      </p:stCondLst>
+                      <p:childTnLst>
+                        <p:par>
+                          <p:cTn id="4" fill="hold">
+                            <p:stCondLst>
+                              <p:cond delay="0"/>
+                            </p:stCondLst>
+                            <p:childTnLst>
+                              <p:par>
+                                <p:cTn id="5" presetID="5" presetClass="entr" presetSubtype="10" fill="hold" nodeType="clickEffect">
+                                  <p:stCondLst>
+                                    <p:cond delay="0"/>
+                                  </p:stCondLst>
+                                  <p:childTnLst>
+                                    <p:set>
+                                      <p:cBhvr>
+                                        <p:cTn id="6" dur="1" fill="hold">
+                                          <p:stCondLst>
+                                            <p:cond delay="0"/>
+                                          </p:stCondLst>
+                                        </p:cTn>
+                                        <p:tgtEl>
+                                          <p:spTgt spid="6"/>
+                                        </p:tgtEl>
+                                        <p:attrNameLst>
+                                          <p:attrName>style.visibility</p:attrName>
+                                        </p:attrNameLst>
+                                      </p:cBhvr>
+                                      <p:to>
+                                        <p:strVal val="visible"/>
+                                      </p:to>
+                                    </p:set>
+                                    <p:animEffect transition="in" filter="checkerboard(across)">
+                                      <p:cBhvr>
+                                        <p:cTn id="7" dur="500"/>
+                                        <p:tgtEl>
+                                          <p:spTgt spid="6"/>
+                                        </p:tgtEl>
+                                      </p:cBhvr>
+                                    </p:animEffect>
+                                  </p:childTnLst>
+                                </p:cTn>
+                              </p:par>
+                            </p:childTnLst>
+                          </p:cTn>
+                        </p:par>
+                      </p:childTnLst>
+                    </p:cTn>
+                  </p:par>
+                </p:childTnLst>
+              </p:cTn>
+              <p:prevCondLst>
+                <p:cond evt="onPrev" delay="0">
+                  <p:tgtEl>
+                    <p:sldTgt/>
+                  </p:tgtEl>
+                </p:cond>
+              </p:prevCondLst>
+              <p:nextCondLst>
+                <p:cond evt="onNext" delay="0">
+                  <p:tgtEl>
+                    <p:sldTgt/>
+                  </p:tgtEl>
+                </p:cond>
+              </p:nextCondLst>
+            </p:seq>
+          </p:childTnLst>
+        </p:cTn>
+      </p:par>
+    </p:tnLst>
+  </p:timing>
+</p:sld>
+</file>
+
 <file path=ppt/slides/slide5.xml><?xml version="1.0" encoding="utf-8"?>
 <p:sld xmlns:a="http://schemas.openxmlformats.org/drawingml/2006/main" xmlns:r="http://schemas.openxmlformats.org/officeDocument/2006/relationships" xmlns:p="http://schemas.openxmlformats.org/presentationml/2006/main">
   <p:cSld>
@@ -7797,11 +5544,98 @@
           <a:chExt cx="0" cy="0"/>
         </a:xfrm>
       </p:grpSpPr>
+      <p:sp>
+        <p:nvSpPr>
+          <p:cNvPr id="3" name="TextBox 2">
+            <a:extLst>
+              <a:ext uri="{FF2B5EF4-FFF2-40B4-BE49-F238E27FC236}">
+                <a16:creationId xmlns:a16="http://schemas.microsoft.com/office/drawing/2014/main" id="{E596F55D-F717-38B4-6C48-883676555D85}"/>
+              </a:ext>
+            </a:extLst>
+          </p:cNvPr>
+          <p:cNvSpPr txBox="1"/>
+          <p:nvPr/>
+        </p:nvSpPr>
+        <p:spPr>
+          <a:xfrm>
+            <a:off x="43841" y="93945"/>
+            <a:ext cx="4297395" cy="461665"/>
+          </a:xfrm>
+          <a:prstGeom prst="rect">
+            <a:avLst/>
+          </a:prstGeom>
+          <a:noFill/>
+        </p:spPr>
+        <p:txBody>
+          <a:bodyPr wrap="none" rtlCol="0">
+            <a:spAutoFit/>
+          </a:bodyPr>
+          <a:lstStyle/>
+          <a:p>
+            <a:r>
+              <a:rPr lang="ru-RU" sz="2400" dirty="0">
+                <a:latin typeface="Times New Roman" panose="02020603050405020304" pitchFamily="18" charset="0"/>
+                <a:cs typeface="Times New Roman" panose="02020603050405020304" pitchFamily="18" charset="0"/>
+              </a:rPr>
+              <a:t>Функциональные возможности</a:t>
+            </a:r>
+          </a:p>
+        </p:txBody>
+      </p:sp>
+      <p:sp>
+        <p:nvSpPr>
+          <p:cNvPr id="4" name="TextBox 3">
+            <a:extLst>
+              <a:ext uri="{FF2B5EF4-FFF2-40B4-BE49-F238E27FC236}">
+                <a16:creationId xmlns:a16="http://schemas.microsoft.com/office/drawing/2014/main" id="{E0E2BC37-8EA2-6F0E-8C06-29E937C41FC8}"/>
+              </a:ext>
+            </a:extLst>
+          </p:cNvPr>
+          <p:cNvSpPr txBox="1"/>
+          <p:nvPr/>
+        </p:nvSpPr>
+        <p:spPr>
+          <a:xfrm>
+            <a:off x="3346536" y="2413337"/>
+            <a:ext cx="5498927" cy="2031325"/>
+          </a:xfrm>
+          <a:prstGeom prst="rect">
+            <a:avLst/>
+          </a:prstGeom>
+          <a:noFill/>
+        </p:spPr>
+        <p:txBody>
+          <a:bodyPr wrap="square" rtlCol="0">
+            <a:spAutoFit/>
+          </a:bodyPr>
+          <a:lstStyle/>
+          <a:p>
+            <a:r>
+              <a:rPr lang="ru-RU" b="0" i="0" dirty="0">
+                <a:effectLst/>
+                <a:latin typeface="Times New Roman" panose="02020603050405020304" pitchFamily="18" charset="0"/>
+                <a:cs typeface="Times New Roman" panose="02020603050405020304" pitchFamily="18" charset="0"/>
+              </a:rPr>
+              <a:t>Приложение поддерживает классические правила русских шашек с обязательным боем и превращением в дамку. Доступны два режима: игра с ИИ и на одном устройстве. ИИ предлагает три уровня сложности. Подсветка ходов упрощает управление. Приложение автоматически определяет победителя и позволяет начать новую партию.</a:t>
+            </a:r>
+            <a:endParaRPr lang="ru-RU" dirty="0">
+              <a:latin typeface="Times New Roman" panose="02020603050405020304" pitchFamily="18" charset="0"/>
+              <a:cs typeface="Times New Roman" panose="02020603050405020304" pitchFamily="18" charset="0"/>
+            </a:endParaRPr>
+          </a:p>
+        </p:txBody>
+      </p:sp>
       <p:pic>
         <p:nvPicPr>
-          <p:cNvPr id="2" name="Рисунок 1"/>
+          <p:cNvPr id="4098" name="Picture 2">
+            <a:extLst>
+              <a:ext uri="{FF2B5EF4-FFF2-40B4-BE49-F238E27FC236}">
+                <a16:creationId xmlns:a16="http://schemas.microsoft.com/office/drawing/2014/main" id="{2F13E64A-DB47-C44F-EDBD-317978434CD8}"/>
+              </a:ext>
+            </a:extLst>
+          </p:cNvPr>
           <p:cNvPicPr>
-            <a:picLocks noChangeAspect="1"/>
+            <a:picLocks noChangeAspect="1" noChangeArrowheads="1"/>
           </p:cNvPicPr>
           <p:nvPr/>
         </p:nvPicPr>
@@ -7813,60 +5647,177 @@
               </a:ext>
             </a:extLst>
           </a:blip>
+          <a:srcRect/>
           <a:stretch>
             <a:fillRect/>
           </a:stretch>
         </p:blipFill>
-        <p:spPr>
+        <p:spPr bwMode="auto">
           <a:xfrm>
-            <a:off x="-765930" y="-1435100"/>
-            <a:ext cx="5859436" cy="5905500"/>
+            <a:off x="8355775" y="1841275"/>
+            <a:ext cx="3836225" cy="3444708"/>
           </a:xfrm>
           <a:prstGeom prst="rect">
             <a:avLst/>
           </a:prstGeom>
-        </p:spPr>
-      </p:pic>
-      <p:pic>
-        <p:nvPicPr>
-          <p:cNvPr id="3" name="Рисунок 2">
-            <a:extLst>
-              <a:ext uri="{FF2B5EF4-FFF2-40B4-BE49-F238E27FC236}">
-                <a16:creationId xmlns:a16="http://schemas.microsoft.com/office/drawing/2014/main" id="{63877AA5-A947-EC94-BC3E-6BCF01D84B25}"/>
-              </a:ext>
-            </a:extLst>
-          </p:cNvPr>
-          <p:cNvPicPr>
-            <a:picLocks noChangeAspect="1"/>
-          </p:cNvPicPr>
-          <p:nvPr/>
-        </p:nvPicPr>
-        <p:blipFill>
-          <a:blip r:embed="rId3"/>
-          <a:stretch>
-            <a:fillRect/>
-          </a:stretch>
-        </p:blipFill>
-        <p:spPr>
-          <a:xfrm>
-            <a:off x="5538007" y="459042"/>
-            <a:ext cx="3847294" cy="5939915"/>
-          </a:xfrm>
-          <a:prstGeom prst="rect">
-            <a:avLst/>
-          </a:prstGeom>
+          <a:noFill/>
+          <a:extLst>
+            <a:ext uri="{909E8E84-426E-40DD-AFC4-6F175D3DCCD1}">
+              <a14:hiddenFill xmlns:a14="http://schemas.microsoft.com/office/drawing/2010/main">
+                <a:solidFill>
+                  <a:srgbClr val="FFFFFF"/>
+                </a:solidFill>
+              </a14:hiddenFill>
+            </a:ext>
+          </a:extLst>
         </p:spPr>
       </p:pic>
     </p:spTree>
     <p:extLst>
       <p:ext uri="{BB962C8B-B14F-4D97-AF65-F5344CB8AC3E}">
-        <p14:creationId xmlns:p14="http://schemas.microsoft.com/office/powerpoint/2010/main" val="3231275356"/>
+        <p14:creationId xmlns:p14="http://schemas.microsoft.com/office/powerpoint/2010/main" val="3502808380"/>
       </p:ext>
     </p:extLst>
   </p:cSld>
   <p:clrMapOvr>
     <a:masterClrMapping/>
   </p:clrMapOvr>
+  <mc:AlternateContent xmlns:mc="http://schemas.openxmlformats.org/markup-compatibility/2006">
+    <mc:Choice xmlns:p15="http://schemas.microsoft.com/office/powerpoint/2012/main" Requires="p15">
+      <p:transition xmlns:p14="http://schemas.microsoft.com/office/powerpoint/2010/main" spd="slow" p14:dur="2000">
+        <p15:prstTrans prst="crush"/>
+      </p:transition>
+    </mc:Choice>
+    <mc:Fallback>
+      <p:transition spd="slow">
+        <p:fade/>
+      </p:transition>
+    </mc:Fallback>
+  </mc:AlternateContent>
+  <p:timing>
+    <p:tnLst>
+      <p:par>
+        <p:cTn id="1" dur="indefinite" restart="never" nodeType="tmRoot">
+          <p:childTnLst>
+            <p:seq concurrent="1" nextAc="seek">
+              <p:cTn id="2" dur="indefinite" nodeType="mainSeq">
+                <p:childTnLst>
+                  <p:par>
+                    <p:cTn id="3" fill="hold">
+                      <p:stCondLst>
+                        <p:cond delay="indefinite"/>
+                      </p:stCondLst>
+                      <p:childTnLst>
+                        <p:par>
+                          <p:cTn id="4" fill="hold">
+                            <p:stCondLst>
+                              <p:cond delay="0"/>
+                            </p:stCondLst>
+                            <p:childTnLst>
+                              <p:par>
+                                <p:cTn id="5" presetID="2" presetClass="entr" presetSubtype="4" fill="hold" grpId="0" nodeType="clickEffect">
+                                  <p:stCondLst>
+                                    <p:cond delay="0"/>
+                                  </p:stCondLst>
+                                  <p:childTnLst>
+                                    <p:set>
+                                      <p:cBhvr>
+                                        <p:cTn id="6" dur="1" fill="hold">
+                                          <p:stCondLst>
+                                            <p:cond delay="0"/>
+                                          </p:stCondLst>
+                                        </p:cTn>
+                                        <p:tgtEl>
+                                          <p:spTgt spid="4"/>
+                                        </p:tgtEl>
+                                        <p:attrNameLst>
+                                          <p:attrName>style.visibility</p:attrName>
+                                        </p:attrNameLst>
+                                      </p:cBhvr>
+                                      <p:to>
+                                        <p:strVal val="visible"/>
+                                      </p:to>
+                                    </p:set>
+                                    <p:anim calcmode="lin" valueType="num">
+                                      <p:cBhvr additive="base">
+                                        <p:cTn id="7" dur="500" fill="hold"/>
+                                        <p:tgtEl>
+                                          <p:spTgt spid="4"/>
+                                        </p:tgtEl>
+                                        <p:attrNameLst>
+                                          <p:attrName>ppt_x</p:attrName>
+                                        </p:attrNameLst>
+                                      </p:cBhvr>
+                                      <p:tavLst>
+                                        <p:tav tm="0">
+                                          <p:val>
+                                            <p:strVal val="#ppt_x"/>
+                                          </p:val>
+                                        </p:tav>
+                                        <p:tav tm="100000">
+                                          <p:val>
+                                            <p:strVal val="#ppt_x"/>
+                                          </p:val>
+                                        </p:tav>
+                                      </p:tavLst>
+                                    </p:anim>
+                                    <p:anim calcmode="lin" valueType="num">
+                                      <p:cBhvr additive="base">
+                                        <p:cTn id="8" dur="500" fill="hold"/>
+                                        <p:tgtEl>
+                                          <p:spTgt spid="4"/>
+                                        </p:tgtEl>
+                                        <p:attrNameLst>
+                                          <p:attrName>ppt_y</p:attrName>
+                                        </p:attrNameLst>
+                                      </p:cBhvr>
+                                      <p:tavLst>
+                                        <p:tav tm="0">
+                                          <p:val>
+                                            <p:strVal val="1+#ppt_h/2"/>
+                                          </p:val>
+                                        </p:tav>
+                                        <p:tav tm="100000">
+                                          <p:val>
+                                            <p:strVal val="#ppt_y"/>
+                                          </p:val>
+                                        </p:tav>
+                                      </p:tavLst>
+                                    </p:anim>
+                                  </p:childTnLst>
+                                </p:cTn>
+                              </p:par>
+                            </p:childTnLst>
+                          </p:cTn>
+                        </p:par>
+                      </p:childTnLst>
+                    </p:cTn>
+                  </p:par>
+                </p:childTnLst>
+              </p:cTn>
+              <p:prevCondLst>
+                <p:cond evt="onPrev" delay="0">
+                  <p:tgtEl>
+                    <p:sldTgt/>
+                  </p:tgtEl>
+                </p:cond>
+              </p:prevCondLst>
+              <p:nextCondLst>
+                <p:cond evt="onNext" delay="0">
+                  <p:tgtEl>
+                    <p:sldTgt/>
+                  </p:tgtEl>
+                </p:cond>
+              </p:nextCondLst>
+            </p:seq>
+          </p:childTnLst>
+        </p:cTn>
+      </p:par>
+    </p:tnLst>
+    <p:bldLst>
+      <p:bldP spid="4" grpId="0"/>
+    </p:bldLst>
+  </p:timing>
 </p:sld>
 </file>
 
@@ -7887,11 +5838,114 @@
           <a:chExt cx="0" cy="0"/>
         </a:xfrm>
       </p:grpSpPr>
+      <p:sp>
+        <p:nvSpPr>
+          <p:cNvPr id="3" name="TextBox 2">
+            <a:extLst>
+              <a:ext uri="{FF2B5EF4-FFF2-40B4-BE49-F238E27FC236}">
+                <a16:creationId xmlns:a16="http://schemas.microsoft.com/office/drawing/2014/main" id="{2989172B-59D1-8386-9982-4B575CAAD303}"/>
+              </a:ext>
+            </a:extLst>
+          </p:cNvPr>
+          <p:cNvSpPr txBox="1"/>
+          <p:nvPr/>
+        </p:nvSpPr>
+        <p:spPr>
+          <a:xfrm>
+            <a:off x="0" y="0"/>
+            <a:ext cx="4046108" cy="461665"/>
+          </a:xfrm>
+          <a:prstGeom prst="rect">
+            <a:avLst/>
+          </a:prstGeom>
+          <a:noFill/>
+        </p:spPr>
+        <p:txBody>
+          <a:bodyPr wrap="none" rtlCol="0">
+            <a:spAutoFit/>
+          </a:bodyPr>
+          <a:lstStyle/>
+          <a:p>
+            <a:r>
+              <a:rPr lang="ru-RU" sz="2400" dirty="0">
+                <a:latin typeface="Times New Roman" panose="02020603050405020304" pitchFamily="18" charset="0"/>
+                <a:cs typeface="Times New Roman" panose="02020603050405020304" pitchFamily="18" charset="0"/>
+              </a:rPr>
+              <a:t>Пользовательский интерфейс</a:t>
+            </a:r>
+          </a:p>
+        </p:txBody>
+      </p:sp>
+      <p:sp>
+        <p:nvSpPr>
+          <p:cNvPr id="4" name="TextBox 3">
+            <a:extLst>
+              <a:ext uri="{FF2B5EF4-FFF2-40B4-BE49-F238E27FC236}">
+                <a16:creationId xmlns:a16="http://schemas.microsoft.com/office/drawing/2014/main" id="{D631F886-2E73-89D6-65CC-84EAB1358A83}"/>
+              </a:ext>
+            </a:extLst>
+          </p:cNvPr>
+          <p:cNvSpPr txBox="1"/>
+          <p:nvPr/>
+        </p:nvSpPr>
+        <p:spPr>
+          <a:xfrm>
+            <a:off x="2726499" y="2690336"/>
+            <a:ext cx="6739002" cy="1477328"/>
+          </a:xfrm>
+          <a:prstGeom prst="rect">
+            <a:avLst/>
+          </a:prstGeom>
+          <a:noFill/>
+        </p:spPr>
+        <p:txBody>
+          <a:bodyPr wrap="square" rtlCol="0">
+            <a:spAutoFit/>
+          </a:bodyPr>
+          <a:lstStyle/>
+          <a:p>
+            <a:r>
+              <a:rPr lang="ru-RU" b="0" i="0" dirty="0">
+                <a:effectLst/>
+                <a:latin typeface="Times New Roman" panose="02020603050405020304" pitchFamily="18" charset="0"/>
+                <a:cs typeface="Times New Roman" panose="02020603050405020304" pitchFamily="18" charset="0"/>
+              </a:rPr>
+              <a:t>Интерфейс соответствует стандартам </a:t>
+            </a:r>
+            <a:r>
+              <a:rPr lang="en" b="0" i="0" dirty="0">
+                <a:effectLst/>
+                <a:latin typeface="Times New Roman" panose="02020603050405020304" pitchFamily="18" charset="0"/>
+                <a:cs typeface="Times New Roman" panose="02020603050405020304" pitchFamily="18" charset="0"/>
+              </a:rPr>
+              <a:t>Material Design 3. </a:t>
+            </a:r>
+            <a:r>
+              <a:rPr lang="ru-RU" b="0" i="0" dirty="0">
+                <a:effectLst/>
+                <a:latin typeface="Times New Roman" panose="02020603050405020304" pitchFamily="18" charset="0"/>
+                <a:cs typeface="Times New Roman" panose="02020603050405020304" pitchFamily="18" charset="0"/>
+              </a:rPr>
+              <a:t>Игровая доска 8×8 клеток с классической расцветкой. Над полем отображается текущий игрок, под полем — кнопка «Новая игра». Интерфейс адаптируется под разные размеры экранов и ориентации устройства.</a:t>
+            </a:r>
+            <a:endParaRPr lang="ru-RU" dirty="0">
+              <a:latin typeface="Times New Roman" panose="02020603050405020304" pitchFamily="18" charset="0"/>
+              <a:cs typeface="Times New Roman" panose="02020603050405020304" pitchFamily="18" charset="0"/>
+            </a:endParaRPr>
+          </a:p>
+        </p:txBody>
+      </p:sp>
       <p:pic>
         <p:nvPicPr>
-          <p:cNvPr id="7" name="Рисунок 6"/>
+          <p:cNvPr id="5122" name="Picture 2">
+            <a:extLst>
+              <a:ext uri="{FF2B5EF4-FFF2-40B4-BE49-F238E27FC236}">
+                <a16:creationId xmlns:a16="http://schemas.microsoft.com/office/drawing/2014/main" id="{70EA965F-79E5-C26D-AA5F-6901D8A8B868}"/>
+              </a:ext>
+            </a:extLst>
+          </p:cNvPr>
           <p:cNvPicPr>
-            <a:picLocks noChangeAspect="1"/>
+            <a:picLocks noChangeAspect="1" noChangeArrowheads="1"/>
           </p:cNvPicPr>
           <p:nvPr/>
         </p:nvPicPr>
@@ -7903,60 +5957,139 @@
               </a:ext>
             </a:extLst>
           </a:blip>
+          <a:srcRect/>
           <a:stretch>
             <a:fillRect/>
           </a:stretch>
         </p:blipFill>
-        <p:spPr>
+        <p:spPr bwMode="auto">
           <a:xfrm>
-            <a:off x="-765930" y="-1435100"/>
-            <a:ext cx="5859436" cy="5905500"/>
+            <a:off x="8844768" y="3532340"/>
+            <a:ext cx="3085230" cy="3085230"/>
           </a:xfrm>
           <a:prstGeom prst="rect">
             <a:avLst/>
           </a:prstGeom>
-        </p:spPr>
-      </p:pic>
-      <p:pic>
-        <p:nvPicPr>
-          <p:cNvPr id="2" name="Рисунок 1">
-            <a:extLst>
-              <a:ext uri="{FF2B5EF4-FFF2-40B4-BE49-F238E27FC236}">
-                <a16:creationId xmlns:a16="http://schemas.microsoft.com/office/drawing/2014/main" id="{A0082BA5-069B-C9EC-5FB9-DA97A07EA231}"/>
-              </a:ext>
-            </a:extLst>
-          </p:cNvPr>
-          <p:cNvPicPr>
-            <a:picLocks noChangeAspect="1"/>
-          </p:cNvPicPr>
-          <p:nvPr/>
-        </p:nvPicPr>
-        <p:blipFill>
-          <a:blip r:embed="rId3"/>
-          <a:stretch>
-            <a:fillRect/>
-          </a:stretch>
-        </p:blipFill>
-        <p:spPr>
-          <a:xfrm>
-            <a:off x="5880735" y="410494"/>
-            <a:ext cx="3352166" cy="6037011"/>
-          </a:xfrm>
-          <a:prstGeom prst="rect">
-            <a:avLst/>
-          </a:prstGeom>
+          <a:noFill/>
+          <a:extLst>
+            <a:ext uri="{909E8E84-426E-40DD-AFC4-6F175D3DCCD1}">
+              <a14:hiddenFill xmlns:a14="http://schemas.microsoft.com/office/drawing/2010/main">
+                <a:solidFill>
+                  <a:srgbClr val="FFFFFF"/>
+                </a:solidFill>
+              </a14:hiddenFill>
+            </a:ext>
+          </a:extLst>
         </p:spPr>
       </p:pic>
     </p:spTree>
     <p:extLst>
       <p:ext uri="{BB962C8B-B14F-4D97-AF65-F5344CB8AC3E}">
-        <p14:creationId xmlns:p14="http://schemas.microsoft.com/office/powerpoint/2010/main" val="3502808380"/>
+        <p14:creationId xmlns:p14="http://schemas.microsoft.com/office/powerpoint/2010/main" val="1767357638"/>
       </p:ext>
     </p:extLst>
   </p:cSld>
   <p:clrMapOvr>
     <a:masterClrMapping/>
   </p:clrMapOvr>
+  <mc:AlternateContent xmlns:mc="http://schemas.openxmlformats.org/markup-compatibility/2006">
+    <mc:Choice xmlns:p15="http://schemas.microsoft.com/office/powerpoint/2012/main" Requires="p15">
+      <p:transition xmlns:p14="http://schemas.microsoft.com/office/powerpoint/2010/main" spd="slow" p14:dur="2000">
+        <p15:prstTrans prst="drape"/>
+      </p:transition>
+    </mc:Choice>
+    <mc:Fallback>
+      <p:transition spd="slow">
+        <p:fade/>
+      </p:transition>
+    </mc:Fallback>
+  </mc:AlternateContent>
+  <p:timing>
+    <p:tnLst>
+      <p:par>
+        <p:cTn id="1" dur="indefinite" restart="never" nodeType="tmRoot">
+          <p:childTnLst>
+            <p:seq concurrent="1" nextAc="seek">
+              <p:cTn id="2" dur="indefinite" nodeType="mainSeq">
+                <p:childTnLst>
+                  <p:par>
+                    <p:cTn id="3" fill="hold">
+                      <p:stCondLst>
+                        <p:cond delay="indefinite"/>
+                      </p:stCondLst>
+                      <p:childTnLst>
+                        <p:par>
+                          <p:cTn id="4" fill="hold">
+                            <p:stCondLst>
+                              <p:cond delay="0"/>
+                            </p:stCondLst>
+                            <p:childTnLst>
+                              <p:par>
+                                <p:cTn id="5" presetID="9" presetClass="entr" presetSubtype="0" fill="hold" grpId="0" nodeType="clickEffect">
+                                  <p:stCondLst>
+                                    <p:cond delay="0"/>
+                                  </p:stCondLst>
+                                  <p:childTnLst>
+                                    <p:set>
+                                      <p:cBhvr>
+                                        <p:cTn id="6" dur="1" fill="hold">
+                                          <p:stCondLst>
+                                            <p:cond delay="0"/>
+                                          </p:stCondLst>
+                                        </p:cTn>
+                                        <p:tgtEl>
+                                          <p:spTgt spid="4"/>
+                                        </p:tgtEl>
+                                        <p:attrNameLst>
+                                          <p:attrName>style.visibility</p:attrName>
+                                        </p:attrNameLst>
+                                      </p:cBhvr>
+                                      <p:to>
+                                        <p:strVal val="visible"/>
+                                      </p:to>
+                                    </p:set>
+                                    <p:animEffect transition="in" filter="dissolve">
+                                      <p:cBhvr>
+                                        <p:cTn id="7" dur="500"/>
+                                        <p:tgtEl>
+                                          <p:spTgt spid="4"/>
+                                        </p:tgtEl>
+                                      </p:cBhvr>
+                                    </p:animEffect>
+                                  </p:childTnLst>
+                                </p:cTn>
+                              </p:par>
+                            </p:childTnLst>
+                          </p:cTn>
+                        </p:par>
+                      </p:childTnLst>
+                    </p:cTn>
+                  </p:par>
+                </p:childTnLst>
+              </p:cTn>
+              <p:prevCondLst>
+                <p:cond evt="onPrev" delay="0">
+                  <p:tgtEl>
+                    <p:sldTgt/>
+                  </p:tgtEl>
+                </p:cond>
+              </p:prevCondLst>
+              <p:nextCondLst>
+                <p:cond evt="onNext" delay="0">
+                  <p:tgtEl>
+                    <p:sldTgt/>
+                  </p:tgtEl>
+                </p:cond>
+              </p:nextCondLst>
+            </p:seq>
+          </p:childTnLst>
+        </p:cTn>
+      </p:par>
+    </p:tnLst>
+    <p:bldLst>
+      <p:bldP spid="4" grpId="0"/>
+    </p:bldLst>
+  </p:timing>
 </p:sld>
 </file>
 
@@ -7977,16 +6110,82 @@
           <a:chExt cx="0" cy="0"/>
         </a:xfrm>
       </p:grpSpPr>
+      <p:sp>
+        <p:nvSpPr>
+          <p:cNvPr id="6" name="Прямоугольник 5"/>
+          <p:cNvSpPr/>
+          <p:nvPr/>
+        </p:nvSpPr>
+        <p:spPr>
+          <a:xfrm>
+            <a:off x="112164" y="1777894"/>
+            <a:ext cx="3860800" cy="1754326"/>
+          </a:xfrm>
+          <a:prstGeom prst="rect">
+            <a:avLst/>
+          </a:prstGeom>
+        </p:spPr>
+        <p:txBody>
+          <a:bodyPr wrap="square">
+            <a:spAutoFit/>
+          </a:bodyPr>
+          <a:lstStyle/>
+          <a:p>
+            <a:pPr algn="ctr"/>
+            <a:r>
+              <a:rPr lang="ru-RU" sz="3600" dirty="0">
+                <a:solidFill>
+                  <a:schemeClr val="tx1">
+                    <a:lumMod val="95000"/>
+                    <a:lumOff val="5000"/>
+                  </a:schemeClr>
+                </a:solidFill>
+                <a:latin typeface="Arial Black" panose="020B0A04020102020204" pitchFamily="34" charset="0"/>
+              </a:rPr>
+              <a:t>Как выглядит приложение</a:t>
+            </a:r>
+            <a:br>
+              <a:rPr lang="ru-RU" sz="3600" dirty="0">
+                <a:solidFill>
+                  <a:schemeClr val="tx1">
+                    <a:lumMod val="95000"/>
+                    <a:lumOff val="5000"/>
+                  </a:schemeClr>
+                </a:solidFill>
+                <a:latin typeface="Arial Black" panose="020B0A04020102020204" pitchFamily="34" charset="0"/>
+              </a:rPr>
+            </a:br>
+            <a:r>
+              <a:rPr lang="ru-RU" sz="3600" dirty="0">
+                <a:solidFill>
+                  <a:schemeClr val="tx1">
+                    <a:lumMod val="95000"/>
+                    <a:lumOff val="5000"/>
+                  </a:schemeClr>
+                </a:solidFill>
+                <a:latin typeface="Arial Black" panose="020B0A04020102020204" pitchFamily="34" charset="0"/>
+              </a:rPr>
+              <a:t>На телефоне</a:t>
+            </a:r>
+          </a:p>
+        </p:txBody>
+      </p:sp>
       <p:pic>
         <p:nvPicPr>
-          <p:cNvPr id="7" name="Рисунок 6"/>
+          <p:cNvPr id="2" name="Рисунок 1">
+            <a:extLst>
+              <a:ext uri="{FF2B5EF4-FFF2-40B4-BE49-F238E27FC236}">
+                <a16:creationId xmlns:a16="http://schemas.microsoft.com/office/drawing/2014/main" id="{8203903C-B3F4-0C85-1232-F201E386A4D6}"/>
+              </a:ext>
+            </a:extLst>
+          </p:cNvPr>
           <p:cNvPicPr>
             <a:picLocks noChangeAspect="1"/>
           </p:cNvPicPr>
           <p:nvPr/>
         </p:nvPicPr>
         <p:blipFill>
-          <a:blip r:embed="rId2">
+          <a:blip r:embed="rId3">
             <a:extLst>
               <a:ext uri="{28A0092B-C50C-407E-A947-70E740481C1C}">
                 <a14:useLocalDpi xmlns:a14="http://schemas.microsoft.com/office/drawing/2010/main" val="0"/>
@@ -7999,54 +6198,154 @@
         </p:blipFill>
         <p:spPr>
           <a:xfrm>
-            <a:off x="-765930" y="-1435100"/>
-            <a:ext cx="5859436" cy="5905500"/>
+            <a:off x="7118221" y="457563"/>
+            <a:ext cx="3341749" cy="6149314"/>
           </a:xfrm>
           <a:prstGeom prst="rect">
             <a:avLst/>
           </a:prstGeom>
         </p:spPr>
       </p:pic>
-      <p:pic>
-        <p:nvPicPr>
-          <p:cNvPr id="2" name="Рисунок 1">
-            <a:extLst>
-              <a:ext uri="{FF2B5EF4-FFF2-40B4-BE49-F238E27FC236}">
-                <a16:creationId xmlns:a16="http://schemas.microsoft.com/office/drawing/2014/main" id="{541A0B20-FA94-4B79-1360-A6327DBC0EB1}"/>
-              </a:ext>
-            </a:extLst>
-          </p:cNvPr>
-          <p:cNvPicPr>
-            <a:picLocks noChangeAspect="1"/>
-          </p:cNvPicPr>
+      <p:sp>
+        <p:nvSpPr>
+          <p:cNvPr id="3" name="TextBox 2">
+            <a:extLst>
+              <a:ext uri="{FF2B5EF4-FFF2-40B4-BE49-F238E27FC236}">
+                <a16:creationId xmlns:a16="http://schemas.microsoft.com/office/drawing/2014/main" id="{7EBED416-8167-AC2B-597F-79C965D264AB}"/>
+              </a:ext>
+            </a:extLst>
+          </p:cNvPr>
+          <p:cNvSpPr txBox="1"/>
           <p:nvPr/>
-        </p:nvPicPr>
-        <p:blipFill>
-          <a:blip r:embed="rId3"/>
-          <a:stretch>
-            <a:fillRect/>
-          </a:stretch>
-        </p:blipFill>
+        </p:nvSpPr>
         <p:spPr>
           <a:xfrm>
-            <a:off x="6096000" y="203199"/>
-            <a:ext cx="3321368" cy="6246495"/>
+            <a:off x="275573" y="3532220"/>
+            <a:ext cx="4761368" cy="369332"/>
           </a:xfrm>
           <a:prstGeom prst="rect">
             <a:avLst/>
           </a:prstGeom>
+          <a:noFill/>
         </p:spPr>
-      </p:pic>
+        <p:txBody>
+          <a:bodyPr wrap="none" rtlCol="0">
+            <a:spAutoFit/>
+          </a:bodyPr>
+          <a:lstStyle/>
+          <a:p>
+            <a:r>
+              <a:rPr lang="ru-RU" dirty="0"/>
+              <a:t>(Получилось один в один как и задумывалось)</a:t>
+            </a:r>
+          </a:p>
+        </p:txBody>
+      </p:sp>
     </p:spTree>
     <p:extLst>
       <p:ext uri="{BB962C8B-B14F-4D97-AF65-F5344CB8AC3E}">
-        <p14:creationId xmlns:p14="http://schemas.microsoft.com/office/powerpoint/2010/main" val="1767357638"/>
+        <p14:creationId xmlns:p14="http://schemas.microsoft.com/office/powerpoint/2010/main" val="3971046786"/>
       </p:ext>
     </p:extLst>
   </p:cSld>
   <p:clrMapOvr>
     <a:masterClrMapping/>
   </p:clrMapOvr>
+  <mc:AlternateContent xmlns:mc="http://schemas.openxmlformats.org/markup-compatibility/2006">
+    <mc:Choice xmlns:p15="http://schemas.microsoft.com/office/powerpoint/2012/main" Requires="p15">
+      <p:transition xmlns:p14="http://schemas.microsoft.com/office/powerpoint/2010/main" spd="slow" p14:dur="2000">
+        <p15:prstTrans prst="fracture"/>
+      </p:transition>
+    </mc:Choice>
+    <mc:Fallback>
+      <p:transition spd="slow">
+        <p:fade/>
+      </p:transition>
+    </mc:Fallback>
+  </mc:AlternateContent>
+  <p:timing>
+    <p:tnLst>
+      <p:par>
+        <p:cTn id="1" dur="indefinite" restart="never" nodeType="tmRoot">
+          <p:childTnLst>
+            <p:seq concurrent="1" nextAc="seek">
+              <p:cTn id="2" dur="indefinite" nodeType="mainSeq">
+                <p:childTnLst>
+                  <p:par>
+                    <p:cTn id="3" fill="hold">
+                      <p:stCondLst>
+                        <p:cond delay="indefinite"/>
+                      </p:stCondLst>
+                      <p:childTnLst>
+                        <p:par>
+                          <p:cTn id="4" fill="hold">
+                            <p:stCondLst>
+                              <p:cond delay="0"/>
+                            </p:stCondLst>
+                            <p:childTnLst>
+                              <p:par>
+                                <p:cTn id="5" presetID="18" presetClass="entr" presetSubtype="12" fill="hold" nodeType="clickEffect">
+                                  <p:stCondLst>
+                                    <p:cond delay="0"/>
+                                  </p:stCondLst>
+                                  <p:childTnLst>
+                                    <p:set>
+                                      <p:cBhvr>
+                                        <p:cTn id="6" dur="1" fill="hold">
+                                          <p:stCondLst>
+                                            <p:cond delay="0"/>
+                                          </p:stCondLst>
+                                        </p:cTn>
+                                        <p:tgtEl>
+                                          <p:spTgt spid="2"/>
+                                        </p:tgtEl>
+                                        <p:attrNameLst>
+                                          <p:attrName>style.visibility</p:attrName>
+                                        </p:attrNameLst>
+                                      </p:cBhvr>
+                                      <p:to>
+                                        <p:strVal val="visible"/>
+                                      </p:to>
+                                    </p:set>
+                                    <p:animEffect transition="in" filter="strips(downLeft)">
+                                      <p:cBhvr>
+                                        <p:cTn id="7" dur="500"/>
+                                        <p:tgtEl>
+                                          <p:spTgt spid="2"/>
+                                        </p:tgtEl>
+                                      </p:cBhvr>
+                                    </p:animEffect>
+                                  </p:childTnLst>
+                                </p:cTn>
+                              </p:par>
+                            </p:childTnLst>
+                          </p:cTn>
+                        </p:par>
+                      </p:childTnLst>
+                    </p:cTn>
+                  </p:par>
+                </p:childTnLst>
+              </p:cTn>
+              <p:prevCondLst>
+                <p:cond evt="onPrev" delay="0">
+                  <p:tgtEl>
+                    <p:sldTgt/>
+                  </p:tgtEl>
+                </p:cond>
+              </p:prevCondLst>
+              <p:nextCondLst>
+                <p:cond evt="onNext" delay="0">
+                  <p:tgtEl>
+                    <p:sldTgt/>
+                  </p:tgtEl>
+                </p:cond>
+              </p:nextCondLst>
+            </p:seq>
+          </p:childTnLst>
+        </p:cTn>
+      </p:par>
+    </p:tnLst>
+  </p:timing>
 </p:sld>
 </file>
 
@@ -8067,72 +6366,12 @@
           <a:chExt cx="0" cy="0"/>
         </a:xfrm>
       </p:grpSpPr>
-      <p:sp>
-        <p:nvSpPr>
-          <p:cNvPr id="6" name="Прямоугольник 5"/>
-          <p:cNvSpPr/>
-          <p:nvPr/>
-        </p:nvSpPr>
-        <p:spPr>
-          <a:xfrm>
-            <a:off x="112164" y="1777894"/>
-            <a:ext cx="3860800" cy="1754326"/>
-          </a:xfrm>
-          <a:prstGeom prst="rect">
-            <a:avLst/>
-          </a:prstGeom>
-        </p:spPr>
-        <p:txBody>
-          <a:bodyPr wrap="square">
-            <a:spAutoFit/>
-          </a:bodyPr>
-          <a:lstStyle/>
-          <a:p>
-            <a:pPr algn="ctr"/>
-            <a:r>
-              <a:rPr lang="ru-RU" sz="3600" dirty="0">
-                <a:solidFill>
-                  <a:schemeClr val="tx1">
-                    <a:lumMod val="95000"/>
-                    <a:lumOff val="5000"/>
-                  </a:schemeClr>
-                </a:solidFill>
-                <a:latin typeface="Arial Black" panose="020B0A04020102020204" pitchFamily="34" charset="0"/>
-              </a:rPr>
-              <a:t>Как выглядит приложение</a:t>
-            </a:r>
-            <a:br>
-              <a:rPr lang="ru-RU" sz="3600" dirty="0">
-                <a:solidFill>
-                  <a:schemeClr val="tx1">
-                    <a:lumMod val="95000"/>
-                    <a:lumOff val="5000"/>
-                  </a:schemeClr>
-                </a:solidFill>
-                <a:latin typeface="Arial Black" panose="020B0A04020102020204" pitchFamily="34" charset="0"/>
-              </a:rPr>
-            </a:br>
-            <a:r>
-              <a:rPr lang="ru-RU" sz="3600" dirty="0">
-                <a:solidFill>
-                  <a:schemeClr val="tx1">
-                    <a:lumMod val="95000"/>
-                    <a:lumOff val="5000"/>
-                  </a:schemeClr>
-                </a:solidFill>
-                <a:latin typeface="Arial Black" panose="020B0A04020102020204" pitchFamily="34" charset="0"/>
-              </a:rPr>
-              <a:t>На телефоне</a:t>
-            </a:r>
-          </a:p>
-        </p:txBody>
-      </p:sp>
       <p:pic>
         <p:nvPicPr>
-          <p:cNvPr id="2050" name="Picture 2">
-            <a:extLst>
-              <a:ext uri="{FF2B5EF4-FFF2-40B4-BE49-F238E27FC236}">
-                <a16:creationId xmlns:a16="http://schemas.microsoft.com/office/drawing/2014/main" id="{C86D1953-D6BA-6479-3BF1-FA233CB946EA}"/>
+          <p:cNvPr id="6146" name="Picture 2">
+            <a:extLst>
+              <a:ext uri="{FF2B5EF4-FFF2-40B4-BE49-F238E27FC236}">
+                <a16:creationId xmlns:a16="http://schemas.microsoft.com/office/drawing/2014/main" id="{A4B98658-88FE-8329-DBB5-8C3816CB48C9}"/>
               </a:ext>
             </a:extLst>
           </p:cNvPr>
@@ -8142,7 +6381,7 @@
           <p:nvPr/>
         </p:nvPicPr>
         <p:blipFill>
-          <a:blip r:embed="rId3" cstate="print">
+          <a:blip r:embed="rId2">
             <a:extLst>
               <a:ext uri="{28A0092B-C50C-407E-A947-70E740481C1C}">
                 <a14:useLocalDpi xmlns:a14="http://schemas.microsoft.com/office/drawing/2010/main" val="0"/>
@@ -8156,8 +6395,8 @@
         </p:blipFill>
         <p:spPr bwMode="auto">
           <a:xfrm>
-            <a:off x="6202363" y="387350"/>
-            <a:ext cx="3449637" cy="6083300"/>
+            <a:off x="0" y="0"/>
+            <a:ext cx="12192000" cy="6858000"/>
           </a:xfrm>
           <a:prstGeom prst="rect">
             <a:avLst/>
@@ -8174,16 +6413,296 @@
           </a:extLst>
         </p:spPr>
       </p:pic>
+      <p:sp>
+        <p:nvSpPr>
+          <p:cNvPr id="5" name="Прямоугольник 4"/>
+          <p:cNvSpPr/>
+          <p:nvPr/>
+        </p:nvSpPr>
+        <p:spPr>
+          <a:xfrm>
+            <a:off x="70543" y="5154276"/>
+            <a:ext cx="5029200" cy="1754326"/>
+          </a:xfrm>
+          <a:prstGeom prst="rect">
+            <a:avLst/>
+          </a:prstGeom>
+        </p:spPr>
+        <p:txBody>
+          <a:bodyPr wrap="square">
+            <a:spAutoFit/>
+          </a:bodyPr>
+          <a:lstStyle/>
+          <a:p>
+            <a:pPr algn="l"/>
+            <a:r>
+              <a:rPr lang="ru-RU" b="0" i="0" dirty="0">
+                <a:solidFill>
+                  <a:schemeClr val="bg1"/>
+                </a:solidFill>
+                <a:effectLst/>
+                <a:latin typeface="Times New Roman" panose="02020603050405020304" pitchFamily="18" charset="0"/>
+                <a:cs typeface="Times New Roman" panose="02020603050405020304" pitchFamily="18" charset="0"/>
+              </a:rPr>
+              <a:t>Разработано полнофункциональное приложение «Шашки» для </a:t>
+            </a:r>
+            <a:r>
+              <a:rPr lang="en" b="0" i="0" dirty="0">
+                <a:solidFill>
+                  <a:schemeClr val="bg1"/>
+                </a:solidFill>
+                <a:effectLst/>
+                <a:latin typeface="Times New Roman" panose="02020603050405020304" pitchFamily="18" charset="0"/>
+                <a:cs typeface="Times New Roman" panose="02020603050405020304" pitchFamily="18" charset="0"/>
+              </a:rPr>
+              <a:t>Android. </a:t>
+            </a:r>
+            <a:r>
+              <a:rPr lang="ru-RU" b="0" i="0" dirty="0">
+                <a:solidFill>
+                  <a:schemeClr val="bg1"/>
+                </a:solidFill>
+                <a:effectLst/>
+                <a:latin typeface="Times New Roman" panose="02020603050405020304" pitchFamily="18" charset="0"/>
+                <a:cs typeface="Times New Roman" panose="02020603050405020304" pitchFamily="18" charset="0"/>
+              </a:rPr>
+              <a:t>Реализованы все классические правила игры, современный интерфейс и ИИ с тремя уровнями сложности.</a:t>
+            </a:r>
+          </a:p>
+          <a:p>
+            <a:pPr algn="l"/>
+            <a:r>
+              <a:rPr lang="ru-RU" b="0" i="0" dirty="0">
+                <a:solidFill>
+                  <a:schemeClr val="bg1"/>
+                </a:solidFill>
+                <a:effectLst/>
+                <a:latin typeface="Times New Roman" panose="02020603050405020304" pitchFamily="18" charset="0"/>
+                <a:cs typeface="Times New Roman" panose="02020603050405020304" pitchFamily="18" charset="0"/>
+              </a:rPr>
+              <a:t>Приложение успешно протестировано и готово к использованию. </a:t>
+            </a:r>
+          </a:p>
+        </p:txBody>
+      </p:sp>
+      <p:sp>
+        <p:nvSpPr>
+          <p:cNvPr id="3" name="TextBox 2">
+            <a:extLst>
+              <a:ext uri="{FF2B5EF4-FFF2-40B4-BE49-F238E27FC236}">
+                <a16:creationId xmlns:a16="http://schemas.microsoft.com/office/drawing/2014/main" id="{CE42A5FA-3B5D-6286-A4B1-99A898A0CC2D}"/>
+              </a:ext>
+            </a:extLst>
+          </p:cNvPr>
+          <p:cNvSpPr txBox="1"/>
+          <p:nvPr/>
+        </p:nvSpPr>
+        <p:spPr>
+          <a:xfrm>
+            <a:off x="183278" y="183514"/>
+            <a:ext cx="1753493" cy="461665"/>
+          </a:xfrm>
+          <a:prstGeom prst="rect">
+            <a:avLst/>
+          </a:prstGeom>
+          <a:noFill/>
+        </p:spPr>
+        <p:txBody>
+          <a:bodyPr wrap="none" rtlCol="0">
+            <a:spAutoFit/>
+          </a:bodyPr>
+          <a:lstStyle/>
+          <a:p>
+            <a:r>
+              <a:rPr lang="ru-RU" sz="2400" dirty="0">
+                <a:solidFill>
+                  <a:schemeClr val="bg1"/>
+                </a:solidFill>
+                <a:latin typeface="Times New Roman" panose="02020603050405020304" pitchFamily="18" charset="0"/>
+                <a:cs typeface="Times New Roman" panose="02020603050405020304" pitchFamily="18" charset="0"/>
+              </a:rPr>
+              <a:t>Заключение</a:t>
+            </a:r>
+          </a:p>
+        </p:txBody>
+      </p:sp>
     </p:spTree>
     <p:extLst>
       <p:ext uri="{BB962C8B-B14F-4D97-AF65-F5344CB8AC3E}">
-        <p14:creationId xmlns:p14="http://schemas.microsoft.com/office/powerpoint/2010/main" val="3971046786"/>
+        <p14:creationId xmlns:p14="http://schemas.microsoft.com/office/powerpoint/2010/main" val="1272637628"/>
       </p:ext>
     </p:extLst>
   </p:cSld>
   <p:clrMapOvr>
     <a:masterClrMapping/>
   </p:clrMapOvr>
+  <mc:AlternateContent xmlns:mc="http://schemas.openxmlformats.org/markup-compatibility/2006">
+    <mc:Choice xmlns:p14="http://schemas.microsoft.com/office/powerpoint/2010/main" Requires="p14">
+      <p:transition spd="slow" p14:dur="1400">
+        <p14:doors dir="vert"/>
+      </p:transition>
+    </mc:Choice>
+    <mc:Fallback>
+      <p:transition spd="slow">
+        <p:fade/>
+      </p:transition>
+    </mc:Fallback>
+  </mc:AlternateContent>
+  <p:timing>
+    <p:tnLst>
+      <p:par>
+        <p:cTn id="1" dur="indefinite" restart="never" nodeType="tmRoot">
+          <p:childTnLst>
+            <p:seq concurrent="1" nextAc="seek">
+              <p:cTn id="2" dur="indefinite" nodeType="mainSeq">
+                <p:childTnLst>
+                  <p:par>
+                    <p:cTn id="3" fill="hold">
+                      <p:stCondLst>
+                        <p:cond delay="indefinite"/>
+                      </p:stCondLst>
+                      <p:childTnLst>
+                        <p:par>
+                          <p:cTn id="4" fill="hold">
+                            <p:stCondLst>
+                              <p:cond delay="0"/>
+                            </p:stCondLst>
+                            <p:childTnLst>
+                              <p:par>
+                                <p:cTn id="5" presetID="31" presetClass="entr" presetSubtype="0" fill="hold" grpId="0" nodeType="clickEffect">
+                                  <p:stCondLst>
+                                    <p:cond delay="0"/>
+                                  </p:stCondLst>
+                                  <p:childTnLst>
+                                    <p:set>
+                                      <p:cBhvr>
+                                        <p:cTn id="6" dur="1" fill="hold">
+                                          <p:stCondLst>
+                                            <p:cond delay="0"/>
+                                          </p:stCondLst>
+                                        </p:cTn>
+                                        <p:tgtEl>
+                                          <p:spTgt spid="5"/>
+                                        </p:tgtEl>
+                                        <p:attrNameLst>
+                                          <p:attrName>style.visibility</p:attrName>
+                                        </p:attrNameLst>
+                                      </p:cBhvr>
+                                      <p:to>
+                                        <p:strVal val="visible"/>
+                                      </p:to>
+                                    </p:set>
+                                    <p:anim calcmode="lin" valueType="num">
+                                      <p:cBhvr>
+                                        <p:cTn id="7" dur="1000" fill="hold"/>
+                                        <p:tgtEl>
+                                          <p:spTgt spid="5"/>
+                                        </p:tgtEl>
+                                        <p:attrNameLst>
+                                          <p:attrName>ppt_w</p:attrName>
+                                        </p:attrNameLst>
+                                      </p:cBhvr>
+                                      <p:tavLst>
+                                        <p:tav tm="0">
+                                          <p:val>
+                                            <p:fltVal val="0"/>
+                                          </p:val>
+                                        </p:tav>
+                                        <p:tav tm="100000">
+                                          <p:val>
+                                            <p:strVal val="#ppt_w"/>
+                                          </p:val>
+                                        </p:tav>
+                                      </p:tavLst>
+                                    </p:anim>
+                                    <p:anim calcmode="lin" valueType="num">
+                                      <p:cBhvr>
+                                        <p:cTn id="8" dur="1000" fill="hold"/>
+                                        <p:tgtEl>
+                                          <p:spTgt spid="5"/>
+                                        </p:tgtEl>
+                                        <p:attrNameLst>
+                                          <p:attrName>ppt_h</p:attrName>
+                                        </p:attrNameLst>
+                                      </p:cBhvr>
+                                      <p:tavLst>
+                                        <p:tav tm="0">
+                                          <p:val>
+                                            <p:fltVal val="0"/>
+                                          </p:val>
+                                        </p:tav>
+                                        <p:tav tm="100000">
+                                          <p:val>
+                                            <p:strVal val="#ppt_h"/>
+                                          </p:val>
+                                        </p:tav>
+                                      </p:tavLst>
+                                    </p:anim>
+                                    <p:anim calcmode="lin" valueType="num">
+                                      <p:cBhvr>
+                                        <p:cTn id="9" dur="1000" fill="hold"/>
+                                        <p:tgtEl>
+                                          <p:spTgt spid="5"/>
+                                        </p:tgtEl>
+                                        <p:attrNameLst>
+                                          <p:attrName>style.rotation</p:attrName>
+                                        </p:attrNameLst>
+                                      </p:cBhvr>
+                                      <p:tavLst>
+                                        <p:tav tm="0">
+                                          <p:val>
+                                            <p:fltVal val="90"/>
+                                          </p:val>
+                                        </p:tav>
+                                        <p:tav tm="100000">
+                                          <p:val>
+                                            <p:fltVal val="0"/>
+                                          </p:val>
+                                        </p:tav>
+                                      </p:tavLst>
+                                    </p:anim>
+                                    <p:animEffect transition="in" filter="fade">
+                                      <p:cBhvr>
+                                        <p:cTn id="10" dur="1000"/>
+                                        <p:tgtEl>
+                                          <p:spTgt spid="5"/>
+                                        </p:tgtEl>
+                                      </p:cBhvr>
+                                    </p:animEffect>
+                                  </p:childTnLst>
+                                </p:cTn>
+                              </p:par>
+                            </p:childTnLst>
+                          </p:cTn>
+                        </p:par>
+                      </p:childTnLst>
+                    </p:cTn>
+                  </p:par>
+                </p:childTnLst>
+              </p:cTn>
+              <p:prevCondLst>
+                <p:cond evt="onPrev" delay="0">
+                  <p:tgtEl>
+                    <p:sldTgt/>
+                  </p:tgtEl>
+                </p:cond>
+              </p:prevCondLst>
+              <p:nextCondLst>
+                <p:cond evt="onNext" delay="0">
+                  <p:tgtEl>
+                    <p:sldTgt/>
+                  </p:tgtEl>
+                </p:cond>
+              </p:nextCondLst>
+            </p:seq>
+          </p:childTnLst>
+        </p:cTn>
+      </p:par>
+    </p:tnLst>
+    <p:bldLst>
+      <p:bldP spid="5" grpId="0"/>
+    </p:bldLst>
+  </p:timing>
 </p:sld>
 </file>
 
@@ -8206,121 +6725,118 @@
       </p:grpSpPr>
       <p:sp>
         <p:nvSpPr>
-          <p:cNvPr id="5" name="Прямоугольник 4"/>
-          <p:cNvSpPr/>
+          <p:cNvPr id="3" name="TextBox 2">
+            <a:extLst>
+              <a:ext uri="{FF2B5EF4-FFF2-40B4-BE49-F238E27FC236}">
+                <a16:creationId xmlns:a16="http://schemas.microsoft.com/office/drawing/2014/main" id="{CE42A5FA-3B5D-6286-A4B1-99A898A0CC2D}"/>
+              </a:ext>
+            </a:extLst>
+          </p:cNvPr>
+          <p:cNvSpPr txBox="1"/>
           <p:nvPr/>
         </p:nvSpPr>
         <p:spPr>
           <a:xfrm>
-            <a:off x="183278" y="2248238"/>
-            <a:ext cx="5029200" cy="4154984"/>
+            <a:off x="183278" y="183514"/>
+            <a:ext cx="2987806" cy="461665"/>
           </a:xfrm>
           <a:prstGeom prst="rect">
             <a:avLst/>
           </a:prstGeom>
+          <a:noFill/>
         </p:spPr>
         <p:txBody>
-          <a:bodyPr wrap="square">
+          <a:bodyPr wrap="none" rtlCol="0">
             <a:spAutoFit/>
           </a:bodyPr>
           <a:lstStyle/>
           <a:p>
             <a:r>
-              <a:rPr lang="ru-RU" sz="2400" b="1" dirty="0">
+              <a:rPr lang="ru-RU" sz="2400" dirty="0">
                 <a:latin typeface="Times New Roman" panose="02020603050405020304" pitchFamily="18" charset="0"/>
                 <a:cs typeface="Times New Roman" panose="02020603050405020304" pitchFamily="18" charset="0"/>
               </a:rPr>
-              <a:t>В ходе разработки мобильного приложения "Дневник настроения" успешно реализованы ключевые цели: создана интуитивная механика отслеживания эмоционального состояния, внедрена система аналитики и визуализации данных, а также обеспечена стабильная работа приложения на различных устройствах</a:t>
-            </a:r>
-            <a:r>
-              <a:rPr lang="ru-RU" b="1" dirty="0"/>
-              <a:t>.</a:t>
-            </a:r>
-            <a:endParaRPr lang="ru-RU" dirty="0">
-              <a:latin typeface="Arial Black" panose="020B0A04020102020204" pitchFamily="34" charset="0"/>
-            </a:endParaRPr>
+              <a:t>Спасибо за внимание</a:t>
+            </a:r>
           </a:p>
         </p:txBody>
       </p:sp>
       <p:pic>
         <p:nvPicPr>
-          <p:cNvPr id="6" name="Рисунок 5"/>
+          <p:cNvPr id="7170" name="Picture 2">
+            <a:extLst>
+              <a:ext uri="{FF2B5EF4-FFF2-40B4-BE49-F238E27FC236}">
+                <a16:creationId xmlns:a16="http://schemas.microsoft.com/office/drawing/2014/main" id="{CB8F0C79-B620-DA18-CADF-80C815B2157B}"/>
+              </a:ext>
+            </a:extLst>
+          </p:cNvPr>
           <p:cNvPicPr>
-            <a:picLocks noChangeAspect="1"/>
+            <a:picLocks noChangeAspect="1" noChangeArrowheads="1"/>
           </p:cNvPicPr>
           <p:nvPr/>
         </p:nvPicPr>
         <p:blipFill>
-          <a:blip r:embed="rId2"/>
+          <a:blip r:embed="rId2">
+            <a:extLst>
+              <a:ext uri="{28A0092B-C50C-407E-A947-70E740481C1C}">
+                <a14:useLocalDpi xmlns:a14="http://schemas.microsoft.com/office/drawing/2010/main" val="0"/>
+              </a:ext>
+            </a:extLst>
+          </a:blip>
+          <a:srcRect/>
           <a:stretch>
             <a:fillRect/>
           </a:stretch>
         </p:blipFill>
-        <p:spPr>
+        <p:spPr bwMode="auto">
           <a:xfrm>
-            <a:off x="8750749" y="183514"/>
-            <a:ext cx="3257973" cy="3283586"/>
+            <a:off x="0" y="0"/>
+            <a:ext cx="12192000" cy="6858000"/>
           </a:xfrm>
           <a:prstGeom prst="rect">
             <a:avLst/>
           </a:prstGeom>
-          <a:effectLst>
-            <a:glow rad="139700">
-              <a:schemeClr val="accent2">
-                <a:satMod val="175000"/>
-                <a:alpha val="40000"/>
-              </a:schemeClr>
-            </a:glow>
-          </a:effectLst>
-        </p:spPr>
-      </p:pic>
-      <p:pic>
-        <p:nvPicPr>
-          <p:cNvPr id="2" name="Рисунок 1"/>
-          <p:cNvPicPr>
-            <a:picLocks noChangeAspect="1"/>
-          </p:cNvPicPr>
-          <p:nvPr/>
-        </p:nvPicPr>
-        <p:blipFill>
-          <a:blip r:embed="rId3">
-            <a:extLst>
-              <a:ext uri="{28A0092B-C50C-407E-A947-70E740481C1C}">
-                <a14:useLocalDpi xmlns:a14="http://schemas.microsoft.com/office/drawing/2010/main" val="0"/>
-              </a:ext>
-            </a:extLst>
-          </a:blip>
-          <a:stretch>
-            <a:fillRect/>
-          </a:stretch>
-        </p:blipFill>
-        <p:spPr>
-          <a:xfrm>
-            <a:off x="-708506" y="-1603693"/>
-            <a:ext cx="6804506" cy="6858000"/>
-          </a:xfrm>
-          <a:prstGeom prst="rect">
-            <a:avLst/>
-          </a:prstGeom>
+          <a:noFill/>
+          <a:extLst>
+            <a:ext uri="{909E8E84-426E-40DD-AFC4-6F175D3DCCD1}">
+              <a14:hiddenFill xmlns:a14="http://schemas.microsoft.com/office/drawing/2010/main">
+                <a:solidFill>
+                  <a:srgbClr val="FFFFFF"/>
+                </a:solidFill>
+              </a14:hiddenFill>
+            </a:ext>
+          </a:extLst>
         </p:spPr>
       </p:pic>
     </p:spTree>
     <p:extLst>
       <p:ext uri="{BB962C8B-B14F-4D97-AF65-F5344CB8AC3E}">
-        <p14:creationId xmlns:p14="http://schemas.microsoft.com/office/powerpoint/2010/main" val="1272637628"/>
+        <p14:creationId xmlns:p14="http://schemas.microsoft.com/office/powerpoint/2010/main" val="4195785507"/>
       </p:ext>
     </p:extLst>
   </p:cSld>
   <p:clrMapOvr>
     <a:masterClrMapping/>
   </p:clrMapOvr>
+  <mc:AlternateContent xmlns:mc="http://schemas.openxmlformats.org/markup-compatibility/2006">
+    <mc:Choice xmlns:p14="http://schemas.microsoft.com/office/powerpoint/2010/main" Requires="p14">
+      <p:transition spd="slow" p14:dur="1600">
+        <p14:conveyor dir="l"/>
+      </p:transition>
+    </mc:Choice>
+    <mc:Fallback>
+      <p:transition spd="slow">
+        <p:fade/>
+      </p:transition>
+    </mc:Fallback>
+  </mc:AlternateContent>
 </p:sld>
 </file>
 
 <file path=ppt/theme/theme1.xml><?xml version="1.0" encoding="utf-8"?>
-<a:theme xmlns:a="http://schemas.openxmlformats.org/drawingml/2006/main" name="Сектор">
+<a:theme xmlns:a="http://schemas.openxmlformats.org/drawingml/2006/main" name="Тема Office">
   <a:themeElements>
-    <a:clrScheme name="Другая 1">
+    <a:clrScheme name="Стандартная">
       <a:dk1>
         <a:sysClr val="windowText" lastClr="000000"/>
       </a:dk1>
@@ -8328,48 +6844,100 @@
         <a:sysClr val="window" lastClr="FFFFFF"/>
       </a:lt1>
       <a:dk2>
-        <a:srgbClr val="242852"/>
+        <a:srgbClr val="44546A"/>
       </a:dk2>
       <a:lt2>
-        <a:srgbClr val="ACCBF9"/>
+        <a:srgbClr val="E7E6E6"/>
       </a:lt2>
       <a:accent1>
-        <a:srgbClr val="4A66AC"/>
+        <a:srgbClr val="4472C4"/>
       </a:accent1>
       <a:accent2>
-        <a:srgbClr val="629DD1"/>
+        <a:srgbClr val="ED7D31"/>
       </a:accent2>
       <a:accent3>
-        <a:srgbClr val="297FD5"/>
+        <a:srgbClr val="A5A5A5"/>
       </a:accent3>
       <a:accent4>
-        <a:srgbClr val="7F8FA9"/>
+        <a:srgbClr val="FFC000"/>
       </a:accent4>
       <a:accent5>
-        <a:srgbClr val="5AA2AE"/>
+        <a:srgbClr val="5B9BD5"/>
       </a:accent5>
       <a:accent6>
-        <a:srgbClr val="9D90A0"/>
+        <a:srgbClr val="70AD47"/>
       </a:accent6>
       <a:hlink>
-        <a:srgbClr val="9454C3"/>
+        <a:srgbClr val="0563C1"/>
       </a:hlink>
       <a:folHlink>
-        <a:srgbClr val="3EBBF0"/>
+        <a:srgbClr val="954F72"/>
       </a:folHlink>
     </a:clrScheme>
-    <a:fontScheme name="Сектор">
+    <a:fontScheme name="Стандартная">
       <a:majorFont>
-        <a:latin typeface="Century Gothic" panose="020B0502020202020204"/>
+        <a:latin typeface="Calibri Light" panose="020F0302020204030204"/>
         <a:ea typeface=""/>
         <a:cs typeface=""/>
-        <a:font script="Jpan" typeface="メイリオ"/>
-        <a:font script="Hang" typeface="HY중고딕"/>
-        <a:font script="Hans" typeface="幼圆"/>
-        <a:font script="Hant" typeface="微軟正黑體"/>
-        <a:font script="Arab" typeface="Tahoma"/>
-        <a:font script="Hebr" typeface="Gisha"/>
-        <a:font script="Thai" typeface="DilleniaUPC"/>
+        <a:font script="Jpan" typeface="游ゴシック Light"/>
+        <a:font script="Hang" typeface="맑은 고딕"/>
+        <a:font script="Hans" typeface="等线 Light"/>
+        <a:font script="Hant" typeface="新細明體"/>
+        <a:font script="Arab" typeface="Times New Roman"/>
+        <a:font script="Hebr" typeface="Times New Roman"/>
+        <a:font script="Thai" typeface="Angsana New"/>
+        <a:font script="Ethi" typeface="Nyala"/>
+        <a:font script="Beng" typeface="Vrinda"/>
+        <a:font script="Gujr" typeface="Shruti"/>
+        <a:font script="Khmr" typeface="MoolBoran"/>
+        <a:font script="Knda" typeface="Tunga"/>
+        <a:font script="Guru" typeface="Raavi"/>
+        <a:font script="Cans" typeface="Euphemia"/>
+        <a:font script="Cher" typeface="Plantagenet Cherokee"/>
+        <a:font script="Yiii" typeface="Microsoft Yi Baiti"/>
+        <a:font script="Tibt" typeface="Microsoft Himalaya"/>
+        <a:font script="Thaa" typeface="MV Boli"/>
+        <a:font script="Deva" typeface="Mangal"/>
+        <a:font script="Telu" typeface="Gautami"/>
+        <a:font script="Taml" typeface="Latha"/>
+        <a:font script="Syrc" typeface="Estrangelo Edessa"/>
+        <a:font script="Orya" typeface="Kalinga"/>
+        <a:font script="Mlym" typeface="Kartika"/>
+        <a:font script="Laoo" typeface="DokChampa"/>
+        <a:font script="Sinh" typeface="Iskoola Pota"/>
+        <a:font script="Mong" typeface="Mongolian Baiti"/>
+        <a:font script="Viet" typeface="Times New Roman"/>
+        <a:font script="Uigh" typeface="Microsoft Uighur"/>
+        <a:font script="Geor" typeface="Sylfaen"/>
+        <a:font script="Armn" typeface="Arial"/>
+        <a:font script="Bugi" typeface="Leelawadee UI"/>
+        <a:font script="Bopo" typeface="Microsoft JhengHei"/>
+        <a:font script="Java" typeface="Javanese Text"/>
+        <a:font script="Lisu" typeface="Segoe UI"/>
+        <a:font script="Mymr" typeface="Myanmar Text"/>
+        <a:font script="Nkoo" typeface="Ebrima"/>
+        <a:font script="Olck" typeface="Nirmala UI"/>
+        <a:font script="Osma" typeface="Ebrima"/>
+        <a:font script="Phag" typeface="Phagspa"/>
+        <a:font script="Syrn" typeface="Estrangelo Edessa"/>
+        <a:font script="Syrj" typeface="Estrangelo Edessa"/>
+        <a:font script="Syre" typeface="Estrangelo Edessa"/>
+        <a:font script="Sora" typeface="Nirmala UI"/>
+        <a:font script="Tale" typeface="Microsoft Tai Le"/>
+        <a:font script="Talu" typeface="Microsoft New Tai Lue"/>
+        <a:font script="Tfng" typeface="Ebrima"/>
+      </a:majorFont>
+      <a:minorFont>
+        <a:latin typeface="Calibri" panose="020F0502020204030204"/>
+        <a:ea typeface=""/>
+        <a:cs typeface=""/>
+        <a:font script="Jpan" typeface="游ゴシック"/>
+        <a:font script="Hang" typeface="맑은 고딕"/>
+        <a:font script="Hans" typeface="等线"/>
+        <a:font script="Hant" typeface="新細明體"/>
+        <a:font script="Arab" typeface="Arial"/>
+        <a:font script="Hebr" typeface="Arial"/>
+        <a:font script="Thai" typeface="Cordia New"/>
         <a:font script="Ethi" typeface="Nyala"/>
         <a:font script="Beng" typeface="Vrinda"/>
         <a:font script="Gujr" typeface="Shruti"/>
@@ -8390,47 +6958,29 @@
         <a:font script="Laoo" typeface="DokChampa"/>
         <a:font script="Sinh" typeface="Iskoola Pota"/>
         <a:font script="Mong" typeface="Mongolian Baiti"/>
-        <a:font script="Viet" typeface="Tahoma"/>
+        <a:font script="Viet" typeface="Arial"/>
         <a:font script="Uigh" typeface="Microsoft Uighur"/>
         <a:font script="Geor" typeface="Sylfaen"/>
-      </a:majorFont>
-      <a:minorFont>
-        <a:latin typeface="Century Gothic" panose="020B0502020202020204"/>
-        <a:ea typeface=""/>
-        <a:cs typeface=""/>
-        <a:font script="Jpan" typeface="メイリオ"/>
-        <a:font script="Hang" typeface="HY중고딕"/>
-        <a:font script="Hans" typeface="幼圆"/>
-        <a:font script="Hant" typeface="微軟正黑體"/>
-        <a:font script="Arab" typeface="Tahoma"/>
-        <a:font script="Hebr" typeface="Gisha"/>
-        <a:font script="Thai" typeface="DilleniaUPC"/>
-        <a:font script="Ethi" typeface="Nyala"/>
-        <a:font script="Beng" typeface="Vrinda"/>
-        <a:font script="Gujr" typeface="Shruti"/>
-        <a:font script="Khmr" typeface="DaunPenh"/>
-        <a:font script="Knda" typeface="Tunga"/>
-        <a:font script="Guru" typeface="Raavi"/>
-        <a:font script="Cans" typeface="Euphemia"/>
-        <a:font script="Cher" typeface="Plantagenet Cherokee"/>
-        <a:font script="Yiii" typeface="Microsoft Yi Baiti"/>
-        <a:font script="Tibt" typeface="Microsoft Himalaya"/>
-        <a:font script="Thaa" typeface="MV Boli"/>
-        <a:font script="Deva" typeface="Mangal"/>
-        <a:font script="Telu" typeface="Gautami"/>
-        <a:font script="Taml" typeface="Latha"/>
-        <a:font script="Syrc" typeface="Estrangelo Edessa"/>
-        <a:font script="Orya" typeface="Kalinga"/>
-        <a:font script="Mlym" typeface="Kartika"/>
-        <a:font script="Laoo" typeface="DokChampa"/>
-        <a:font script="Sinh" typeface="Iskoola Pota"/>
-        <a:font script="Mong" typeface="Mongolian Baiti"/>
-        <a:font script="Viet" typeface="Tahoma"/>
-        <a:font script="Uigh" typeface="Microsoft Uighur"/>
-        <a:font script="Geor" typeface="Sylfaen"/>
+        <a:font script="Armn" typeface="Arial"/>
+        <a:font script="Bugi" typeface="Leelawadee UI"/>
+        <a:font script="Bopo" typeface="Microsoft JhengHei"/>
+        <a:font script="Java" typeface="Javanese Text"/>
+        <a:font script="Lisu" typeface="Segoe UI"/>
+        <a:font script="Mymr" typeface="Myanmar Text"/>
+        <a:font script="Nkoo" typeface="Ebrima"/>
+        <a:font script="Olck" typeface="Nirmala UI"/>
+        <a:font script="Osma" typeface="Ebrima"/>
+        <a:font script="Phag" typeface="Phagspa"/>
+        <a:font script="Syrn" typeface="Estrangelo Edessa"/>
+        <a:font script="Syrj" typeface="Estrangelo Edessa"/>
+        <a:font script="Syre" typeface="Estrangelo Edessa"/>
+        <a:font script="Sora" typeface="Nirmala UI"/>
+        <a:font script="Tale" typeface="Microsoft Tai Le"/>
+        <a:font script="Talu" typeface="Microsoft New Tai Lue"/>
+        <a:font script="Tfng" typeface="Ebrima"/>
       </a:minorFont>
     </a:fontScheme>
-    <a:fmtScheme name="Сектор">
+    <a:fmtScheme name="Стандартная">
       <a:fillStyleLst>
         <a:solidFill>
           <a:schemeClr val="phClr"/>
@@ -8439,16 +6989,23 @@
           <a:gsLst>
             <a:gs pos="0">
               <a:schemeClr val="phClr">
-                <a:tint val="62000"/>
-                <a:hueMod val="94000"/>
-                <a:satMod val="140000"/>
                 <a:lumMod val="110000"/>
+                <a:satMod val="105000"/>
+                <a:tint val="67000"/>
+              </a:schemeClr>
+            </a:gs>
+            <a:gs pos="50000">
+              <a:schemeClr val="phClr">
+                <a:lumMod val="105000"/>
+                <a:satMod val="103000"/>
+                <a:tint val="73000"/>
               </a:schemeClr>
             </a:gs>
             <a:gs pos="100000">
               <a:schemeClr val="phClr">
-                <a:tint val="84000"/>
-                <a:satMod val="160000"/>
+                <a:lumMod val="105000"/>
+                <a:satMod val="109000"/>
+                <a:tint val="81000"/>
               </a:schemeClr>
             </a:gs>
           </a:gsLst>
@@ -8458,16 +7015,23 @@
           <a:gsLst>
             <a:gs pos="0">
               <a:schemeClr val="phClr">
-                <a:tint val="98000"/>
-                <a:hueMod val="94000"/>
-                <a:satMod val="130000"/>
-                <a:lumMod val="128000"/>
+                <a:satMod val="103000"/>
+                <a:lumMod val="102000"/>
+                <a:tint val="94000"/>
+              </a:schemeClr>
+            </a:gs>
+            <a:gs pos="50000">
+              <a:schemeClr val="phClr">
+                <a:satMod val="110000"/>
+                <a:lumMod val="100000"/>
+                <a:shade val="100000"/>
               </a:schemeClr>
             </a:gs>
             <a:gs pos="100000">
               <a:schemeClr val="phClr">
-                <a:shade val="94000"/>
-                <a:lumMod val="88000"/>
+                <a:lumMod val="99000"/>
+                <a:satMod val="120000"/>
+                <a:shade val="78000"/>
               </a:schemeClr>
             </a:gs>
           </a:gsLst>
@@ -8475,29 +7039,26 @@
         </a:gradFill>
       </a:fillStyleLst>
       <a:lnStyleLst>
-        <a:ln w="9525" cap="rnd" cmpd="sng" algn="ctr">
-          <a:solidFill>
-            <a:schemeClr val="phClr">
-              <a:tint val="76000"/>
-              <a:alpha val="60000"/>
-              <a:hueMod val="94000"/>
-            </a:schemeClr>
-          </a:solidFill>
-          <a:prstDash val="solid"/>
-        </a:ln>
-        <a:ln w="15875" cap="rnd" cmpd="sng" algn="ctr">
-          <a:solidFill>
-            <a:schemeClr val="phClr">
-              <a:hueMod val="94000"/>
-            </a:schemeClr>
-          </a:solidFill>
-          <a:prstDash val="solid"/>
-        </a:ln>
-        <a:ln w="28575" cap="rnd" cmpd="sng" algn="ctr">
+        <a:ln w="6350" cap="flat" cmpd="sng" algn="ctr">
           <a:solidFill>
             <a:schemeClr val="phClr"/>
           </a:solidFill>
           <a:prstDash val="solid"/>
+          <a:miter lim="800000"/>
+        </a:ln>
+        <a:ln w="12700" cap="flat" cmpd="sng" algn="ctr">
+          <a:solidFill>
+            <a:schemeClr val="phClr"/>
+          </a:solidFill>
+          <a:prstDash val="solid"/>
+          <a:miter lim="800000"/>
+        </a:ln>
+        <a:ln w="19050" cap="flat" cmpd="sng" algn="ctr">
+          <a:solidFill>
+            <a:schemeClr val="phClr"/>
+          </a:solidFill>
+          <a:prstDash val="solid"/>
+          <a:miter lim="800000"/>
         </a:ln>
       </a:lnStyleLst>
       <a:effectStyleLst>
@@ -8505,78 +7066,54 @@
           <a:effectLst/>
         </a:effectStyle>
         <a:effectStyle>
-          <a:effectLst>
-            <a:innerShdw blurRad="25400" dist="12700" dir="13500000">
-              <a:srgbClr val="000000">
-                <a:alpha val="45000"/>
-              </a:srgbClr>
-            </a:innerShdw>
-          </a:effectLst>
+          <a:effectLst/>
         </a:effectStyle>
         <a:effectStyle>
           <a:effectLst>
-            <a:outerShdw blurRad="50800" dist="38100" dir="5400000" rotWithShape="0">
+            <a:outerShdw blurRad="57150" dist="19050" dir="5400000" algn="ctr" rotWithShape="0">
               <a:srgbClr val="000000">
-                <a:alpha val="46000"/>
+                <a:alpha val="63000"/>
               </a:srgbClr>
             </a:outerShdw>
           </a:effectLst>
-          <a:scene3d>
-            <a:camera prst="orthographicFront">
-              <a:rot lat="0" lon="0" rev="0"/>
-            </a:camera>
-            <a:lightRig rig="threePt" dir="t"/>
-          </a:scene3d>
-          <a:sp3d prstMaterial="plastic">
-            <a:bevelT w="25400" h="25400"/>
-          </a:sp3d>
         </a:effectStyle>
       </a:effectStyleLst>
       <a:bgFillStyleLst>
         <a:solidFill>
           <a:schemeClr val="phClr"/>
         </a:solidFill>
+        <a:solidFill>
+          <a:schemeClr val="phClr">
+            <a:tint val="95000"/>
+            <a:satMod val="170000"/>
+          </a:schemeClr>
+        </a:solidFill>
         <a:gradFill rotWithShape="1">
           <a:gsLst>
-            <a:gs pos="10000">
+            <a:gs pos="0">
               <a:schemeClr val="phClr">
-                <a:tint val="97000"/>
-                <a:hueMod val="92000"/>
-                <a:satMod val="169000"/>
-                <a:lumMod val="164000"/>
+                <a:tint val="93000"/>
+                <a:satMod val="150000"/>
+                <a:shade val="98000"/>
+                <a:lumMod val="102000"/>
+              </a:schemeClr>
+            </a:gs>
+            <a:gs pos="50000">
+              <a:schemeClr val="phClr">
+                <a:tint val="98000"/>
+                <a:satMod val="130000"/>
+                <a:shade val="90000"/>
+                <a:lumMod val="103000"/>
               </a:schemeClr>
             </a:gs>
             <a:gs pos="100000">
               <a:schemeClr val="phClr">
-                <a:shade val="96000"/>
+                <a:shade val="63000"/>
                 <a:satMod val="120000"/>
-                <a:lumMod val="90000"/>
               </a:schemeClr>
             </a:gs>
           </a:gsLst>
-          <a:lin ang="6120000" scaled="1"/>
-        </a:gradFill>
-        <a:gradFill rotWithShape="1">
-          <a:gsLst>
-            <a:gs pos="0">
-              <a:schemeClr val="phClr">
-                <a:tint val="97000"/>
-                <a:hueMod val="92000"/>
-                <a:satMod val="169000"/>
-                <a:lumMod val="164000"/>
-              </a:schemeClr>
-            </a:gs>
-            <a:gs pos="100000">
-              <a:schemeClr val="phClr">
-                <a:shade val="96000"/>
-                <a:satMod val="120000"/>
-                <a:lumMod val="90000"/>
-              </a:schemeClr>
-            </a:gs>
-          </a:gsLst>
-          <a:path path="circle">
-            <a:fillToRect b="100000"/>
-          </a:path>
+          <a:lin ang="5400000" scaled="0"/>
         </a:gradFill>
       </a:bgFillStyleLst>
     </a:fmtScheme>
@@ -8585,7 +7122,7 @@
   <a:extraClrSchemeLst/>
   <a:extLst>
     <a:ext uri="{05A4C25C-085E-4340-85A3-A5531E510DB2}">
-      <thm15:themeFamily xmlns:thm15="http://schemas.microsoft.com/office/thememl/2012/main" name="Slice" id="{0507925B-6AC9-4358-8E18-C330545D08F8}" vid="{13FEC7C6-62A9-40C4-99D2-581AACACAA2F}"/>
+      <thm15:themeFamily xmlns:thm15="http://schemas.microsoft.com/office/thememl/2012/main" name="Office Theme" id="{62F939B6-93AF-4DB8-9C6B-D6C7DFDC589F}" vid="{4A3C46E8-61CC-4603-A589-7422A47A8E4A}"/>
     </a:ext>
   </a:extLst>
 </a:theme>
